--- a/static/ppts/G6_Sci_Continental_Drift.pptx
+++ b/static/ppts/G6_Sci_Continental_Drift.pptx
@@ -9,11 +9,9 @@
     <p:sldId id="257" r:id="rId3"/>
     <p:sldId id="258" r:id="rId4"/>
     <p:sldId id="259" r:id="rId5"/>
-    <p:sldId id="260" r:id="rId6"/>
-    <p:sldId id="261" r:id="rId7"/>
   </p:sldIdLst>
   <p:notesMasterIdLst>
-    <p:notesMasterId r:id="rId8"/>
+    <p:notesMasterId r:id="rId6"/>
   </p:notesMasterIdLst>
   <p:sldSz cx="9144000" cy="5143500"/>
   <p:notesSz cx="5143500" cy="9144000"/>
@@ -795,182 +793,6 @@
             <a:fld id="{F7021451-1387-4CA6-816F-3879F97B5CBC}" type="slidenum">
               <a:rPr lang="en-US"/>
               <a:t>4</a:t>
-            </a:fld>
-            <a:endParaRPr lang="en-US"/>
-          </a:p>
-        </p:txBody>
-      </p:sp>
-    </p:spTree>
-    <p:extLst>
-      <p:ext uri="{BB962C8B-B14F-4D97-AF65-F5344CB8AC3E}">
-        <p14:creationId xmlns:p14="http://schemas.microsoft.com/office/powerpoint/2010/main" val="1024086991"/>
-      </p:ext>
-    </p:extLst>
-  </p:cSld>
-  <p:clrMapOvr>
-    <a:masterClrMapping/>
-  </p:clrMapOvr>
-</p:notes>
-</file>
-
-<file path=ppt/notesSlides/notesSlide5.xml><?xml version="1.0" encoding="utf-8"?>
-<p:notes xmlns:a="http://schemas.openxmlformats.org/drawingml/2006/main" xmlns:r="http://schemas.openxmlformats.org/officeDocument/2006/relationships" xmlns:p="http://schemas.openxmlformats.org/presentationml/2006/main">
-  <p:cSld>
-    <p:spTree>
-      <p:nvGrpSpPr>
-        <p:cNvPr id="1" name=""/>
-        <p:cNvGrpSpPr/>
-        <p:nvPr/>
-      </p:nvGrpSpPr>
-      <p:grpSpPr>
-        <a:xfrm>
-          <a:off x="0" y="0"/>
-          <a:ext cx="0" cy="0"/>
-          <a:chOff x="0" y="0"/>
-          <a:chExt cx="0" cy="0"/>
-        </a:xfrm>
-      </p:grpSpPr>
-      <p:sp>
-        <p:nvSpPr>
-          <p:cNvPr id="2" name="Slide Image Placeholder 1"/>
-          <p:cNvSpPr>
-            <a:spLocks noGrp="1" noRot="1" noChangeAspect="1"/>
-          </p:cNvSpPr>
-          <p:nvPr>
-            <p:ph type="sldImg"/>
-          </p:nvPr>
-        </p:nvSpPr>
-        <p:spPr/>
-      </p:sp>
-      <p:sp>
-        <p:nvSpPr>
-          <p:cNvPr id="3" name="Notes Placeholder 2"/>
-          <p:cNvSpPr>
-            <a:spLocks noGrp="1"/>
-          </p:cNvSpPr>
-          <p:nvPr>
-            <p:ph type="body" idx="1"/>
-          </p:nvPr>
-        </p:nvSpPr>
-        <p:spPr/>
-        <p:txBody>
-          <a:bodyPr/>
-          <a:lstStyle/>
-          <a:p>
-            <a:r>
-              <a:rPr lang="en-US" dirty="0"/>
-              <a:t/>
-            </a:r>
-            <a:endParaRPr lang="en-US" dirty="0"/>
-          </a:p>
-        </p:txBody>
-      </p:sp>
-      <p:sp>
-        <p:nvSpPr>
-          <p:cNvPr id="4" name="Slide Number Placeholder 3"/>
-          <p:cNvSpPr>
-            <a:spLocks noGrp="1"/>
-          </p:cNvSpPr>
-          <p:nvPr>
-            <p:ph type="sldNum" sz="quarter" idx="10"/>
-          </p:nvPr>
-        </p:nvSpPr>
-        <p:spPr/>
-        <p:txBody>
-          <a:bodyPr/>
-          <a:lstStyle/>
-          <a:p>
-            <a:fld id="{F7021451-1387-4CA6-816F-3879F97B5CBC}" type="slidenum">
-              <a:rPr lang="en-US"/>
-              <a:t>5</a:t>
-            </a:fld>
-            <a:endParaRPr lang="en-US"/>
-          </a:p>
-        </p:txBody>
-      </p:sp>
-    </p:spTree>
-    <p:extLst>
-      <p:ext uri="{BB962C8B-B14F-4D97-AF65-F5344CB8AC3E}">
-        <p14:creationId xmlns:p14="http://schemas.microsoft.com/office/powerpoint/2010/main" val="1024086991"/>
-      </p:ext>
-    </p:extLst>
-  </p:cSld>
-  <p:clrMapOvr>
-    <a:masterClrMapping/>
-  </p:clrMapOvr>
-</p:notes>
-</file>
-
-<file path=ppt/notesSlides/notesSlide6.xml><?xml version="1.0" encoding="utf-8"?>
-<p:notes xmlns:a="http://schemas.openxmlformats.org/drawingml/2006/main" xmlns:r="http://schemas.openxmlformats.org/officeDocument/2006/relationships" xmlns:p="http://schemas.openxmlformats.org/presentationml/2006/main">
-  <p:cSld>
-    <p:spTree>
-      <p:nvGrpSpPr>
-        <p:cNvPr id="1" name=""/>
-        <p:cNvGrpSpPr/>
-        <p:nvPr/>
-      </p:nvGrpSpPr>
-      <p:grpSpPr>
-        <a:xfrm>
-          <a:off x="0" y="0"/>
-          <a:ext cx="0" cy="0"/>
-          <a:chOff x="0" y="0"/>
-          <a:chExt cx="0" cy="0"/>
-        </a:xfrm>
-      </p:grpSpPr>
-      <p:sp>
-        <p:nvSpPr>
-          <p:cNvPr id="2" name="Slide Image Placeholder 1"/>
-          <p:cNvSpPr>
-            <a:spLocks noGrp="1" noRot="1" noChangeAspect="1"/>
-          </p:cNvSpPr>
-          <p:nvPr>
-            <p:ph type="sldImg"/>
-          </p:nvPr>
-        </p:nvSpPr>
-        <p:spPr/>
-      </p:sp>
-      <p:sp>
-        <p:nvSpPr>
-          <p:cNvPr id="3" name="Notes Placeholder 2"/>
-          <p:cNvSpPr>
-            <a:spLocks noGrp="1"/>
-          </p:cNvSpPr>
-          <p:nvPr>
-            <p:ph type="body" idx="1"/>
-          </p:nvPr>
-        </p:nvSpPr>
-        <p:spPr/>
-        <p:txBody>
-          <a:bodyPr/>
-          <a:lstStyle/>
-          <a:p>
-            <a:r>
-              <a:rPr lang="en-US" dirty="0"/>
-              <a:t/>
-            </a:r>
-            <a:endParaRPr lang="en-US" dirty="0"/>
-          </a:p>
-        </p:txBody>
-      </p:sp>
-      <p:sp>
-        <p:nvSpPr>
-          <p:cNvPr id="4" name="Slide Number Placeholder 3"/>
-          <p:cNvSpPr>
-            <a:spLocks noGrp="1"/>
-          </p:cNvSpPr>
-          <p:nvPr>
-            <p:ph type="sldNum" sz="quarter" idx="10"/>
-          </p:nvPr>
-        </p:nvSpPr>
-        <p:spPr/>
-        <p:txBody>
-          <a:bodyPr/>
-          <a:lstStyle/>
-          <a:p>
-            <a:fld id="{F7021451-1387-4CA6-816F-3879F97B5CBC}" type="slidenum">
-              <a:rPr lang="en-US"/>
-              <a:t>6</a:t>
             </a:fld>
             <a:endParaRPr lang="en-US"/>
           </a:p>
@@ -1299,6 +1121,13 @@
 <file path=ppt/slides/slide1.xml><?xml version="1.0" encoding="utf-8"?>
 <p:sld xmlns:a="http://schemas.openxmlformats.org/drawingml/2006/main" xmlns:r="http://schemas.openxmlformats.org/officeDocument/2006/relationships" xmlns:p="http://schemas.openxmlformats.org/presentationml/2006/main">
   <p:cSld name="Slide 1">
+    <p:bg>
+      <p:bgPr>
+        <a:solidFill>
+          <a:srgbClr val="1B2A4A"/>
+        </a:solidFill>
+      </p:bgPr>
+    </p:bg>
     <p:spTree>
       <p:nvGrpSpPr>
         <p:cNvPr id="1" name=""/>
@@ -1322,47 +1151,27 @@
         <p:spPr>
           <a:xfrm>
             <a:off x="0" y="0"/>
-            <a:ext cx="9144000" cy="5143500"/>
+            <a:ext cx="109728" cy="5143500"/>
           </a:xfrm>
           <a:prstGeom prst="rect">
             <a:avLst/>
           </a:prstGeom>
           <a:solidFill>
-            <a:srgbClr val="1B2A4A"/>
+            <a:srgbClr val="2A9D8F"/>
           </a:solidFill>
           <a:ln/>
         </p:spPr>
       </p:sp>
       <p:sp>
         <p:nvSpPr>
-          <p:cNvPr id="3" name="Shape 1"/>
+          <p:cNvPr id="3" name="Text 1"/>
           <p:cNvSpPr/>
           <p:nvPr/>
         </p:nvSpPr>
         <p:spPr>
           <a:xfrm>
-            <a:off x="0" y="4777740"/>
-            <a:ext cx="9144000" cy="365760"/>
-          </a:xfrm>
-          <a:prstGeom prst="rect">
-            <a:avLst/>
-          </a:prstGeom>
-          <a:solidFill>
-            <a:srgbClr val="2A9D8F"/>
-          </a:solidFill>
-          <a:ln/>
-        </p:spPr>
-      </p:sp>
-      <p:sp>
-        <p:nvSpPr>
-          <p:cNvPr id="4" name="Text 2"/>
-          <p:cNvSpPr/>
-          <p:nvPr/>
-        </p:nvSpPr>
-        <p:spPr>
-          <a:xfrm>
-            <a:off x="731520" y="1097280"/>
-            <a:ext cx="7680960" cy="457200"/>
+            <a:off x="731520" y="1280160"/>
+            <a:ext cx="7772400" cy="1371600"/>
           </a:xfrm>
           <a:prstGeom prst="rect">
             <a:avLst/>
@@ -1378,46 +1187,7 @@
               <a:buNone/>
             </a:pPr>
             <a:r>
-              <a:rPr lang="en-US" sz="1400" b="1" spc="400" kern="0" dirty="0">
-                <a:solidFill>
-                  <a:srgbClr val="2A9D8F"/>
-                </a:solidFill>
-                <a:latin typeface="Calibri" pitchFamily="34" charset="0"/>
-                <a:ea typeface="Calibri" pitchFamily="34" charset="-122"/>
-                <a:cs typeface="Calibri" pitchFamily="34" charset="-120"/>
-              </a:rPr>
-              <a:t>GRADE 6 SCIENCE</a:t>
-            </a:r>
-            <a:endParaRPr lang="en-US" sz="1400" dirty="0"/>
-          </a:p>
-        </p:txBody>
-      </p:sp>
-      <p:sp>
-        <p:nvSpPr>
-          <p:cNvPr id="5" name="Text 3"/>
-          <p:cNvSpPr/>
-          <p:nvPr/>
-        </p:nvSpPr>
-        <p:spPr>
-          <a:xfrm>
-            <a:off x="731520" y="1645920"/>
-            <a:ext cx="7680960" cy="1463040"/>
-          </a:xfrm>
-          <a:prstGeom prst="rect">
-            <a:avLst/>
-          </a:prstGeom>
-          <a:noFill/>
-          <a:ln/>
-        </p:spPr>
-        <p:txBody>
-          <a:bodyPr wrap="square" rtlCol="0" anchor="t"/>
-          <a:lstStyle/>
-          <a:p>
-            <a:pPr indent="0" marL="0">
-              <a:buNone/>
-            </a:pPr>
-            <a:r>
-              <a:rPr lang="en-US" sz="4000" b="1" dirty="0">
+              <a:rPr lang="en-US" sz="3600" b="1" dirty="0">
                 <a:solidFill>
                   <a:srgbClr val="FFFFFF"/>
                 </a:solidFill>
@@ -1427,20 +1197,20 @@
               </a:rPr>
               <a:t>Continental Drift</a:t>
             </a:r>
-            <a:endParaRPr lang="en-US" sz="4000" dirty="0"/>
-          </a:p>
-        </p:txBody>
-      </p:sp>
-      <p:sp>
-        <p:nvSpPr>
-          <p:cNvPr id="6" name="Text 4"/>
+            <a:endParaRPr lang="en-US" sz="3600" dirty="0"/>
+          </a:p>
+        </p:txBody>
+      </p:sp>
+      <p:sp>
+        <p:nvSpPr>
+          <p:cNvPr id="4" name="Text 2"/>
           <p:cNvSpPr/>
           <p:nvPr/>
         </p:nvSpPr>
         <p:spPr>
           <a:xfrm>
-            <a:off x="731520" y="3200400"/>
-            <a:ext cx="7680960" cy="548640"/>
+            <a:off x="731520" y="2743200"/>
+            <a:ext cx="7772400" cy="548640"/>
           </a:xfrm>
           <a:prstGeom prst="rect">
             <a:avLst/>
@@ -1464,7 +1234,7 @@
                 <a:ea typeface="Calibri" pitchFamily="34" charset="-122"/>
                 <a:cs typeface="Calibri" pitchFamily="34" charset="-120"/>
               </a:rPr>
-              <a:t>How Wegener changed our understanding of Earth</a:t>
+              <a:t>G6 Science · Earth Science</a:t>
             </a:r>
             <a:endParaRPr lang="en-US" sz="1600" dirty="0"/>
           </a:p>
@@ -1472,14 +1242,14 @@
       </p:sp>
       <p:sp>
         <p:nvSpPr>
-          <p:cNvPr id="7" name="Text 5"/>
+          <p:cNvPr id="5" name="Text 3"/>
           <p:cNvSpPr/>
           <p:nvPr/>
         </p:nvSpPr>
         <p:spPr>
           <a:xfrm>
-            <a:off x="731520" y="4206240"/>
-            <a:ext cx="3657600" cy="365760"/>
+            <a:off x="731520" y="4389120"/>
+            <a:ext cx="7772400" cy="457200"/>
           </a:xfrm>
           <a:prstGeom prst="rect">
             <a:avLst/>
@@ -1495,7 +1265,7 @@
               <a:buNone/>
             </a:pPr>
             <a:r>
-              <a:rPr lang="en-US" sz="1100" dirty="0">
+              <a:rPr lang="en-US" sz="1000" dirty="0">
                 <a:solidFill>
                   <a:srgbClr val="6B6660"/>
                 </a:solidFill>
@@ -1503,9 +1273,9 @@
                 <a:ea typeface="Calibri" pitchFamily="34" charset="-122"/>
                 <a:cs typeface="Calibri" pitchFamily="34" charset="-120"/>
               </a:rPr>
-              <a:t>Mr Zocchi · NIS</a:t>
-            </a:r>
-            <a:endParaRPr lang="en-US" sz="1100" dirty="0"/>
+              <a:t>Mr Zocchi · mrzocchi.com</a:t>
+            </a:r>
+            <a:endParaRPr lang="en-US" sz="1000" dirty="0"/>
           </a:p>
         </p:txBody>
       </p:sp>
@@ -1520,6 +1290,13 @@
 <file path=ppt/slides/slide2.xml><?xml version="1.0" encoding="utf-8"?>
 <p:sld xmlns:a="http://schemas.openxmlformats.org/drawingml/2006/main" xmlns:r="http://schemas.openxmlformats.org/officeDocument/2006/relationships" xmlns:p="http://schemas.openxmlformats.org/presentationml/2006/main">
   <p:cSld name="Slide 2">
+    <p:bg>
+      <p:bgPr>
+        <a:solidFill>
+          <a:srgbClr val="FFFFFF"/>
+        </a:solidFill>
+      </p:bgPr>
+    </p:bg>
     <p:spTree>
       <p:nvGrpSpPr>
         <p:cNvPr id="1" name=""/>
@@ -1543,26 +1320,6 @@
         <p:spPr>
           <a:xfrm>
             <a:off x="0" y="0"/>
-            <a:ext cx="9144000" cy="5143500"/>
-          </a:xfrm>
-          <a:prstGeom prst="rect">
-            <a:avLst/>
-          </a:prstGeom>
-          <a:solidFill>
-            <a:srgbClr val="FAF8F5"/>
-          </a:solidFill>
-          <a:ln/>
-        </p:spPr>
-      </p:sp>
-      <p:sp>
-        <p:nvSpPr>
-          <p:cNvPr id="3" name="Shape 1"/>
-          <p:cNvSpPr/>
-          <p:nvPr/>
-        </p:nvSpPr>
-        <p:spPr>
-          <a:xfrm>
-            <a:off x="0" y="0"/>
             <a:ext cx="9144000" cy="54864"/>
           </a:xfrm>
           <a:prstGeom prst="rect">
@@ -1576,14 +1333,14 @@
       </p:sp>
       <p:sp>
         <p:nvSpPr>
-          <p:cNvPr id="4" name="Text 2"/>
+          <p:cNvPr id="3" name="Text 1"/>
           <p:cNvSpPr/>
           <p:nvPr/>
         </p:nvSpPr>
         <p:spPr>
           <a:xfrm>
-            <a:off x="640080" y="320040"/>
-            <a:ext cx="7863840" cy="640080"/>
+            <a:off x="548640" y="274320"/>
+            <a:ext cx="8046720" cy="640080"/>
           </a:xfrm>
           <a:prstGeom prst="rect">
             <a:avLst/>
@@ -1607,7 +1364,7 @@
                 <a:ea typeface="Georgia" pitchFamily="34" charset="-122"/>
                 <a:cs typeface="Georgia" pitchFamily="34" charset="-120"/>
               </a:rPr>
-              <a:t>Wegener's Big Idea (1912)</a:t>
+              <a:t>Wegener's Theory</a:t>
             </a:r>
             <a:endParaRPr lang="en-US" sz="2600" dirty="0"/>
           </a:p>
@@ -1615,14 +1372,14 @@
       </p:sp>
       <p:sp>
         <p:nvSpPr>
-          <p:cNvPr id="5" name="Text 3"/>
+          <p:cNvPr id="4" name="Text 2"/>
           <p:cNvSpPr/>
           <p:nvPr/>
         </p:nvSpPr>
         <p:spPr>
           <a:xfrm>
-            <a:off x="640080" y="1188720"/>
-            <a:ext cx="7863840" cy="3200400"/>
+            <a:off x="548640" y="1097280"/>
+            <a:ext cx="8046720" cy="3474720"/>
           </a:xfrm>
           <a:prstGeom prst="rect">
             <a:avLst/>
@@ -1635,9 +1392,9 @@
           <a:lstStyle/>
           <a:p>
             <a:pPr marL="342900" indent="-342900">
-              <a:lnSpc>
-                <a:spcPct val="140000"/>
-              </a:lnSpc>
+              <a:spcAft>
+                <a:spcPts val="800"/>
+              </a:spcAft>
               <a:buSzPct val="100000"/>
               <a:buChar char="•"/>
             </a:pPr>
@@ -1650,15 +1407,15 @@
                 <a:ea typeface="Calibri" pitchFamily="34" charset="-122"/>
                 <a:cs typeface="Calibri" pitchFamily="34" charset="-120"/>
               </a:rPr>
-              <a:t>Alfred Wegener proposed that all continents were once joined in a supercontinent called Pangaea.</a:t>
+              <a:t>Alfred Wegener proposed that continents were once joined as 'Pangaea'</a:t>
             </a:r>
             <a:endParaRPr lang="en-US" sz="1500" dirty="0"/>
           </a:p>
           <a:p>
             <a:pPr marL="342900" indent="-342900">
-              <a:lnSpc>
-                <a:spcPct val="140000"/>
-              </a:lnSpc>
+              <a:spcAft>
+                <a:spcPts val="800"/>
+              </a:spcAft>
               <a:buSzPct val="100000"/>
               <a:buChar char="•"/>
             </a:pPr>
@@ -1671,15 +1428,15 @@
                 <a:ea typeface="Calibri" pitchFamily="34" charset="-122"/>
                 <a:cs typeface="Calibri" pitchFamily="34" charset="-120"/>
               </a:rPr>
-              <a:t>Pangaea means 'all lands' in Greek.</a:t>
+              <a:t>Pangaea (~300 million years ago) slowly broke apart and drifted</a:t>
             </a:r>
             <a:endParaRPr lang="en-US" sz="1500" dirty="0"/>
           </a:p>
           <a:p>
             <a:pPr marL="342900" indent="-342900">
-              <a:lnSpc>
-                <a:spcPct val="140000"/>
-              </a:lnSpc>
+              <a:spcAft>
+                <a:spcPts val="800"/>
+              </a:spcAft>
               <a:buSzPct val="100000"/>
               <a:buChar char="•"/>
             </a:pPr>
@@ -1692,15 +1449,15 @@
                 <a:ea typeface="Calibri" pitchFamily="34" charset="-122"/>
                 <a:cs typeface="Calibri" pitchFamily="34" charset="-120"/>
               </a:rPr>
-              <a:t>It broke apart ~200 million years ago.</a:t>
+              <a:t>Continents fit together like a jigsaw puzzle (especially Africa + South America)</a:t>
             </a:r>
             <a:endParaRPr lang="en-US" sz="1500" dirty="0"/>
           </a:p>
           <a:p>
             <a:pPr marL="342900" indent="-342900">
-              <a:lnSpc>
-                <a:spcPct val="140000"/>
-              </a:lnSpc>
+              <a:spcAft>
+                <a:spcPts val="800"/>
+              </a:spcAft>
               <a:buSzPct val="100000"/>
               <a:buChar char="•"/>
             </a:pPr>
@@ -1713,30 +1470,45 @@
                 <a:ea typeface="Calibri" pitchFamily="34" charset="-122"/>
                 <a:cs typeface="Calibri" pitchFamily="34" charset="-120"/>
               </a:rPr>
-              <a:t>The pieces slowly drifted to where they are today.</a:t>
+              <a:t>His theory was rejected at first — he couldn't explain HOW continents moved</a:t>
             </a:r>
             <a:endParaRPr lang="en-US" sz="1500" dirty="0"/>
           </a:p>
-          <a:p>
-            <a:pPr marL="342900" indent="-342900">
-              <a:lnSpc>
-                <a:spcPct val="140000"/>
-              </a:lnSpc>
-              <a:buSzPct val="100000"/>
-              <a:buChar char="•"/>
+        </p:txBody>
+      </p:sp>
+      <p:sp>
+        <p:nvSpPr>
+          <p:cNvPr id="5" name="Text 3"/>
+          <p:cNvSpPr/>
+          <p:nvPr/>
+        </p:nvSpPr>
+        <p:spPr>
+          <a:xfrm>
+            <a:off x="548640" y="4800600"/>
+            <a:ext cx="3657600" cy="274320"/>
+          </a:xfrm>
+          <a:prstGeom prst="rect">
+            <a:avLst/>
+          </a:prstGeom>
+          <a:noFill/>
+          <a:ln/>
+        </p:spPr>
+        <p:txBody>
+          <a:bodyPr wrap="square" rtlCol="0" anchor="ctr"/>
+          <a:lstStyle/>
+          <a:p>
+            <a:pPr indent="0" marL="0">
+              <a:buNone/>
             </a:pPr>
             <a:r>
-              <a:rPr lang="en-US" sz="1500" dirty="0">
+              <a:rPr lang="en-US" sz="800" dirty="0">
                 <a:solidFill>
-                  <a:srgbClr val="3D3A36"/>
+                  <a:srgbClr val="9B9690"/>
                 </a:solidFill>
-                <a:latin typeface="Calibri" pitchFamily="34" charset="0"/>
-                <a:ea typeface="Calibri" pitchFamily="34" charset="-122"/>
-                <a:cs typeface="Calibri" pitchFamily="34" charset="-120"/>
               </a:rPr>
-              <a:t>He called this idea continental drift.</a:t>
-            </a:r>
-            <a:endParaRPr lang="en-US" sz="1500" dirty="0"/>
+              <a:t>mrzocchi.com</a:t>
+            </a:r>
+            <a:endParaRPr lang="en-US" sz="800" dirty="0"/>
           </a:p>
         </p:txBody>
       </p:sp>
@@ -1751,6 +1523,13 @@
 <file path=ppt/slides/slide3.xml><?xml version="1.0" encoding="utf-8"?>
 <p:sld xmlns:a="http://schemas.openxmlformats.org/drawingml/2006/main" xmlns:r="http://schemas.openxmlformats.org/officeDocument/2006/relationships" xmlns:p="http://schemas.openxmlformats.org/presentationml/2006/main">
   <p:cSld name="Slide 3">
+    <p:bg>
+      <p:bgPr>
+        <a:solidFill>
+          <a:srgbClr val="FFFFFF"/>
+        </a:solidFill>
+      </p:bgPr>
+    </p:bg>
     <p:spTree>
       <p:nvGrpSpPr>
         <p:cNvPr id="1" name=""/>
@@ -1774,26 +1553,6 @@
         <p:spPr>
           <a:xfrm>
             <a:off x="0" y="0"/>
-            <a:ext cx="9144000" cy="5143500"/>
-          </a:xfrm>
-          <a:prstGeom prst="rect">
-            <a:avLst/>
-          </a:prstGeom>
-          <a:solidFill>
-            <a:srgbClr val="FAF8F5"/>
-          </a:solidFill>
-          <a:ln/>
-        </p:spPr>
-      </p:sp>
-      <p:sp>
-        <p:nvSpPr>
-          <p:cNvPr id="3" name="Shape 1"/>
-          <p:cNvSpPr/>
-          <p:nvPr/>
-        </p:nvSpPr>
-        <p:spPr>
-          <a:xfrm>
-            <a:off x="0" y="0"/>
             <a:ext cx="9144000" cy="54864"/>
           </a:xfrm>
           <a:prstGeom prst="rect">
@@ -1807,14 +1566,14 @@
       </p:sp>
       <p:sp>
         <p:nvSpPr>
-          <p:cNvPr id="4" name="Text 2"/>
+          <p:cNvPr id="3" name="Text 1"/>
           <p:cNvSpPr/>
           <p:nvPr/>
         </p:nvSpPr>
         <p:spPr>
           <a:xfrm>
-            <a:off x="640080" y="320040"/>
-            <a:ext cx="7863840" cy="548640"/>
+            <a:off x="548640" y="274320"/>
+            <a:ext cx="8046720" cy="640080"/>
           </a:xfrm>
           <a:prstGeom prst="rect">
             <a:avLst/>
@@ -1838,708 +1597,175 @@
                 <a:ea typeface="Georgia" pitchFamily="34" charset="-122"/>
                 <a:cs typeface="Georgia" pitchFamily="34" charset="-120"/>
               </a:rPr>
-              <a:t>Wegener's Evidence</a:t>
+              <a:t>Evidence for Continental Drift</a:t>
             </a:r>
             <a:endParaRPr lang="en-US" sz="2600" dirty="0"/>
           </a:p>
         </p:txBody>
       </p:sp>
-      <p:graphicFrame>
-        <p:nvGraphicFramePr>
-          <p:cNvPr id="4" name="Table 0"/>
-          <p:cNvGraphicFramePr>
-            <a:graphicFrameLocks noGrp="1"/>
-          </p:cNvGraphicFramePr>
-          <p:nvPr>
-            <p:extLst>
-              <p:ext uri="{D42A27DB-BD31-4B8C-83A1-F6EECF244321}">
-                <p14:modId xmlns:p14="http://schemas.microsoft.com/office/powerpoint/2010/main" val="1579011935"/>
-              </p:ext>
-            </p:extLst>
-          </p:nvPr>
-        </p:nvGraphicFramePr>
-        <p:xfrm>
-          <a:off x="640080" y="1051560"/>
-          <a:ext cx="7863840" cy="914400"/>
-        </p:xfrm>
-        <a:graphic>
-          <a:graphicData uri="http://schemas.openxmlformats.org/drawingml/2006/table">
-            <a:tbl>
-              <a:tblPr/>
-              <a:tblGrid>
-                <a:gridCol w="3931920"/>
-                <a:gridCol w="3931920"/>
-              </a:tblGrid>
-              <a:tr h="502920">
-                <a:tc>
-                  <a:txBody>
-                    <a:bodyPr/>
-                    <a:lstStyle/>
-                    <a:p>
-                      <a:pPr indent="0" marL="0">
-                        <a:buNone/>
-                      </a:pPr>
-                      <a:r>
-                        <a:rPr lang="en-US" sz="1200" b="1" dirty="0">
-                          <a:solidFill>
-                            <a:srgbClr val="FFFFFF"/>
-                          </a:solidFill>
-                          <a:latin typeface="Calibri" pitchFamily="34" charset="0"/>
-                          <a:ea typeface="Calibri" pitchFamily="34" charset="-122"/>
-                          <a:cs typeface="Calibri" pitchFamily="34" charset="-120"/>
-                        </a:rPr>
-                        <a:t>Evidence Type</a:t>
-                      </a:r>
-                      <a:endParaRPr lang="en-US" sz="1200" dirty="0">
-                        <a:latin typeface="Calibri" charset="0"/>
-                        <a:ea typeface="Calibri" charset="0"/>
-                        <a:cs typeface="Calibri" charset="0"/>
-                      </a:endParaRPr>
-                    </a:p>
-                  </a:txBody>
-                  <a:tcPr marL="91440" marR="91440" marT="45720" marB="45720">
-                    <a:lnL w="6350" cap="flat" cmpd="sng" algn="ctr">
-                      <a:solidFill>
-                        <a:srgbClr val="E5E2DC"/>
-                      </a:solidFill>
-                      <a:prstDash val="solid"/>
-                      <a:round/>
-                      <a:headEnd type="none" w="med" len="med"/>
-                      <a:tailEnd type="none" w="med" len="med"/>
-                    </a:lnL>
-                    <a:lnR w="6350" cap="flat" cmpd="sng" algn="ctr">
-                      <a:solidFill>
-                        <a:srgbClr val="E5E2DC"/>
-                      </a:solidFill>
-                      <a:prstDash val="solid"/>
-                      <a:round/>
-                      <a:headEnd type="none" w="med" len="med"/>
-                      <a:tailEnd type="none" w="med" len="med"/>
-                    </a:lnR>
-                    <a:lnT w="6350" cap="flat" cmpd="sng" algn="ctr">
-                      <a:solidFill>
-                        <a:srgbClr val="E5E2DC"/>
-                      </a:solidFill>
-                      <a:prstDash val="solid"/>
-                      <a:round/>
-                      <a:headEnd type="none" w="med" len="med"/>
-                      <a:tailEnd type="none" w="med" len="med"/>
-                    </a:lnT>
-                    <a:lnB w="6350" cap="flat" cmpd="sng" algn="ctr">
-                      <a:solidFill>
-                        <a:srgbClr val="E5E2DC"/>
-                      </a:solidFill>
-                      <a:prstDash val="solid"/>
-                      <a:round/>
-                      <a:headEnd type="none" w="med" len="med"/>
-                      <a:tailEnd type="none" w="med" len="med"/>
-                    </a:lnB>
-                    <a:solidFill>
-                      <a:srgbClr val="2A9D8F"/>
-                    </a:solidFill>
-                  </a:tcPr>
-                </a:tc>
-                <a:tc>
-                  <a:txBody>
-                    <a:bodyPr/>
-                    <a:lstStyle/>
-                    <a:p>
-                      <a:pPr indent="0" marL="0">
-                        <a:buNone/>
-                      </a:pPr>
-                      <a:r>
-                        <a:rPr lang="en-US" sz="1200" b="1" dirty="0">
-                          <a:solidFill>
-                            <a:srgbClr val="FFFFFF"/>
-                          </a:solidFill>
-                          <a:latin typeface="Calibri" pitchFamily="34" charset="0"/>
-                          <a:ea typeface="Calibri" pitchFamily="34" charset="-122"/>
-                          <a:cs typeface="Calibri" pitchFamily="34" charset="-120"/>
-                        </a:rPr>
-                        <a:t>What It Shows</a:t>
-                      </a:r>
-                      <a:endParaRPr lang="en-US" sz="1200" dirty="0">
-                        <a:latin typeface="Calibri" charset="0"/>
-                        <a:ea typeface="Calibri" charset="0"/>
-                        <a:cs typeface="Calibri" charset="0"/>
-                      </a:endParaRPr>
-                    </a:p>
-                  </a:txBody>
-                  <a:tcPr marL="91440" marR="91440" marT="45720" marB="45720">
-                    <a:lnL w="6350" cap="flat" cmpd="sng" algn="ctr">
-                      <a:solidFill>
-                        <a:srgbClr val="E5E2DC"/>
-                      </a:solidFill>
-                      <a:prstDash val="solid"/>
-                      <a:round/>
-                      <a:headEnd type="none" w="med" len="med"/>
-                      <a:tailEnd type="none" w="med" len="med"/>
-                    </a:lnL>
-                    <a:lnR w="6350" cap="flat" cmpd="sng" algn="ctr">
-                      <a:solidFill>
-                        <a:srgbClr val="E5E2DC"/>
-                      </a:solidFill>
-                      <a:prstDash val="solid"/>
-                      <a:round/>
-                      <a:headEnd type="none" w="med" len="med"/>
-                      <a:tailEnd type="none" w="med" len="med"/>
-                    </a:lnR>
-                    <a:lnT w="6350" cap="flat" cmpd="sng" algn="ctr">
-                      <a:solidFill>
-                        <a:srgbClr val="E5E2DC"/>
-                      </a:solidFill>
-                      <a:prstDash val="solid"/>
-                      <a:round/>
-                      <a:headEnd type="none" w="med" len="med"/>
-                      <a:tailEnd type="none" w="med" len="med"/>
-                    </a:lnT>
-                    <a:lnB w="6350" cap="flat" cmpd="sng" algn="ctr">
-                      <a:solidFill>
-                        <a:srgbClr val="E5E2DC"/>
-                      </a:solidFill>
-                      <a:prstDash val="solid"/>
-                      <a:round/>
-                      <a:headEnd type="none" w="med" len="med"/>
-                      <a:tailEnd type="none" w="med" len="med"/>
-                    </a:lnB>
-                    <a:solidFill>
-                      <a:srgbClr val="2A9D8F"/>
-                    </a:solidFill>
-                  </a:tcPr>
-                </a:tc>
-              </a:tr>
-              <a:tr h="502920">
-                <a:tc>
-                  <a:txBody>
-                    <a:bodyPr/>
-                    <a:lstStyle/>
-                    <a:p>
-                      <a:pPr indent="0" marL="0">
-                        <a:buNone/>
-                      </a:pPr>
-                      <a:r>
-                        <a:rPr lang="en-US" sz="1200" dirty="0">
-                          <a:solidFill>
-                            <a:srgbClr val="3D3A36"/>
-                          </a:solidFill>
-                          <a:latin typeface="Calibri" pitchFamily="34" charset="0"/>
-                          <a:ea typeface="Calibri" pitchFamily="34" charset="-122"/>
-                          <a:cs typeface="Calibri" pitchFamily="34" charset="-120"/>
-                        </a:rPr>
-                        <a:t>Fossil evidence</a:t>
-                      </a:r>
-                      <a:endParaRPr lang="en-US" sz="1200" dirty="0">
-                        <a:latin typeface="Calibri" charset="0"/>
-                        <a:ea typeface="Calibri" charset="0"/>
-                        <a:cs typeface="Calibri" charset="0"/>
-                      </a:endParaRPr>
-                    </a:p>
-                  </a:txBody>
-                  <a:tcPr marL="91440" marR="91440" marT="45720" marB="45720">
-                    <a:lnL w="6350" cap="flat" cmpd="sng" algn="ctr">
-                      <a:solidFill>
-                        <a:srgbClr val="E5E2DC"/>
-                      </a:solidFill>
-                      <a:prstDash val="solid"/>
-                      <a:round/>
-                      <a:headEnd type="none" w="med" len="med"/>
-                      <a:tailEnd type="none" w="med" len="med"/>
-                    </a:lnL>
-                    <a:lnR w="6350" cap="flat" cmpd="sng" algn="ctr">
-                      <a:solidFill>
-                        <a:srgbClr val="E5E2DC"/>
-                      </a:solidFill>
-                      <a:prstDash val="solid"/>
-                      <a:round/>
-                      <a:headEnd type="none" w="med" len="med"/>
-                      <a:tailEnd type="none" w="med" len="med"/>
-                    </a:lnR>
-                    <a:lnT w="6350" cap="flat" cmpd="sng" algn="ctr">
-                      <a:solidFill>
-                        <a:srgbClr val="E5E2DC"/>
-                      </a:solidFill>
-                      <a:prstDash val="solid"/>
-                      <a:round/>
-                      <a:headEnd type="none" w="med" len="med"/>
-                      <a:tailEnd type="none" w="med" len="med"/>
-                    </a:lnT>
-                    <a:lnB w="6350" cap="flat" cmpd="sng" algn="ctr">
-                      <a:solidFill>
-                        <a:srgbClr val="E5E2DC"/>
-                      </a:solidFill>
-                      <a:prstDash val="solid"/>
-                      <a:round/>
-                      <a:headEnd type="none" w="med" len="med"/>
-                      <a:tailEnd type="none" w="med" len="med"/>
-                    </a:lnB>
-                  </a:tcPr>
-                </a:tc>
-                <a:tc>
-                  <a:txBody>
-                    <a:bodyPr/>
-                    <a:lstStyle/>
-                    <a:p>
-                      <a:pPr indent="0" marL="0">
-                        <a:buNone/>
-                      </a:pPr>
-                      <a:r>
-                        <a:rPr lang="en-US" sz="1200" dirty="0">
-                          <a:solidFill>
-                            <a:srgbClr val="3D3A36"/>
-                          </a:solidFill>
-                          <a:latin typeface="Calibri" pitchFamily="34" charset="0"/>
-                          <a:ea typeface="Calibri" pitchFamily="34" charset="-122"/>
-                          <a:cs typeface="Calibri" pitchFamily="34" charset="-120"/>
-                        </a:rPr>
-                        <a:t>Same fossils on continents separated by oceans (e.g. Mesosaurus)</a:t>
-                      </a:r>
-                      <a:endParaRPr lang="en-US" sz="1200" dirty="0">
-                        <a:latin typeface="Calibri" charset="0"/>
-                        <a:ea typeface="Calibri" charset="0"/>
-                        <a:cs typeface="Calibri" charset="0"/>
-                      </a:endParaRPr>
-                    </a:p>
-                  </a:txBody>
-                  <a:tcPr marL="91440" marR="91440" marT="45720" marB="45720">
-                    <a:lnL w="6350" cap="flat" cmpd="sng" algn="ctr">
-                      <a:solidFill>
-                        <a:srgbClr val="E5E2DC"/>
-                      </a:solidFill>
-                      <a:prstDash val="solid"/>
-                      <a:round/>
-                      <a:headEnd type="none" w="med" len="med"/>
-                      <a:tailEnd type="none" w="med" len="med"/>
-                    </a:lnL>
-                    <a:lnR w="6350" cap="flat" cmpd="sng" algn="ctr">
-                      <a:solidFill>
-                        <a:srgbClr val="E5E2DC"/>
-                      </a:solidFill>
-                      <a:prstDash val="solid"/>
-                      <a:round/>
-                      <a:headEnd type="none" w="med" len="med"/>
-                      <a:tailEnd type="none" w="med" len="med"/>
-                    </a:lnR>
-                    <a:lnT w="6350" cap="flat" cmpd="sng" algn="ctr">
-                      <a:solidFill>
-                        <a:srgbClr val="E5E2DC"/>
-                      </a:solidFill>
-                      <a:prstDash val="solid"/>
-                      <a:round/>
-                      <a:headEnd type="none" w="med" len="med"/>
-                      <a:tailEnd type="none" w="med" len="med"/>
-                    </a:lnT>
-                    <a:lnB w="6350" cap="flat" cmpd="sng" algn="ctr">
-                      <a:solidFill>
-                        <a:srgbClr val="E5E2DC"/>
-                      </a:solidFill>
-                      <a:prstDash val="solid"/>
-                      <a:round/>
-                      <a:headEnd type="none" w="med" len="med"/>
-                      <a:tailEnd type="none" w="med" len="med"/>
-                    </a:lnB>
-                  </a:tcPr>
-                </a:tc>
-              </a:tr>
-              <a:tr h="502920">
-                <a:tc>
-                  <a:txBody>
-                    <a:bodyPr/>
-                    <a:lstStyle/>
-                    <a:p>
-                      <a:pPr indent="0" marL="0">
-                        <a:buNone/>
-                      </a:pPr>
-                      <a:r>
-                        <a:rPr lang="en-US" sz="1200" dirty="0">
-                          <a:solidFill>
-                            <a:srgbClr val="3D3A36"/>
-                          </a:solidFill>
-                          <a:latin typeface="Calibri" pitchFamily="34" charset="0"/>
-                          <a:ea typeface="Calibri" pitchFamily="34" charset="-122"/>
-                          <a:cs typeface="Calibri" pitchFamily="34" charset="-120"/>
-                        </a:rPr>
-                        <a:t>Rock evidence</a:t>
-                      </a:r>
-                      <a:endParaRPr lang="en-US" sz="1200" dirty="0">
-                        <a:latin typeface="Calibri" charset="0"/>
-                        <a:ea typeface="Calibri" charset="0"/>
-                        <a:cs typeface="Calibri" charset="0"/>
-                      </a:endParaRPr>
-                    </a:p>
-                  </a:txBody>
-                  <a:tcPr marL="91440" marR="91440" marT="45720" marB="45720">
-                    <a:lnL w="6350" cap="flat" cmpd="sng" algn="ctr">
-                      <a:solidFill>
-                        <a:srgbClr val="E5E2DC"/>
-                      </a:solidFill>
-                      <a:prstDash val="solid"/>
-                      <a:round/>
-                      <a:headEnd type="none" w="med" len="med"/>
-                      <a:tailEnd type="none" w="med" len="med"/>
-                    </a:lnL>
-                    <a:lnR w="6350" cap="flat" cmpd="sng" algn="ctr">
-                      <a:solidFill>
-                        <a:srgbClr val="E5E2DC"/>
-                      </a:solidFill>
-                      <a:prstDash val="solid"/>
-                      <a:round/>
-                      <a:headEnd type="none" w="med" len="med"/>
-                      <a:tailEnd type="none" w="med" len="med"/>
-                    </a:lnR>
-                    <a:lnT w="6350" cap="flat" cmpd="sng" algn="ctr">
-                      <a:solidFill>
-                        <a:srgbClr val="E5E2DC"/>
-                      </a:solidFill>
-                      <a:prstDash val="solid"/>
-                      <a:round/>
-                      <a:headEnd type="none" w="med" len="med"/>
-                      <a:tailEnd type="none" w="med" len="med"/>
-                    </a:lnT>
-                    <a:lnB w="6350" cap="flat" cmpd="sng" algn="ctr">
-                      <a:solidFill>
-                        <a:srgbClr val="E5E2DC"/>
-                      </a:solidFill>
-                      <a:prstDash val="solid"/>
-                      <a:round/>
-                      <a:headEnd type="none" w="med" len="med"/>
-                      <a:tailEnd type="none" w="med" len="med"/>
-                    </a:lnB>
-                  </a:tcPr>
-                </a:tc>
-                <a:tc>
-                  <a:txBody>
-                    <a:bodyPr/>
-                    <a:lstStyle/>
-                    <a:p>
-                      <a:pPr indent="0" marL="0">
-                        <a:buNone/>
-                      </a:pPr>
-                      <a:r>
-                        <a:rPr lang="en-US" sz="1200" dirty="0">
-                          <a:solidFill>
-                            <a:srgbClr val="3D3A36"/>
-                          </a:solidFill>
-                          <a:latin typeface="Calibri" pitchFamily="34" charset="0"/>
-                          <a:ea typeface="Calibri" pitchFamily="34" charset="-122"/>
-                          <a:cs typeface="Calibri" pitchFamily="34" charset="-120"/>
-                        </a:rPr>
-                        <a:t>Matching rock types and mountains line up across continents</a:t>
-                      </a:r>
-                      <a:endParaRPr lang="en-US" sz="1200" dirty="0">
-                        <a:latin typeface="Calibri" charset="0"/>
-                        <a:ea typeface="Calibri" charset="0"/>
-                        <a:cs typeface="Calibri" charset="0"/>
-                      </a:endParaRPr>
-                    </a:p>
-                  </a:txBody>
-                  <a:tcPr marL="91440" marR="91440" marT="45720" marB="45720">
-                    <a:lnL w="6350" cap="flat" cmpd="sng" algn="ctr">
-                      <a:solidFill>
-                        <a:srgbClr val="E5E2DC"/>
-                      </a:solidFill>
-                      <a:prstDash val="solid"/>
-                      <a:round/>
-                      <a:headEnd type="none" w="med" len="med"/>
-                      <a:tailEnd type="none" w="med" len="med"/>
-                    </a:lnL>
-                    <a:lnR w="6350" cap="flat" cmpd="sng" algn="ctr">
-                      <a:solidFill>
-                        <a:srgbClr val="E5E2DC"/>
-                      </a:solidFill>
-                      <a:prstDash val="solid"/>
-                      <a:round/>
-                      <a:headEnd type="none" w="med" len="med"/>
-                      <a:tailEnd type="none" w="med" len="med"/>
-                    </a:lnR>
-                    <a:lnT w="6350" cap="flat" cmpd="sng" algn="ctr">
-                      <a:solidFill>
-                        <a:srgbClr val="E5E2DC"/>
-                      </a:solidFill>
-                      <a:prstDash val="solid"/>
-                      <a:round/>
-                      <a:headEnd type="none" w="med" len="med"/>
-                      <a:tailEnd type="none" w="med" len="med"/>
-                    </a:lnT>
-                    <a:lnB w="6350" cap="flat" cmpd="sng" algn="ctr">
-                      <a:solidFill>
-                        <a:srgbClr val="E5E2DC"/>
-                      </a:solidFill>
-                      <a:prstDash val="solid"/>
-                      <a:round/>
-                      <a:headEnd type="none" w="med" len="med"/>
-                      <a:tailEnd type="none" w="med" len="med"/>
-                    </a:lnB>
-                  </a:tcPr>
-                </a:tc>
-              </a:tr>
-              <a:tr h="502920">
-                <a:tc>
-                  <a:txBody>
-                    <a:bodyPr/>
-                    <a:lstStyle/>
-                    <a:p>
-                      <a:pPr indent="0" marL="0">
-                        <a:buNone/>
-                      </a:pPr>
-                      <a:r>
-                        <a:rPr lang="en-US" sz="1200" dirty="0">
-                          <a:solidFill>
-                            <a:srgbClr val="3D3A36"/>
-                          </a:solidFill>
-                          <a:latin typeface="Calibri" pitchFamily="34" charset="0"/>
-                          <a:ea typeface="Calibri" pitchFamily="34" charset="-122"/>
-                          <a:cs typeface="Calibri" pitchFamily="34" charset="-120"/>
-                        </a:rPr>
-                        <a:t>Shape evidence</a:t>
-                      </a:r>
-                      <a:endParaRPr lang="en-US" sz="1200" dirty="0">
-                        <a:latin typeface="Calibri" charset="0"/>
-                        <a:ea typeface="Calibri" charset="0"/>
-                        <a:cs typeface="Calibri" charset="0"/>
-                      </a:endParaRPr>
-                    </a:p>
-                  </a:txBody>
-                  <a:tcPr marL="91440" marR="91440" marT="45720" marB="45720">
-                    <a:lnL w="6350" cap="flat" cmpd="sng" algn="ctr">
-                      <a:solidFill>
-                        <a:srgbClr val="E5E2DC"/>
-                      </a:solidFill>
-                      <a:prstDash val="solid"/>
-                      <a:round/>
-                      <a:headEnd type="none" w="med" len="med"/>
-                      <a:tailEnd type="none" w="med" len="med"/>
-                    </a:lnL>
-                    <a:lnR w="6350" cap="flat" cmpd="sng" algn="ctr">
-                      <a:solidFill>
-                        <a:srgbClr val="E5E2DC"/>
-                      </a:solidFill>
-                      <a:prstDash val="solid"/>
-                      <a:round/>
-                      <a:headEnd type="none" w="med" len="med"/>
-                      <a:tailEnd type="none" w="med" len="med"/>
-                    </a:lnR>
-                    <a:lnT w="6350" cap="flat" cmpd="sng" algn="ctr">
-                      <a:solidFill>
-                        <a:srgbClr val="E5E2DC"/>
-                      </a:solidFill>
-                      <a:prstDash val="solid"/>
-                      <a:round/>
-                      <a:headEnd type="none" w="med" len="med"/>
-                      <a:tailEnd type="none" w="med" len="med"/>
-                    </a:lnT>
-                    <a:lnB w="6350" cap="flat" cmpd="sng" algn="ctr">
-                      <a:solidFill>
-                        <a:srgbClr val="E5E2DC"/>
-                      </a:solidFill>
-                      <a:prstDash val="solid"/>
-                      <a:round/>
-                      <a:headEnd type="none" w="med" len="med"/>
-                      <a:tailEnd type="none" w="med" len="med"/>
-                    </a:lnB>
-                  </a:tcPr>
-                </a:tc>
-                <a:tc>
-                  <a:txBody>
-                    <a:bodyPr/>
-                    <a:lstStyle/>
-                    <a:p>
-                      <a:pPr indent="0" marL="0">
-                        <a:buNone/>
-                      </a:pPr>
-                      <a:r>
-                        <a:rPr lang="en-US" sz="1200" dirty="0">
-                          <a:solidFill>
-                            <a:srgbClr val="3D3A36"/>
-                          </a:solidFill>
-                          <a:latin typeface="Calibri" pitchFamily="34" charset="0"/>
-                          <a:ea typeface="Calibri" pitchFamily="34" charset="-122"/>
-                          <a:cs typeface="Calibri" pitchFamily="34" charset="-120"/>
-                        </a:rPr>
-                        <a:t>South America and Africa fit together like a jigsaw</a:t>
-                      </a:r>
-                      <a:endParaRPr lang="en-US" sz="1200" dirty="0">
-                        <a:latin typeface="Calibri" charset="0"/>
-                        <a:ea typeface="Calibri" charset="0"/>
-                        <a:cs typeface="Calibri" charset="0"/>
-                      </a:endParaRPr>
-                    </a:p>
-                  </a:txBody>
-                  <a:tcPr marL="91440" marR="91440" marT="45720" marB="45720">
-                    <a:lnL w="6350" cap="flat" cmpd="sng" algn="ctr">
-                      <a:solidFill>
-                        <a:srgbClr val="E5E2DC"/>
-                      </a:solidFill>
-                      <a:prstDash val="solid"/>
-                      <a:round/>
-                      <a:headEnd type="none" w="med" len="med"/>
-                      <a:tailEnd type="none" w="med" len="med"/>
-                    </a:lnL>
-                    <a:lnR w="6350" cap="flat" cmpd="sng" algn="ctr">
-                      <a:solidFill>
-                        <a:srgbClr val="E5E2DC"/>
-                      </a:solidFill>
-                      <a:prstDash val="solid"/>
-                      <a:round/>
-                      <a:headEnd type="none" w="med" len="med"/>
-                      <a:tailEnd type="none" w="med" len="med"/>
-                    </a:lnR>
-                    <a:lnT w="6350" cap="flat" cmpd="sng" algn="ctr">
-                      <a:solidFill>
-                        <a:srgbClr val="E5E2DC"/>
-                      </a:solidFill>
-                      <a:prstDash val="solid"/>
-                      <a:round/>
-                      <a:headEnd type="none" w="med" len="med"/>
-                      <a:tailEnd type="none" w="med" len="med"/>
-                    </a:lnT>
-                    <a:lnB w="6350" cap="flat" cmpd="sng" algn="ctr">
-                      <a:solidFill>
-                        <a:srgbClr val="E5E2DC"/>
-                      </a:solidFill>
-                      <a:prstDash val="solid"/>
-                      <a:round/>
-                      <a:headEnd type="none" w="med" len="med"/>
-                      <a:tailEnd type="none" w="med" len="med"/>
-                    </a:lnB>
-                  </a:tcPr>
-                </a:tc>
-              </a:tr>
-              <a:tr h="502920">
-                <a:tc>
-                  <a:txBody>
-                    <a:bodyPr/>
-                    <a:lstStyle/>
-                    <a:p>
-                      <a:pPr indent="0" marL="0">
-                        <a:buNone/>
-                      </a:pPr>
-                      <a:r>
-                        <a:rPr lang="en-US" sz="1200" dirty="0">
-                          <a:solidFill>
-                            <a:srgbClr val="3D3A36"/>
-                          </a:solidFill>
-                          <a:latin typeface="Calibri" pitchFamily="34" charset="0"/>
-                          <a:ea typeface="Calibri" pitchFamily="34" charset="-122"/>
-                          <a:cs typeface="Calibri" pitchFamily="34" charset="-120"/>
-                        </a:rPr>
-                        <a:t>Climate evidence</a:t>
-                      </a:r>
-                      <a:endParaRPr lang="en-US" sz="1200" dirty="0">
-                        <a:latin typeface="Calibri" charset="0"/>
-                        <a:ea typeface="Calibri" charset="0"/>
-                        <a:cs typeface="Calibri" charset="0"/>
-                      </a:endParaRPr>
-                    </a:p>
-                  </a:txBody>
-                  <a:tcPr marL="91440" marR="91440" marT="45720" marB="45720">
-                    <a:lnL w="6350" cap="flat" cmpd="sng" algn="ctr">
-                      <a:solidFill>
-                        <a:srgbClr val="E5E2DC"/>
-                      </a:solidFill>
-                      <a:prstDash val="solid"/>
-                      <a:round/>
-                      <a:headEnd type="none" w="med" len="med"/>
-                      <a:tailEnd type="none" w="med" len="med"/>
-                    </a:lnL>
-                    <a:lnR w="6350" cap="flat" cmpd="sng" algn="ctr">
-                      <a:solidFill>
-                        <a:srgbClr val="E5E2DC"/>
-                      </a:solidFill>
-                      <a:prstDash val="solid"/>
-                      <a:round/>
-                      <a:headEnd type="none" w="med" len="med"/>
-                      <a:tailEnd type="none" w="med" len="med"/>
-                    </a:lnR>
-                    <a:lnT w="6350" cap="flat" cmpd="sng" algn="ctr">
-                      <a:solidFill>
-                        <a:srgbClr val="E5E2DC"/>
-                      </a:solidFill>
-                      <a:prstDash val="solid"/>
-                      <a:round/>
-                      <a:headEnd type="none" w="med" len="med"/>
-                      <a:tailEnd type="none" w="med" len="med"/>
-                    </a:lnT>
-                    <a:lnB w="6350" cap="flat" cmpd="sng" algn="ctr">
-                      <a:solidFill>
-                        <a:srgbClr val="E5E2DC"/>
-                      </a:solidFill>
-                      <a:prstDash val="solid"/>
-                      <a:round/>
-                      <a:headEnd type="none" w="med" len="med"/>
-                      <a:tailEnd type="none" w="med" len="med"/>
-                    </a:lnB>
-                  </a:tcPr>
-                </a:tc>
-                <a:tc>
-                  <a:txBody>
-                    <a:bodyPr/>
-                    <a:lstStyle/>
-                    <a:p>
-                      <a:pPr indent="0" marL="0">
-                        <a:buNone/>
-                      </a:pPr>
-                      <a:r>
-                        <a:rPr lang="en-US" sz="1200" dirty="0">
-                          <a:solidFill>
-                            <a:srgbClr val="3D3A36"/>
-                          </a:solidFill>
-                          <a:latin typeface="Calibri" pitchFamily="34" charset="0"/>
-                          <a:ea typeface="Calibri" pitchFamily="34" charset="-122"/>
-                          <a:cs typeface="Calibri" pitchFamily="34" charset="-120"/>
-                        </a:rPr>
-                        <a:t>Tropical plant fossils found in Antarctica; glacial marks in Africa</a:t>
-                      </a:r>
-                      <a:endParaRPr lang="en-US" sz="1200" dirty="0">
-                        <a:latin typeface="Calibri" charset="0"/>
-                        <a:ea typeface="Calibri" charset="0"/>
-                        <a:cs typeface="Calibri" charset="0"/>
-                      </a:endParaRPr>
-                    </a:p>
-                  </a:txBody>
-                  <a:tcPr marL="91440" marR="91440" marT="45720" marB="45720">
-                    <a:lnL w="6350" cap="flat" cmpd="sng" algn="ctr">
-                      <a:solidFill>
-                        <a:srgbClr val="E5E2DC"/>
-                      </a:solidFill>
-                      <a:prstDash val="solid"/>
-                      <a:round/>
-                      <a:headEnd type="none" w="med" len="med"/>
-                      <a:tailEnd type="none" w="med" len="med"/>
-                    </a:lnL>
-                    <a:lnR w="6350" cap="flat" cmpd="sng" algn="ctr">
-                      <a:solidFill>
-                        <a:srgbClr val="E5E2DC"/>
-                      </a:solidFill>
-                      <a:prstDash val="solid"/>
-                      <a:round/>
-                      <a:headEnd type="none" w="med" len="med"/>
-                      <a:tailEnd type="none" w="med" len="med"/>
-                    </a:lnR>
-                    <a:lnT w="6350" cap="flat" cmpd="sng" algn="ctr">
-                      <a:solidFill>
-                        <a:srgbClr val="E5E2DC"/>
-                      </a:solidFill>
-                      <a:prstDash val="solid"/>
-                      <a:round/>
-                      <a:headEnd type="none" w="med" len="med"/>
-                      <a:tailEnd type="none" w="med" len="med"/>
-                    </a:lnT>
-                    <a:lnB w="6350" cap="flat" cmpd="sng" algn="ctr">
-                      <a:solidFill>
-                        <a:srgbClr val="E5E2DC"/>
-                      </a:solidFill>
-                      <a:prstDash val="solid"/>
-                      <a:round/>
-                      <a:headEnd type="none" w="med" len="med"/>
-                      <a:tailEnd type="none" w="med" len="med"/>
-                    </a:lnB>
-                  </a:tcPr>
-                </a:tc>
-              </a:tr>
-            </a:tbl>
-          </a:graphicData>
-        </a:graphic>
-      </p:graphicFrame>
+      <p:sp>
+        <p:nvSpPr>
+          <p:cNvPr id="4" name="Text 2"/>
+          <p:cNvSpPr/>
+          <p:nvPr/>
+        </p:nvSpPr>
+        <p:spPr>
+          <a:xfrm>
+            <a:off x="548640" y="1097280"/>
+            <a:ext cx="8046720" cy="3474720"/>
+          </a:xfrm>
+          <a:prstGeom prst="rect">
+            <a:avLst/>
+          </a:prstGeom>
+          <a:noFill/>
+          <a:ln/>
+        </p:spPr>
+        <p:txBody>
+          <a:bodyPr wrap="square" rtlCol="0" anchor="t"/>
+          <a:lstStyle/>
+          <a:p>
+            <a:pPr marL="342900" indent="-342900">
+              <a:spcAft>
+                <a:spcPts val="800"/>
+              </a:spcAft>
+              <a:buSzPct val="100000"/>
+              <a:buChar char="•"/>
+            </a:pPr>
+            <a:r>
+              <a:rPr lang="en-US" sz="1500" dirty="0">
+                <a:solidFill>
+                  <a:srgbClr val="3D3A36"/>
+                </a:solidFill>
+                <a:latin typeface="Calibri" pitchFamily="34" charset="0"/>
+                <a:ea typeface="Calibri" pitchFamily="34" charset="-122"/>
+                <a:cs typeface="Calibri" pitchFamily="34" charset="-120"/>
+              </a:rPr>
+              <a:t>FOSSIL evidence: same fossils on continents now separated by oceans</a:t>
+            </a:r>
+            <a:endParaRPr lang="en-US" sz="1500" dirty="0"/>
+          </a:p>
+          <a:p>
+            <a:pPr marL="342900" indent="-342900">
+              <a:spcAft>
+                <a:spcPts val="800"/>
+              </a:spcAft>
+              <a:buSzPct val="100000"/>
+              <a:buChar char="•"/>
+            </a:pPr>
+            <a:r>
+              <a:rPr lang="en-US" sz="1500" dirty="0">
+                <a:solidFill>
+                  <a:srgbClr val="3D3A36"/>
+                </a:solidFill>
+                <a:latin typeface="Calibri" pitchFamily="34" charset="0"/>
+                <a:ea typeface="Calibri" pitchFamily="34" charset="-122"/>
+                <a:cs typeface="Calibri" pitchFamily="34" charset="-120"/>
+              </a:rPr>
+              <a:t>ROCK evidence: matching rock types and mountain chains across continents</a:t>
+            </a:r>
+            <a:endParaRPr lang="en-US" sz="1500" dirty="0"/>
+          </a:p>
+          <a:p>
+            <a:pPr marL="342900" indent="-342900">
+              <a:spcAft>
+                <a:spcPts val="800"/>
+              </a:spcAft>
+              <a:buSzPct val="100000"/>
+              <a:buChar char="•"/>
+            </a:pPr>
+            <a:r>
+              <a:rPr lang="en-US" sz="1500" dirty="0">
+                <a:solidFill>
+                  <a:srgbClr val="3D3A36"/>
+                </a:solidFill>
+                <a:latin typeface="Calibri" pitchFamily="34" charset="0"/>
+                <a:ea typeface="Calibri" pitchFamily="34" charset="-122"/>
+                <a:cs typeface="Calibri" pitchFamily="34" charset="-120"/>
+              </a:rPr>
+              <a:t>CLIMATE evidence: tropical plant fossils found in cold regions</a:t>
+            </a:r>
+            <a:endParaRPr lang="en-US" sz="1500" dirty="0"/>
+          </a:p>
+          <a:p>
+            <a:pPr marL="342900" indent="-342900">
+              <a:spcAft>
+                <a:spcPts val="800"/>
+              </a:spcAft>
+              <a:buSzPct val="100000"/>
+              <a:buChar char="•"/>
+            </a:pPr>
+            <a:r>
+              <a:rPr lang="en-US" sz="1500" dirty="0">
+                <a:solidFill>
+                  <a:srgbClr val="3D3A36"/>
+                </a:solidFill>
+                <a:latin typeface="Calibri" pitchFamily="34" charset="0"/>
+                <a:ea typeface="Calibri" pitchFamily="34" charset="-122"/>
+                <a:cs typeface="Calibri" pitchFamily="34" charset="-120"/>
+              </a:rPr>
+              <a:t>COASTLINE match: Africa and South America fit together</a:t>
+            </a:r>
+            <a:endParaRPr lang="en-US" sz="1500" dirty="0"/>
+          </a:p>
+          <a:p>
+            <a:pPr marL="342900" indent="-342900">
+              <a:spcAft>
+                <a:spcPts val="800"/>
+              </a:spcAft>
+              <a:buSzPct val="100000"/>
+              <a:buChar char="•"/>
+            </a:pPr>
+            <a:r>
+              <a:rPr lang="en-US" sz="1500" dirty="0">
+                <a:solidFill>
+                  <a:srgbClr val="3D3A36"/>
+                </a:solidFill>
+                <a:latin typeface="Calibri" pitchFamily="34" charset="0"/>
+                <a:ea typeface="Calibri" pitchFamily="34" charset="-122"/>
+                <a:cs typeface="Calibri" pitchFamily="34" charset="-120"/>
+              </a:rPr>
+              <a:t>Later discovery: convection currents explain the mechanism</a:t>
+            </a:r>
+            <a:endParaRPr lang="en-US" sz="1500" dirty="0"/>
+          </a:p>
+        </p:txBody>
+      </p:sp>
+      <p:sp>
+        <p:nvSpPr>
+          <p:cNvPr id="5" name="Text 3"/>
+          <p:cNvSpPr/>
+          <p:nvPr/>
+        </p:nvSpPr>
+        <p:spPr>
+          <a:xfrm>
+            <a:off x="548640" y="4800600"/>
+            <a:ext cx="3657600" cy="274320"/>
+          </a:xfrm>
+          <a:prstGeom prst="rect">
+            <a:avLst/>
+          </a:prstGeom>
+          <a:noFill/>
+          <a:ln/>
+        </p:spPr>
+        <p:txBody>
+          <a:bodyPr wrap="square" rtlCol="0" anchor="ctr"/>
+          <a:lstStyle/>
+          <a:p>
+            <a:pPr indent="0" marL="0">
+              <a:buNone/>
+            </a:pPr>
+            <a:r>
+              <a:rPr lang="en-US" sz="800" dirty="0">
+                <a:solidFill>
+                  <a:srgbClr val="9B9690"/>
+                </a:solidFill>
+              </a:rPr>
+              <a:t>mrzocchi.com</a:t>
+            </a:r>
+            <a:endParaRPr lang="en-US" sz="800" dirty="0"/>
+          </a:p>
+        </p:txBody>
+      </p:sp>
     </p:spTree>
   </p:cSld>
   <p:clrMapOvr>
@@ -2551,6 +1777,13 @@
 <file path=ppt/slides/slide4.xml><?xml version="1.0" encoding="utf-8"?>
 <p:sld xmlns:a="http://schemas.openxmlformats.org/drawingml/2006/main" xmlns:r="http://schemas.openxmlformats.org/officeDocument/2006/relationships" xmlns:p="http://schemas.openxmlformats.org/presentationml/2006/main">
   <p:cSld name="Slide 4">
+    <p:bg>
+      <p:bgPr>
+        <a:solidFill>
+          <a:srgbClr val="1B2A4A"/>
+        </a:solidFill>
+      </p:bgPr>
+    </p:bg>
     <p:spTree>
       <p:nvGrpSpPr>
         <p:cNvPr id="1" name=""/>
@@ -2574,26 +1807,6 @@
         <p:spPr>
           <a:xfrm>
             <a:off x="0" y="0"/>
-            <a:ext cx="9144000" cy="5143500"/>
-          </a:xfrm>
-          <a:prstGeom prst="rect">
-            <a:avLst/>
-          </a:prstGeom>
-          <a:solidFill>
-            <a:srgbClr val="FAF8F5"/>
-          </a:solidFill>
-          <a:ln/>
-        </p:spPr>
-      </p:sp>
-      <p:sp>
-        <p:nvSpPr>
-          <p:cNvPr id="3" name="Shape 1"/>
-          <p:cNvSpPr/>
-          <p:nvPr/>
-        </p:nvSpPr>
-        <p:spPr>
-          <a:xfrm>
-            <a:off x="0" y="0"/>
             <a:ext cx="9144000" cy="54864"/>
           </a:xfrm>
           <a:prstGeom prst="rect">
@@ -2607,14 +1820,14 @@
       </p:sp>
       <p:sp>
         <p:nvSpPr>
-          <p:cNvPr id="4" name="Text 2"/>
+          <p:cNvPr id="3" name="Text 1"/>
           <p:cNvSpPr/>
           <p:nvPr/>
         </p:nvSpPr>
         <p:spPr>
           <a:xfrm>
-            <a:off x="640080" y="320040"/>
-            <a:ext cx="7863840" cy="548640"/>
+            <a:off x="548640" y="457200"/>
+            <a:ext cx="8046720" cy="640080"/>
           </a:xfrm>
           <a:prstGeom prst="rect">
             <a:avLst/>
@@ -2623,66 +1836,37 @@
           <a:ln/>
         </p:spPr>
         <p:txBody>
-          <a:bodyPr wrap="square" lIns="0" tIns="0" rIns="0" bIns="0" rtlCol="0" anchor="ctr"/>
+          <a:bodyPr wrap="square" rtlCol="0" anchor="ctr"/>
           <a:lstStyle/>
           <a:p>
             <a:pPr indent="0" marL="0">
               <a:buNone/>
             </a:pPr>
             <a:r>
-              <a:rPr lang="en-US" sz="2600" b="1" dirty="0">
+              <a:rPr lang="en-US" sz="2800" b="1" dirty="0">
                 <a:solidFill>
-                  <a:srgbClr val="1B2A4A"/>
+                  <a:srgbClr val="FFFFFF"/>
                 </a:solidFill>
                 <a:latin typeface="Georgia" pitchFamily="34" charset="0"/>
                 <a:ea typeface="Georgia" pitchFamily="34" charset="-122"/>
                 <a:cs typeface="Georgia" pitchFamily="34" charset="-120"/>
               </a:rPr>
-              <a:t>Rejected Then Accepted</a:t>
-            </a:r>
-            <a:endParaRPr lang="en-US" sz="2600" dirty="0"/>
-          </a:p>
-        </p:txBody>
-      </p:sp>
-      <p:sp>
-        <p:nvSpPr>
-          <p:cNvPr id="5" name="Shape 3"/>
+              <a:t>Key Takeaways</a:t>
+            </a:r>
+            <a:endParaRPr lang="en-US" sz="2800" dirty="0"/>
+          </a:p>
+        </p:txBody>
+      </p:sp>
+      <p:sp>
+        <p:nvSpPr>
+          <p:cNvPr id="4" name="Text 2"/>
           <p:cNvSpPr/>
           <p:nvPr/>
         </p:nvSpPr>
         <p:spPr>
           <a:xfrm>
-            <a:off x="640080" y="1097280"/>
-            <a:ext cx="3749040" cy="3474720"/>
-          </a:xfrm>
-          <a:prstGeom prst="roundRect">
-            <a:avLst>
-              <a:gd name="adj" fmla="val 2632"/>
-            </a:avLst>
-          </a:prstGeom>
-          <a:solidFill>
-            <a:srgbClr val="FFFFFF"/>
-          </a:solidFill>
-          <a:ln/>
-          <a:effectLst>
-            <a:outerShdw sx="100000" sy="100000" kx="0" ky="0" algn="bl" rotWithShape="0" blurRad="76200" dist="25400" dir="8100000">
-              <a:srgbClr val="000000">
-                <a:alpha val="8000"/>
-              </a:srgbClr>
-            </a:outerShdw>
-          </a:effectLst>
-        </p:spPr>
-      </p:sp>
-      <p:sp>
-        <p:nvSpPr>
-          <p:cNvPr id="6" name="Text 4"/>
-          <p:cNvSpPr/>
-          <p:nvPr/>
-        </p:nvSpPr>
-        <p:spPr>
-          <a:xfrm>
-            <a:off x="822960" y="1234440"/>
-            <a:ext cx="3383280" cy="365760"/>
+            <a:off x="731520" y="1371600"/>
+            <a:ext cx="7680960" cy="3200400"/>
           </a:xfrm>
           <a:prstGeom prst="rect">
             <a:avLst/>
@@ -2691,37 +1875,104 @@
           <a:ln/>
         </p:spPr>
         <p:txBody>
-          <a:bodyPr wrap="square" rtlCol="0" anchor="ctr"/>
+          <a:bodyPr wrap="square" rtlCol="0" anchor="t"/>
           <a:lstStyle/>
           <a:p>
-            <a:pPr indent="0" marL="0">
-              <a:buNone/>
+            <a:pPr marL="342900" indent="-342900">
+              <a:spcAft>
+                <a:spcPts val="1000"/>
+              </a:spcAft>
+              <a:buSzPct val="100000"/>
+              <a:buChar char="•"/>
             </a:pPr>
             <a:r>
-              <a:rPr lang="en-US" sz="1600" b="1" dirty="0">
+              <a:rPr lang="en-US" sz="1600" dirty="0">
                 <a:solidFill>
-                  <a:srgbClr val="2A9D8F"/>
+                  <a:srgbClr val="CADCFC"/>
                 </a:solidFill>
-                <a:latin typeface="Georgia" pitchFamily="34" charset="0"/>
-                <a:ea typeface="Georgia" pitchFamily="34" charset="-122"/>
-                <a:cs typeface="Georgia" pitchFamily="34" charset="-120"/>
+                <a:latin typeface="Calibri" pitchFamily="34" charset="0"/>
+                <a:ea typeface="Calibri" pitchFamily="34" charset="-122"/>
+                <a:cs typeface="Calibri" pitchFamily="34" charset="-120"/>
               </a:rPr>
-              <a:t>Why Rejected</a:t>
+              <a:t>Pangaea = ancient supercontinent that broke apart ~200 million years ago</a:t>
             </a:r>
             <a:endParaRPr lang="en-US" sz="1600" dirty="0"/>
           </a:p>
-        </p:txBody>
-      </p:sp>
-      <p:sp>
-        <p:nvSpPr>
-          <p:cNvPr id="7" name="Text 5"/>
+          <a:p>
+            <a:pPr marL="342900" indent="-342900">
+              <a:spcAft>
+                <a:spcPts val="1000"/>
+              </a:spcAft>
+              <a:buSzPct val="100000"/>
+              <a:buChar char="•"/>
+            </a:pPr>
+            <a:r>
+              <a:rPr lang="en-US" sz="1600" dirty="0">
+                <a:solidFill>
+                  <a:srgbClr val="CADCFC"/>
+                </a:solidFill>
+                <a:latin typeface="Calibri" pitchFamily="34" charset="0"/>
+                <a:ea typeface="Calibri" pitchFamily="34" charset="-122"/>
+                <a:cs typeface="Calibri" pitchFamily="34" charset="-120"/>
+              </a:rPr>
+              <a:t>Evidence: matching fossils, rocks, mountains, and coastlines</a:t>
+            </a:r>
+            <a:endParaRPr lang="en-US" sz="1600" dirty="0"/>
+          </a:p>
+          <a:p>
+            <a:pPr marL="342900" indent="-342900">
+              <a:spcAft>
+                <a:spcPts val="1000"/>
+              </a:spcAft>
+              <a:buSzPct val="100000"/>
+              <a:buChar char="•"/>
+            </a:pPr>
+            <a:r>
+              <a:rPr lang="en-US" sz="1600" dirty="0">
+                <a:solidFill>
+                  <a:srgbClr val="CADCFC"/>
+                </a:solidFill>
+                <a:latin typeface="Calibri" pitchFamily="34" charset="0"/>
+                <a:ea typeface="Calibri" pitchFamily="34" charset="-122"/>
+                <a:cs typeface="Calibri" pitchFamily="34" charset="-120"/>
+              </a:rPr>
+              <a:t>Wegener's theory was rejected because he had no mechanism</a:t>
+            </a:r>
+            <a:endParaRPr lang="en-US" sz="1600" dirty="0"/>
+          </a:p>
+          <a:p>
+            <a:pPr marL="342900" indent="-342900">
+              <a:spcAft>
+                <a:spcPts val="1000"/>
+              </a:spcAft>
+              <a:buSzPct val="100000"/>
+              <a:buChar char="•"/>
+            </a:pPr>
+            <a:r>
+              <a:rPr lang="en-US" sz="1600" dirty="0">
+                <a:solidFill>
+                  <a:srgbClr val="CADCFC"/>
+                </a:solidFill>
+                <a:latin typeface="Calibri" pitchFamily="34" charset="0"/>
+                <a:ea typeface="Calibri" pitchFamily="34" charset="-122"/>
+                <a:cs typeface="Calibri" pitchFamily="34" charset="-120"/>
+              </a:rPr>
+              <a:t>Convection currents (discovered later) provided the missing explanation</a:t>
+            </a:r>
+            <a:endParaRPr lang="en-US" sz="1600" dirty="0"/>
+          </a:p>
+        </p:txBody>
+      </p:sp>
+      <p:sp>
+        <p:nvSpPr>
+          <p:cNvPr id="5" name="Text 3"/>
           <p:cNvSpPr/>
           <p:nvPr/>
         </p:nvSpPr>
         <p:spPr>
           <a:xfrm>
-            <a:off x="822960" y="1691640"/>
-            <a:ext cx="3383280" cy="2743200"/>
+            <a:off x="548640" y="4572000"/>
+            <a:ext cx="3657600" cy="274320"/>
           </a:xfrm>
           <a:prstGeom prst="rect">
             <a:avLst/>
@@ -2730,120 +1981,6 @@
           <a:ln/>
         </p:spPr>
         <p:txBody>
-          <a:bodyPr wrap="square" rtlCol="0" anchor="t"/>
-          <a:lstStyle/>
-          <a:p>
-            <a:pPr marL="342900" indent="-342900">
-              <a:lnSpc>
-                <a:spcPct val="135000"/>
-              </a:lnSpc>
-              <a:buSzPct val="100000"/>
-              <a:buChar char="•"/>
-            </a:pPr>
-            <a:r>
-              <a:rPr lang="en-US" sz="1300" dirty="0">
-                <a:solidFill>
-                  <a:srgbClr val="3D3A36"/>
-                </a:solidFill>
-                <a:latin typeface="Calibri" pitchFamily="34" charset="0"/>
-                <a:ea typeface="Calibri" pitchFamily="34" charset="-122"/>
-                <a:cs typeface="Calibri" pitchFamily="34" charset="-120"/>
-              </a:rPr>
-              <a:t>Wegener could not explain HOW continents moved.</a:t>
-            </a:r>
-            <a:endParaRPr lang="en-US" sz="1300" dirty="0"/>
-          </a:p>
-          <a:p>
-            <a:pPr marL="342900" indent="-342900">
-              <a:lnSpc>
-                <a:spcPct val="135000"/>
-              </a:lnSpc>
-              <a:buSzPct val="100000"/>
-              <a:buChar char="•"/>
-            </a:pPr>
-            <a:r>
-              <a:rPr lang="en-US" sz="1300" dirty="0">
-                <a:solidFill>
-                  <a:srgbClr val="3D3A36"/>
-                </a:solidFill>
-                <a:latin typeface="Calibri" pitchFamily="34" charset="0"/>
-                <a:ea typeface="Calibri" pitchFamily="34" charset="-122"/>
-                <a:cs typeface="Calibri" pitchFamily="34" charset="-120"/>
-              </a:rPr>
-              <a:t>He had no mechanism.</a:t>
-            </a:r>
-            <a:endParaRPr lang="en-US" sz="1300" dirty="0"/>
-          </a:p>
-          <a:p>
-            <a:pPr marL="342900" indent="-342900">
-              <a:lnSpc>
-                <a:spcPct val="135000"/>
-              </a:lnSpc>
-              <a:buSzPct val="100000"/>
-              <a:buChar char="•"/>
-            </a:pPr>
-            <a:r>
-              <a:rPr lang="en-US" sz="1300" dirty="0">
-                <a:solidFill>
-                  <a:srgbClr val="3D3A36"/>
-                </a:solidFill>
-                <a:latin typeface="Calibri" pitchFamily="34" charset="0"/>
-                <a:ea typeface="Calibri" pitchFamily="34" charset="-122"/>
-                <a:cs typeface="Calibri" pitchFamily="34" charset="-120"/>
-              </a:rPr>
-              <a:t>Most scientists rejected his theory.</a:t>
-            </a:r>
-            <a:endParaRPr lang="en-US" sz="1300" dirty="0"/>
-          </a:p>
-        </p:txBody>
-      </p:sp>
-      <p:sp>
-        <p:nvSpPr>
-          <p:cNvPr id="8" name="Shape 6"/>
-          <p:cNvSpPr/>
-          <p:nvPr/>
-        </p:nvSpPr>
-        <p:spPr>
-          <a:xfrm>
-            <a:off x="4754880" y="1097280"/>
-            <a:ext cx="3749040" cy="3474720"/>
-          </a:xfrm>
-          <a:prstGeom prst="roundRect">
-            <a:avLst>
-              <a:gd name="adj" fmla="val 2632"/>
-            </a:avLst>
-          </a:prstGeom>
-          <a:solidFill>
-            <a:srgbClr val="FFFFFF"/>
-          </a:solidFill>
-          <a:ln/>
-          <a:effectLst>
-            <a:outerShdw sx="100000" sy="100000" kx="0" ky="0" algn="bl" rotWithShape="0" blurRad="76200" dist="25400" dir="8100000">
-              <a:srgbClr val="000000">
-                <a:alpha val="8000"/>
-              </a:srgbClr>
-            </a:outerShdw>
-          </a:effectLst>
-        </p:spPr>
-      </p:sp>
-      <p:sp>
-        <p:nvSpPr>
-          <p:cNvPr id="9" name="Text 7"/>
-          <p:cNvSpPr/>
-          <p:nvPr/>
-        </p:nvSpPr>
-        <p:spPr>
-          <a:xfrm>
-            <a:off x="4937760" y="1234440"/>
-            <a:ext cx="3383280" cy="365760"/>
-          </a:xfrm>
-          <a:prstGeom prst="rect">
-            <a:avLst/>
-          </a:prstGeom>
-          <a:noFill/>
-          <a:ln/>
-        </p:spPr>
-        <p:txBody>
           <a:bodyPr wrap="square" rtlCol="0" anchor="ctr"/>
           <a:lstStyle/>
           <a:p>
@@ -2851,555 +1988,14 @@
               <a:buNone/>
             </a:pPr>
             <a:r>
-              <a:rPr lang="en-US" sz="1600" b="1" dirty="0">
+              <a:rPr lang="en-US" sz="1000" dirty="0">
                 <a:solidFill>
-                  <a:srgbClr val="2A9D8F"/>
+                  <a:srgbClr val="6B6660"/>
                 </a:solidFill>
-                <a:latin typeface="Georgia" pitchFamily="34" charset="0"/>
-                <a:ea typeface="Georgia" pitchFamily="34" charset="-122"/>
-                <a:cs typeface="Georgia" pitchFamily="34" charset="-120"/>
-              </a:rPr>
-              <a:t>What Changed (1960s)</a:t>
-            </a:r>
-            <a:endParaRPr lang="en-US" sz="1600" dirty="0"/>
-          </a:p>
-        </p:txBody>
-      </p:sp>
-      <p:sp>
-        <p:nvSpPr>
-          <p:cNvPr id="10" name="Text 8"/>
-          <p:cNvSpPr/>
-          <p:nvPr/>
-        </p:nvSpPr>
-        <p:spPr>
-          <a:xfrm>
-            <a:off x="4937760" y="1691640"/>
-            <a:ext cx="3383280" cy="2743200"/>
-          </a:xfrm>
-          <a:prstGeom prst="rect">
-            <a:avLst/>
-          </a:prstGeom>
-          <a:noFill/>
-          <a:ln/>
-        </p:spPr>
-        <p:txBody>
-          <a:bodyPr wrap="square" rtlCol="0" anchor="t"/>
-          <a:lstStyle/>
-          <a:p>
-            <a:pPr marL="342900" indent="-342900">
-              <a:lnSpc>
-                <a:spcPct val="135000"/>
-              </a:lnSpc>
-              <a:buSzPct val="100000"/>
-              <a:buChar char="•"/>
-            </a:pPr>
-            <a:r>
-              <a:rPr lang="en-US" sz="1300" dirty="0">
-                <a:solidFill>
-                  <a:srgbClr val="3D3A36"/>
-                </a:solidFill>
-                <a:latin typeface="Calibri" pitchFamily="34" charset="0"/>
-                <a:ea typeface="Calibri" pitchFamily="34" charset="-122"/>
-                <a:cs typeface="Calibri" pitchFamily="34" charset="-120"/>
-              </a:rPr>
-              <a:t>Scientists discovered sea-floor spreading.</a:t>
-            </a:r>
-            <a:endParaRPr lang="en-US" sz="1300" dirty="0"/>
-          </a:p>
-          <a:p>
-            <a:pPr marL="342900" indent="-342900">
-              <a:lnSpc>
-                <a:spcPct val="135000"/>
-              </a:lnSpc>
-              <a:buSzPct val="100000"/>
-              <a:buChar char="•"/>
-            </a:pPr>
-            <a:r>
-              <a:rPr lang="en-US" sz="1300" dirty="0">
-                <a:solidFill>
-                  <a:srgbClr val="3D3A36"/>
-                </a:solidFill>
-                <a:latin typeface="Calibri" pitchFamily="34" charset="0"/>
-                <a:ea typeface="Calibri" pitchFamily="34" charset="-122"/>
-                <a:cs typeface="Calibri" pitchFamily="34" charset="-120"/>
-              </a:rPr>
-              <a:t>Convection currents explained the mechanism.</a:t>
-            </a:r>
-            <a:endParaRPr lang="en-US" sz="1300" dirty="0"/>
-          </a:p>
-          <a:p>
-            <a:pPr marL="342900" indent="-342900">
-              <a:lnSpc>
-                <a:spcPct val="135000"/>
-              </a:lnSpc>
-              <a:buSzPct val="100000"/>
-              <a:buChar char="•"/>
-            </a:pPr>
-            <a:r>
-              <a:rPr lang="en-US" sz="1300" dirty="0">
-                <a:solidFill>
-                  <a:srgbClr val="3D3A36"/>
-                </a:solidFill>
-                <a:latin typeface="Calibri" pitchFamily="34" charset="0"/>
-                <a:ea typeface="Calibri" pitchFamily="34" charset="-122"/>
-                <a:cs typeface="Calibri" pitchFamily="34" charset="-120"/>
-              </a:rPr>
-              <a:t>Continental drift became plate tectonics.</a:t>
-            </a:r>
-            <a:endParaRPr lang="en-US" sz="1300" dirty="0"/>
-          </a:p>
-        </p:txBody>
-      </p:sp>
-    </p:spTree>
-  </p:cSld>
-  <p:clrMapOvr>
-    <a:masterClrMapping/>
-  </p:clrMapOvr>
-</p:sld>
-</file>
-
-<file path=ppt/slides/slide5.xml><?xml version="1.0" encoding="utf-8"?>
-<p:sld xmlns:a="http://schemas.openxmlformats.org/drawingml/2006/main" xmlns:r="http://schemas.openxmlformats.org/officeDocument/2006/relationships" xmlns:p="http://schemas.openxmlformats.org/presentationml/2006/main">
-  <p:cSld name="Slide 5">
-    <p:spTree>
-      <p:nvGrpSpPr>
-        <p:cNvPr id="1" name=""/>
-        <p:cNvGrpSpPr/>
-        <p:nvPr/>
-      </p:nvGrpSpPr>
-      <p:grpSpPr>
-        <a:xfrm>
-          <a:off x="0" y="0"/>
-          <a:ext cx="0" cy="0"/>
-          <a:chOff x="0" y="0"/>
-          <a:chExt cx="0" cy="0"/>
-        </a:xfrm>
-      </p:grpSpPr>
-      <p:sp>
-        <p:nvSpPr>
-          <p:cNvPr id="2" name="Shape 0"/>
-          <p:cNvSpPr/>
-          <p:nvPr/>
-        </p:nvSpPr>
-        <p:spPr>
-          <a:xfrm>
-            <a:off x="0" y="0"/>
-            <a:ext cx="9144000" cy="5143500"/>
-          </a:xfrm>
-          <a:prstGeom prst="rect">
-            <a:avLst/>
-          </a:prstGeom>
-          <a:solidFill>
-            <a:srgbClr val="FAF8F5"/>
-          </a:solidFill>
-          <a:ln/>
-        </p:spPr>
-      </p:sp>
-      <p:sp>
-        <p:nvSpPr>
-          <p:cNvPr id="3" name="Shape 1"/>
-          <p:cNvSpPr/>
-          <p:nvPr/>
-        </p:nvSpPr>
-        <p:spPr>
-          <a:xfrm>
-            <a:off x="0" y="0"/>
-            <a:ext cx="9144000" cy="54864"/>
-          </a:xfrm>
-          <a:prstGeom prst="rect">
-            <a:avLst/>
-          </a:prstGeom>
-          <a:solidFill>
-            <a:srgbClr val="2A9D8F"/>
-          </a:solidFill>
-          <a:ln/>
-        </p:spPr>
-      </p:sp>
-      <p:sp>
-        <p:nvSpPr>
-          <p:cNvPr id="4" name="Text 2"/>
-          <p:cNvSpPr/>
-          <p:nvPr/>
-        </p:nvSpPr>
-        <p:spPr>
-          <a:xfrm>
-            <a:off x="640080" y="320040"/>
-            <a:ext cx="7863840" cy="640080"/>
-          </a:xfrm>
-          <a:prstGeom prst="rect">
-            <a:avLst/>
-          </a:prstGeom>
-          <a:noFill/>
-          <a:ln/>
-        </p:spPr>
-        <p:txBody>
-          <a:bodyPr wrap="square" lIns="0" tIns="0" rIns="0" bIns="0" rtlCol="0" anchor="ctr"/>
-          <a:lstStyle/>
-          <a:p>
-            <a:pPr indent="0" marL="0">
-              <a:buNone/>
-            </a:pPr>
-            <a:r>
-              <a:rPr lang="en-US" sz="2600" b="1" dirty="0">
-                <a:solidFill>
-                  <a:srgbClr val="1B2A4A"/>
-                </a:solidFill>
-                <a:latin typeface="Georgia" pitchFamily="34" charset="0"/>
-                <a:ea typeface="Georgia" pitchFamily="34" charset="-122"/>
-                <a:cs typeface="Georgia" pitchFamily="34" charset="-120"/>
-              </a:rPr>
-              <a:t>How Science Works</a:t>
-            </a:r>
-            <a:endParaRPr lang="en-US" sz="2600" dirty="0"/>
-          </a:p>
-        </p:txBody>
-      </p:sp>
-      <p:sp>
-        <p:nvSpPr>
-          <p:cNvPr id="5" name="Text 3"/>
-          <p:cNvSpPr/>
-          <p:nvPr/>
-        </p:nvSpPr>
-        <p:spPr>
-          <a:xfrm>
-            <a:off x="640080" y="1188720"/>
-            <a:ext cx="7863840" cy="3200400"/>
-          </a:xfrm>
-          <a:prstGeom prst="rect">
-            <a:avLst/>
-          </a:prstGeom>
-          <a:noFill/>
-          <a:ln/>
-        </p:spPr>
-        <p:txBody>
-          <a:bodyPr wrap="square" rtlCol="0" anchor="t"/>
-          <a:lstStyle/>
-          <a:p>
-            <a:pPr marL="342900" indent="-342900">
-              <a:lnSpc>
-                <a:spcPct val="140000"/>
-              </a:lnSpc>
-              <a:buSzPct val="100000"/>
-              <a:buChar char="•"/>
-            </a:pPr>
-            <a:r>
-              <a:rPr lang="en-US" sz="1500" dirty="0">
-                <a:solidFill>
-                  <a:srgbClr val="3D3A36"/>
-                </a:solidFill>
-                <a:latin typeface="Calibri" pitchFamily="34" charset="0"/>
-                <a:ea typeface="Calibri" pitchFamily="34" charset="-122"/>
-                <a:cs typeface="Calibri" pitchFamily="34" charset="-120"/>
-              </a:rPr>
-              <a:t>Having good evidence is not always enough.</a:t>
-            </a:r>
-            <a:endParaRPr lang="en-US" sz="1500" dirty="0"/>
-          </a:p>
-          <a:p>
-            <a:pPr marL="342900" indent="-342900">
-              <a:lnSpc>
-                <a:spcPct val="140000"/>
-              </a:lnSpc>
-              <a:buSzPct val="100000"/>
-              <a:buChar char="•"/>
-            </a:pPr>
-            <a:r>
-              <a:rPr lang="en-US" sz="1500" dirty="0">
-                <a:solidFill>
-                  <a:srgbClr val="3D3A36"/>
-                </a:solidFill>
-                <a:latin typeface="Calibri" pitchFamily="34" charset="0"/>
-                <a:ea typeface="Calibri" pitchFamily="34" charset="-122"/>
-                <a:cs typeface="Calibri" pitchFamily="34" charset="-120"/>
-              </a:rPr>
-              <a:t>Scientists also need a convincing mechanism (HOW it happens).</a:t>
-            </a:r>
-            <a:endParaRPr lang="en-US" sz="1500" dirty="0"/>
-          </a:p>
-          <a:p>
-            <a:pPr marL="342900" indent="-342900">
-              <a:lnSpc>
-                <a:spcPct val="140000"/>
-              </a:lnSpc>
-              <a:buSzPct val="100000"/>
-              <a:buChar char="•"/>
-            </a:pPr>
-            <a:r>
-              <a:rPr lang="en-US" sz="1500" dirty="0">
-                <a:solidFill>
-                  <a:srgbClr val="3D3A36"/>
-                </a:solidFill>
-                <a:latin typeface="Calibri" pitchFamily="34" charset="0"/>
-                <a:ea typeface="Calibri" pitchFamily="34" charset="-122"/>
-                <a:cs typeface="Calibri" pitchFamily="34" charset="-120"/>
-              </a:rPr>
-              <a:t>It took 50 years for technology to catch up.</a:t>
-            </a:r>
-            <a:endParaRPr lang="en-US" sz="1500" dirty="0"/>
-          </a:p>
-          <a:p>
-            <a:pPr marL="342900" indent="-342900">
-              <a:lnSpc>
-                <a:spcPct val="140000"/>
-              </a:lnSpc>
-              <a:buSzPct val="100000"/>
-              <a:buChar char="•"/>
-            </a:pPr>
-            <a:r>
-              <a:rPr lang="en-US" sz="1500" dirty="0">
-                <a:solidFill>
-                  <a:srgbClr val="3D3A36"/>
-                </a:solidFill>
-                <a:latin typeface="Calibri" pitchFamily="34" charset="0"/>
-                <a:ea typeface="Calibri" pitchFamily="34" charset="-122"/>
-                <a:cs typeface="Calibri" pitchFamily="34" charset="-120"/>
-              </a:rPr>
-              <a:t>Wegener was right — he just couldn't prove the mechanism.</a:t>
-            </a:r>
-            <a:endParaRPr lang="en-US" sz="1500" dirty="0"/>
-          </a:p>
-        </p:txBody>
-      </p:sp>
-      <p:sp>
-        <p:nvSpPr>
-          <p:cNvPr id="6" name="Shape 4"/>
-          <p:cNvSpPr/>
-          <p:nvPr/>
-        </p:nvSpPr>
-        <p:spPr>
-          <a:xfrm>
-            <a:off x="640080" y="4206240"/>
-            <a:ext cx="7863840" cy="640080"/>
-          </a:xfrm>
-          <a:prstGeom prst="roundRect">
-            <a:avLst>
-              <a:gd name="adj" fmla="val 11429"/>
-            </a:avLst>
-          </a:prstGeom>
-          <a:solidFill>
-            <a:srgbClr val="E8F5F3"/>
-          </a:solidFill>
-          <a:ln/>
-        </p:spPr>
-      </p:sp>
-      <p:sp>
-        <p:nvSpPr>
-          <p:cNvPr id="7" name="Text 5"/>
-          <p:cNvSpPr/>
-          <p:nvPr/>
-        </p:nvSpPr>
-        <p:spPr>
-          <a:xfrm>
-            <a:off x="822960" y="4251960"/>
-            <a:ext cx="7498080" cy="548640"/>
-          </a:xfrm>
-          <a:prstGeom prst="rect">
-            <a:avLst/>
-          </a:prstGeom>
-          <a:noFill/>
-          <a:ln/>
-        </p:spPr>
-        <p:txBody>
-          <a:bodyPr wrap="square" rtlCol="0" anchor="ctr"/>
-          <a:lstStyle/>
-          <a:p>
-            <a:pPr indent="0" marL="0">
-              <a:buNone/>
-            </a:pPr>
-            <a:r>
-              <a:rPr lang="en-US" sz="1200" i="1" dirty="0">
-                <a:solidFill>
-                  <a:srgbClr val="2A9D8F"/>
-                </a:solidFill>
-                <a:latin typeface="Calibri" pitchFamily="34" charset="0"/>
-                <a:ea typeface="Calibri" pitchFamily="34" charset="-122"/>
-                <a:cs typeface="Calibri" pitchFamily="34" charset="-120"/>
-              </a:rPr>
-              <a:t>Key concept: CHANGE — in science, ideas change as evidence improves.</a:t>
-            </a:r>
-            <a:endParaRPr lang="en-US" sz="1200" dirty="0"/>
-          </a:p>
-        </p:txBody>
-      </p:sp>
-    </p:spTree>
-  </p:cSld>
-  <p:clrMapOvr>
-    <a:masterClrMapping/>
-  </p:clrMapOvr>
-</p:sld>
-</file>
-
-<file path=ppt/slides/slide6.xml><?xml version="1.0" encoding="utf-8"?>
-<p:sld xmlns:a="http://schemas.openxmlformats.org/drawingml/2006/main" xmlns:r="http://schemas.openxmlformats.org/officeDocument/2006/relationships" xmlns:p="http://schemas.openxmlformats.org/presentationml/2006/main">
-  <p:cSld name="Slide 6">
-    <p:spTree>
-      <p:nvGrpSpPr>
-        <p:cNvPr id="1" name=""/>
-        <p:cNvGrpSpPr/>
-        <p:nvPr/>
-      </p:nvGrpSpPr>
-      <p:grpSpPr>
-        <a:xfrm>
-          <a:off x="0" y="0"/>
-          <a:ext cx="0" cy="0"/>
-          <a:chOff x="0" y="0"/>
-          <a:chExt cx="0" cy="0"/>
-        </a:xfrm>
-      </p:grpSpPr>
-      <p:sp>
-        <p:nvSpPr>
-          <p:cNvPr id="2" name="Shape 0"/>
-          <p:cNvSpPr/>
-          <p:nvPr/>
-        </p:nvSpPr>
-        <p:spPr>
-          <a:xfrm>
-            <a:off x="0" y="0"/>
-            <a:ext cx="9144000" cy="5143500"/>
-          </a:xfrm>
-          <a:prstGeom prst="rect">
-            <a:avLst/>
-          </a:prstGeom>
-          <a:solidFill>
-            <a:srgbClr val="1B2A4A"/>
-          </a:solidFill>
-          <a:ln/>
-        </p:spPr>
-      </p:sp>
-      <p:sp>
-        <p:nvSpPr>
-          <p:cNvPr id="3" name="Shape 1"/>
-          <p:cNvSpPr/>
-          <p:nvPr/>
-        </p:nvSpPr>
-        <p:spPr>
-          <a:xfrm>
-            <a:off x="0" y="4777740"/>
-            <a:ext cx="9144000" cy="365760"/>
-          </a:xfrm>
-          <a:prstGeom prst="rect">
-            <a:avLst/>
-          </a:prstGeom>
-          <a:solidFill>
-            <a:srgbClr val="2A9D8F"/>
-          </a:solidFill>
-          <a:ln/>
-        </p:spPr>
-      </p:sp>
-      <p:sp>
-        <p:nvSpPr>
-          <p:cNvPr id="4" name="Text 2"/>
-          <p:cNvSpPr/>
-          <p:nvPr/>
-        </p:nvSpPr>
-        <p:spPr>
-          <a:xfrm>
-            <a:off x="731520" y="1371600"/>
-            <a:ext cx="7680960" cy="914400"/>
-          </a:xfrm>
-          <a:prstGeom prst="rect">
-            <a:avLst/>
-          </a:prstGeom>
-          <a:noFill/>
-          <a:ln/>
-        </p:spPr>
-        <p:txBody>
-          <a:bodyPr wrap="square" rtlCol="0" anchor="ctr"/>
-          <a:lstStyle/>
-          <a:p>
-            <a:pPr algn="ctr" indent="0" marL="0">
-              <a:buNone/>
-            </a:pPr>
-            <a:r>
-              <a:rPr lang="en-US" sz="3600" b="1" dirty="0">
-                <a:solidFill>
-                  <a:srgbClr val="FFFFFF"/>
-                </a:solidFill>
-                <a:latin typeface="Georgia" pitchFamily="34" charset="0"/>
-                <a:ea typeface="Georgia" pitchFamily="34" charset="-122"/>
-                <a:cs typeface="Georgia" pitchFamily="34" charset="-120"/>
-              </a:rPr>
-              <a:t>Review &amp; Practise</a:t>
-            </a:r>
-            <a:endParaRPr lang="en-US" sz="3600" dirty="0"/>
-          </a:p>
-        </p:txBody>
-      </p:sp>
-      <p:sp>
-        <p:nvSpPr>
-          <p:cNvPr id="5" name="Text 3"/>
-          <p:cNvSpPr/>
-          <p:nvPr/>
-        </p:nvSpPr>
-        <p:spPr>
-          <a:xfrm>
-            <a:off x="731520" y="2468880"/>
-            <a:ext cx="7680960" cy="548640"/>
-          </a:xfrm>
-          <a:prstGeom prst="rect">
-            <a:avLst/>
-          </a:prstGeom>
-          <a:noFill/>
-          <a:ln/>
-        </p:spPr>
-        <p:txBody>
-          <a:bodyPr wrap="square" rtlCol="0" anchor="ctr"/>
-          <a:lstStyle/>
-          <a:p>
-            <a:pPr algn="ctr" indent="0" marL="0">
-              <a:buNone/>
-            </a:pPr>
-            <a:r>
-              <a:rPr lang="en-US" sz="1800" dirty="0">
-                <a:solidFill>
-                  <a:srgbClr val="2A9D8F"/>
-                </a:solidFill>
-                <a:latin typeface="Calibri" pitchFamily="34" charset="0"/>
-                <a:ea typeface="Calibri" pitchFamily="34" charset="-122"/>
-                <a:cs typeface="Calibri" pitchFamily="34" charset="-120"/>
-              </a:rPr>
-              <a:t>learnlattice.org/students/exam-revision</a:t>
-            </a:r>
-            <a:endParaRPr lang="en-US" sz="1800" dirty="0"/>
-          </a:p>
-        </p:txBody>
-      </p:sp>
-      <p:sp>
-        <p:nvSpPr>
-          <p:cNvPr id="6" name="Text 4"/>
-          <p:cNvSpPr/>
-          <p:nvPr/>
-        </p:nvSpPr>
-        <p:spPr>
-          <a:xfrm>
-            <a:off x="731520" y="3200400"/>
-            <a:ext cx="7680960" cy="457200"/>
-          </a:xfrm>
-          <a:prstGeom prst="rect">
-            <a:avLst/>
-          </a:prstGeom>
-          <a:noFill/>
-          <a:ln/>
-        </p:spPr>
-        <p:txBody>
-          <a:bodyPr wrap="square" rtlCol="0" anchor="ctr"/>
-          <a:lstStyle/>
-          <a:p>
-            <a:pPr algn="ctr" indent="0" marL="0">
-              <a:buNone/>
-            </a:pPr>
-            <a:r>
-              <a:rPr lang="en-US" sz="1400" dirty="0">
-                <a:solidFill>
-                  <a:srgbClr val="9B9690"/>
-                </a:solidFill>
-                <a:latin typeface="Calibri" pitchFamily="34" charset="0"/>
-                <a:ea typeface="Calibri" pitchFamily="34" charset="-122"/>
-                <a:cs typeface="Calibri" pitchFamily="34" charset="-120"/>
               </a:rPr>
               <a:t>mrzocchi.com</a:t>
             </a:r>
-            <a:endParaRPr lang="en-US" sz="1400" dirty="0"/>
+            <a:endParaRPr lang="en-US" sz="1000" dirty="0"/>
           </a:p>
         </p:txBody>
       </p:sp>

--- a/static/ppts/G6_Sci_Continental_Drift.pptx
+++ b/static/ppts/G6_Sci_Continental_Drift.pptx
@@ -9,9 +9,10 @@
     <p:sldId id="257" r:id="rId3"/>
     <p:sldId id="258" r:id="rId4"/>
     <p:sldId id="259" r:id="rId5"/>
+    <p:sldId id="260" r:id="rId6"/>
   </p:sldIdLst>
   <p:notesMasterIdLst>
-    <p:notesMasterId r:id="rId6"/>
+    <p:notesMasterId r:id="rId7"/>
   </p:notesMasterIdLst>
   <p:sldSz cx="9144000" cy="5143500"/>
   <p:notesSz cx="5143500" cy="9144000"/>
@@ -811,6 +812,94 @@
 </p:notes>
 </file>
 
+<file path=ppt/notesSlides/notesSlide5.xml><?xml version="1.0" encoding="utf-8"?>
+<p:notes xmlns:a="http://schemas.openxmlformats.org/drawingml/2006/main" xmlns:r="http://schemas.openxmlformats.org/officeDocument/2006/relationships" xmlns:p="http://schemas.openxmlformats.org/presentationml/2006/main">
+  <p:cSld>
+    <p:spTree>
+      <p:nvGrpSpPr>
+        <p:cNvPr id="1" name=""/>
+        <p:cNvGrpSpPr/>
+        <p:nvPr/>
+      </p:nvGrpSpPr>
+      <p:grpSpPr>
+        <a:xfrm>
+          <a:off x="0" y="0"/>
+          <a:ext cx="0" cy="0"/>
+          <a:chOff x="0" y="0"/>
+          <a:chExt cx="0" cy="0"/>
+        </a:xfrm>
+      </p:grpSpPr>
+      <p:sp>
+        <p:nvSpPr>
+          <p:cNvPr id="2" name="Slide Image Placeholder 1"/>
+          <p:cNvSpPr>
+            <a:spLocks noGrp="1" noRot="1" noChangeAspect="1"/>
+          </p:cNvSpPr>
+          <p:nvPr>
+            <p:ph type="sldImg"/>
+          </p:nvPr>
+        </p:nvSpPr>
+        <p:spPr/>
+      </p:sp>
+      <p:sp>
+        <p:nvSpPr>
+          <p:cNvPr id="3" name="Notes Placeholder 2"/>
+          <p:cNvSpPr>
+            <a:spLocks noGrp="1"/>
+          </p:cNvSpPr>
+          <p:nvPr>
+            <p:ph type="body" idx="1"/>
+          </p:nvPr>
+        </p:nvSpPr>
+        <p:spPr/>
+        <p:txBody>
+          <a:bodyPr/>
+          <a:lstStyle/>
+          <a:p>
+            <a:r>
+              <a:rPr lang="en-US" dirty="0"/>
+              <a:t/>
+            </a:r>
+            <a:endParaRPr lang="en-US" dirty="0"/>
+          </a:p>
+        </p:txBody>
+      </p:sp>
+      <p:sp>
+        <p:nvSpPr>
+          <p:cNvPr id="4" name="Slide Number Placeholder 3"/>
+          <p:cNvSpPr>
+            <a:spLocks noGrp="1"/>
+          </p:cNvSpPr>
+          <p:nvPr>
+            <p:ph type="sldNum" sz="quarter" idx="10"/>
+          </p:nvPr>
+        </p:nvSpPr>
+        <p:spPr/>
+        <p:txBody>
+          <a:bodyPr/>
+          <a:lstStyle/>
+          <a:p>
+            <a:fld id="{F7021451-1387-4CA6-816F-3879F97B5CBC}" type="slidenum">
+              <a:rPr lang="en-US"/>
+              <a:t>5</a:t>
+            </a:fld>
+            <a:endParaRPr lang="en-US"/>
+          </a:p>
+        </p:txBody>
+      </p:sp>
+    </p:spTree>
+    <p:extLst>
+      <p:ext uri="{BB962C8B-B14F-4D97-AF65-F5344CB8AC3E}">
+        <p14:creationId xmlns:p14="http://schemas.microsoft.com/office/powerpoint/2010/main" val="1024086991"/>
+      </p:ext>
+    </p:extLst>
+  </p:cSld>
+  <p:clrMapOvr>
+    <a:masterClrMapping/>
+  </p:clrMapOvr>
+</p:notes>
+</file>
+
 <file path=ppt/slideLayouts/slideLayout1.xml><?xml version="1.0" encoding="utf-8"?>
 <p:sldLayout xmlns:a="http://schemas.openxmlformats.org/drawingml/2006/main" xmlns:r="http://schemas.openxmlformats.org/officeDocument/2006/relationships" xmlns:p="http://schemas.openxmlformats.org/presentationml/2006/main" preserve="1">
   <p:cSld name="DEFAULT">
@@ -1170,7 +1259,7 @@
         </p:nvSpPr>
         <p:spPr>
           <a:xfrm>
-            <a:off x="731520" y="1280160"/>
+            <a:off x="731520" y="1097280"/>
             <a:ext cx="7772400" cy="1371600"/>
           </a:xfrm>
           <a:prstGeom prst="rect">
@@ -1187,7 +1276,7 @@
               <a:buNone/>
             </a:pPr>
             <a:r>
-              <a:rPr lang="en-US" sz="3600" b="1" dirty="0">
+              <a:rPr lang="en-US" sz="4000" b="1" dirty="0">
                 <a:solidFill>
                   <a:srgbClr val="FFFFFF"/>
                 </a:solidFill>
@@ -1197,7 +1286,7 @@
               </a:rPr>
               <a:t>Continental Drift</a:t>
             </a:r>
-            <a:endParaRPr lang="en-US" sz="3600" dirty="0"/>
+            <a:endParaRPr lang="en-US" sz="4000" dirty="0"/>
           </a:p>
         </p:txBody>
       </p:sp>
@@ -1209,7 +1298,7 @@
         </p:nvSpPr>
         <p:spPr>
           <a:xfrm>
-            <a:off x="731520" y="2743200"/>
+            <a:off x="731520" y="2560320"/>
             <a:ext cx="7772400" cy="548640"/>
           </a:xfrm>
           <a:prstGeom prst="rect">
@@ -1228,13 +1317,13 @@
             <a:r>
               <a:rPr lang="en-US" sz="1600" dirty="0">
                 <a:solidFill>
-                  <a:srgbClr val="9B9690"/>
+                  <a:srgbClr val="E9C46A"/>
                 </a:solidFill>
                 <a:latin typeface="Calibri" pitchFamily="34" charset="0"/>
                 <a:ea typeface="Calibri" pitchFamily="34" charset="-122"/>
                 <a:cs typeface="Calibri" pitchFamily="34" charset="-120"/>
               </a:rPr>
-              <a:t>G6 Science · Earth Science</a:t>
+              <a:t>Grade 6 Science · Mr Zocchi</a:t>
             </a:r>
             <a:endParaRPr lang="en-US" sz="1600" dirty="0"/>
           </a:p>
@@ -1242,14 +1331,36 @@
       </p:sp>
       <p:sp>
         <p:nvSpPr>
-          <p:cNvPr id="5" name="Text 3"/>
+          <p:cNvPr id="5" name="Shape 3"/>
           <p:cNvSpPr/>
           <p:nvPr/>
         </p:nvSpPr>
         <p:spPr>
           <a:xfrm>
-            <a:off x="731520" y="4389120"/>
-            <a:ext cx="7772400" cy="457200"/>
+            <a:off x="731520" y="3474720"/>
+            <a:ext cx="2011680" cy="411480"/>
+          </a:xfrm>
+          <a:prstGeom prst="roundRect">
+            <a:avLst>
+              <a:gd name="adj" fmla="val 17778"/>
+            </a:avLst>
+          </a:prstGeom>
+          <a:solidFill>
+            <a:srgbClr val="2A9D8F"/>
+          </a:solidFill>
+          <a:ln/>
+        </p:spPr>
+      </p:sp>
+      <p:sp>
+        <p:nvSpPr>
+          <p:cNvPr id="6" name="Text 4"/>
+          <p:cNvSpPr/>
+          <p:nvPr/>
+        </p:nvSpPr>
+        <p:spPr>
+          <a:xfrm>
+            <a:off x="731520" y="3474720"/>
+            <a:ext cx="2011680" cy="411480"/>
           </a:xfrm>
           <a:prstGeom prst="rect">
             <a:avLst/>
@@ -1261,21 +1372,21 @@
           <a:bodyPr wrap="square" rtlCol="0" anchor="ctr"/>
           <a:lstStyle/>
           <a:p>
-            <a:pPr indent="0" marL="0">
+            <a:pPr algn="ctr" indent="0" marL="0">
               <a:buNone/>
             </a:pPr>
             <a:r>
-              <a:rPr lang="en-US" sz="1000" dirty="0">
-                <a:solidFill>
-                  <a:srgbClr val="6B6660"/>
+              <a:rPr lang="en-US" sz="1200" b="1" dirty="0">
+                <a:solidFill>
+                  <a:srgbClr val="FFFFFF"/>
                 </a:solidFill>
                 <a:latin typeface="Calibri" pitchFamily="34" charset="0"/>
                 <a:ea typeface="Calibri" pitchFamily="34" charset="-122"/>
                 <a:cs typeface="Calibri" pitchFamily="34" charset="-120"/>
               </a:rPr>
-              <a:t>Mr Zocchi · mrzocchi.com</a:t>
-            </a:r>
-            <a:endParaRPr lang="en-US" sz="1000" dirty="0"/>
+              <a:t>Term 3 · Earth Science</a:t>
+            </a:r>
+            <a:endParaRPr lang="en-US" sz="1200" dirty="0"/>
           </a:p>
         </p:txBody>
       </p:sp>
@@ -1293,7 +1404,7 @@
     <p:bg>
       <p:bgPr>
         <a:solidFill>
-          <a:srgbClr val="FFFFFF"/>
+          <a:srgbClr val="FAF8F5"/>
         </a:solidFill>
       </p:bgPr>
     </p:bg>
@@ -1339,8 +1450,8 @@
         </p:nvSpPr>
         <p:spPr>
           <a:xfrm>
-            <a:off x="548640" y="274320"/>
-            <a:ext cx="8046720" cy="640080"/>
+            <a:off x="7772400" y="4709160"/>
+            <a:ext cx="1097280" cy="320040"/>
           </a:xfrm>
           <a:prstGeom prst="rect">
             <a:avLst/>
@@ -1349,14 +1460,105 @@
           <a:ln/>
         </p:spPr>
         <p:txBody>
-          <a:bodyPr wrap="square" lIns="0" tIns="0" rIns="0" bIns="0" rtlCol="0" anchor="ctr"/>
+          <a:bodyPr wrap="square" rtlCol="0" anchor="ctr"/>
+          <a:lstStyle/>
+          <a:p>
+            <a:pPr algn="r" indent="0" marL="0">
+              <a:buNone/>
+            </a:pPr>
+            <a:r>
+              <a:rPr lang="en-US" sz="900" dirty="0">
+                <a:solidFill>
+                  <a:srgbClr val="6B6660"/>
+                </a:solidFill>
+                <a:latin typeface="Calibri" pitchFamily="34" charset="0"/>
+                <a:ea typeface="Calibri" pitchFamily="34" charset="-122"/>
+                <a:cs typeface="Calibri" pitchFamily="34" charset="-120"/>
+              </a:rPr>
+              <a:t>2 / 5</a:t>
+            </a:r>
+            <a:endParaRPr lang="en-US" sz="900" dirty="0"/>
+          </a:p>
+        </p:txBody>
+      </p:sp>
+      <p:sp>
+        <p:nvSpPr>
+          <p:cNvPr id="4" name="Shape 2"/>
+          <p:cNvSpPr/>
+          <p:nvPr/>
+        </p:nvSpPr>
+        <p:spPr>
+          <a:xfrm>
+            <a:off x="1371600" y="914400"/>
+            <a:ext cx="6400800" cy="3200400"/>
+          </a:xfrm>
+          <a:prstGeom prst="rect">
+            <a:avLst/>
+          </a:prstGeom>
+          <a:solidFill>
+            <a:srgbClr val="FFFFFF"/>
+          </a:solidFill>
+          <a:ln w="12700">
+            <a:solidFill>
+              <a:srgbClr val="E5E2DC"/>
+            </a:solidFill>
+            <a:prstDash val="solid"/>
+          </a:ln>
+          <a:effectLst>
+            <a:outerShdw sx="100000" sy="100000" kx="0" ky="0" algn="bl" rotWithShape="0" blurRad="50800" dist="25400" dir="8100000">
+              <a:srgbClr val="000000">
+                <a:alpha val="10000"/>
+              </a:srgbClr>
+            </a:outerShdw>
+          </a:effectLst>
+        </p:spPr>
+      </p:sp>
+      <p:sp>
+        <p:nvSpPr>
+          <p:cNvPr id="5" name="Shape 3"/>
+          <p:cNvSpPr/>
+          <p:nvPr/>
+        </p:nvSpPr>
+        <p:spPr>
+          <a:xfrm>
+            <a:off x="1371600" y="914400"/>
+            <a:ext cx="91440" cy="3200400"/>
+          </a:xfrm>
+          <a:prstGeom prst="rect">
+            <a:avLst/>
+          </a:prstGeom>
+          <a:solidFill>
+            <a:srgbClr val="2A9D8F"/>
+          </a:solidFill>
+          <a:ln/>
+        </p:spPr>
+      </p:sp>
+      <p:sp>
+        <p:nvSpPr>
+          <p:cNvPr id="6" name="Text 4"/>
+          <p:cNvSpPr/>
+          <p:nvPr/>
+        </p:nvSpPr>
+        <p:spPr>
+          <a:xfrm>
+            <a:off x="1828800" y="1097280"/>
+            <a:ext cx="5669280" cy="640080"/>
+          </a:xfrm>
+          <a:prstGeom prst="rect">
+            <a:avLst/>
+          </a:prstGeom>
+          <a:noFill/>
+          <a:ln/>
+        </p:spPr>
+        <p:txBody>
+          <a:bodyPr wrap="square" rtlCol="0" anchor="ctr"/>
           <a:lstStyle/>
           <a:p>
             <a:pPr indent="0" marL="0">
               <a:buNone/>
             </a:pPr>
             <a:r>
-              <a:rPr lang="en-US" sz="2600" b="1" dirty="0">
+              <a:rPr lang="en-US" sz="2400" b="1" dirty="0">
                 <a:solidFill>
                   <a:srgbClr val="1B2A4A"/>
                 </a:solidFill>
@@ -1364,22 +1566,22 @@
                 <a:ea typeface="Georgia" pitchFamily="34" charset="-122"/>
                 <a:cs typeface="Georgia" pitchFamily="34" charset="-120"/>
               </a:rPr>
-              <a:t>Wegener's Theory</a:t>
-            </a:r>
-            <a:endParaRPr lang="en-US" sz="2600" dirty="0"/>
-          </a:p>
-        </p:txBody>
-      </p:sp>
-      <p:sp>
-        <p:nvSpPr>
-          <p:cNvPr id="4" name="Text 2"/>
+              <a:t>Wegener's Big Idea</a:t>
+            </a:r>
+            <a:endParaRPr lang="en-US" sz="2400" dirty="0"/>
+          </a:p>
+        </p:txBody>
+      </p:sp>
+      <p:sp>
+        <p:nvSpPr>
+          <p:cNvPr id="7" name="Text 5"/>
           <p:cNvSpPr/>
           <p:nvPr/>
         </p:nvSpPr>
         <p:spPr>
           <a:xfrm>
-            <a:off x="548640" y="1097280"/>
-            <a:ext cx="8046720" cy="3474720"/>
+            <a:off x="1828800" y="1828800"/>
+            <a:ext cx="5669280" cy="2011680"/>
           </a:xfrm>
           <a:prstGeom prst="rect">
             <a:avLst/>
@@ -1391,12 +1593,11 @@
           <a:bodyPr wrap="square" rtlCol="0" anchor="t"/>
           <a:lstStyle/>
           <a:p>
-            <a:pPr marL="342900" indent="-342900">
-              <a:spcAft>
-                <a:spcPts val="800"/>
-              </a:spcAft>
-              <a:buSzPct val="100000"/>
-              <a:buChar char="•"/>
+            <a:pPr indent="0" marL="0">
+              <a:lnSpc>
+                <a:spcPct val="130000"/>
+              </a:lnSpc>
+              <a:buNone/>
             </a:pPr>
             <a:r>
               <a:rPr lang="en-US" sz="1500" dirty="0">
@@ -1407,108 +1608,9 @@
                 <a:ea typeface="Calibri" pitchFamily="34" charset="-122"/>
                 <a:cs typeface="Calibri" pitchFamily="34" charset="-120"/>
               </a:rPr>
-              <a:t>Alfred Wegener proposed that continents were once joined as 'Pangaea'</a:t>
+              <a:t>In 1912, Alfred Wegener proposed that all continents were once joined in a supercontinent called Pangaea. Over millions of years, they drifted apart to their current positions. His theory was initially rejected because he could not explain HOW continents moved.</a:t>
             </a:r>
             <a:endParaRPr lang="en-US" sz="1500" dirty="0"/>
-          </a:p>
-          <a:p>
-            <a:pPr marL="342900" indent="-342900">
-              <a:spcAft>
-                <a:spcPts val="800"/>
-              </a:spcAft>
-              <a:buSzPct val="100000"/>
-              <a:buChar char="•"/>
-            </a:pPr>
-            <a:r>
-              <a:rPr lang="en-US" sz="1500" dirty="0">
-                <a:solidFill>
-                  <a:srgbClr val="3D3A36"/>
-                </a:solidFill>
-                <a:latin typeface="Calibri" pitchFamily="34" charset="0"/>
-                <a:ea typeface="Calibri" pitchFamily="34" charset="-122"/>
-                <a:cs typeface="Calibri" pitchFamily="34" charset="-120"/>
-              </a:rPr>
-              <a:t>Pangaea (~300 million years ago) slowly broke apart and drifted</a:t>
-            </a:r>
-            <a:endParaRPr lang="en-US" sz="1500" dirty="0"/>
-          </a:p>
-          <a:p>
-            <a:pPr marL="342900" indent="-342900">
-              <a:spcAft>
-                <a:spcPts val="800"/>
-              </a:spcAft>
-              <a:buSzPct val="100000"/>
-              <a:buChar char="•"/>
-            </a:pPr>
-            <a:r>
-              <a:rPr lang="en-US" sz="1500" dirty="0">
-                <a:solidFill>
-                  <a:srgbClr val="3D3A36"/>
-                </a:solidFill>
-                <a:latin typeface="Calibri" pitchFamily="34" charset="0"/>
-                <a:ea typeface="Calibri" pitchFamily="34" charset="-122"/>
-                <a:cs typeface="Calibri" pitchFamily="34" charset="-120"/>
-              </a:rPr>
-              <a:t>Continents fit together like a jigsaw puzzle (especially Africa + South America)</a:t>
-            </a:r>
-            <a:endParaRPr lang="en-US" sz="1500" dirty="0"/>
-          </a:p>
-          <a:p>
-            <a:pPr marL="342900" indent="-342900">
-              <a:spcAft>
-                <a:spcPts val="800"/>
-              </a:spcAft>
-              <a:buSzPct val="100000"/>
-              <a:buChar char="•"/>
-            </a:pPr>
-            <a:r>
-              <a:rPr lang="en-US" sz="1500" dirty="0">
-                <a:solidFill>
-                  <a:srgbClr val="3D3A36"/>
-                </a:solidFill>
-                <a:latin typeface="Calibri" pitchFamily="34" charset="0"/>
-                <a:ea typeface="Calibri" pitchFamily="34" charset="-122"/>
-                <a:cs typeface="Calibri" pitchFamily="34" charset="-120"/>
-              </a:rPr>
-              <a:t>His theory was rejected at first — he couldn't explain HOW continents moved</a:t>
-            </a:r>
-            <a:endParaRPr lang="en-US" sz="1500" dirty="0"/>
-          </a:p>
-        </p:txBody>
-      </p:sp>
-      <p:sp>
-        <p:nvSpPr>
-          <p:cNvPr id="5" name="Text 3"/>
-          <p:cNvSpPr/>
-          <p:nvPr/>
-        </p:nvSpPr>
-        <p:spPr>
-          <a:xfrm>
-            <a:off x="548640" y="4800600"/>
-            <a:ext cx="3657600" cy="274320"/>
-          </a:xfrm>
-          <a:prstGeom prst="rect">
-            <a:avLst/>
-          </a:prstGeom>
-          <a:noFill/>
-          <a:ln/>
-        </p:spPr>
-        <p:txBody>
-          <a:bodyPr wrap="square" rtlCol="0" anchor="ctr"/>
-          <a:lstStyle/>
-          <a:p>
-            <a:pPr indent="0" marL="0">
-              <a:buNone/>
-            </a:pPr>
-            <a:r>
-              <a:rPr lang="en-US" sz="800" dirty="0">
-                <a:solidFill>
-                  <a:srgbClr val="9B9690"/>
-                </a:solidFill>
-              </a:rPr>
-              <a:t>mrzocchi.com</a:t>
-            </a:r>
-            <a:endParaRPr lang="en-US" sz="800" dirty="0"/>
           </a:p>
         </p:txBody>
       </p:sp>
@@ -1526,7 +1628,7 @@
     <p:bg>
       <p:bgPr>
         <a:solidFill>
-          <a:srgbClr val="FFFFFF"/>
+          <a:srgbClr val="FAF8F5"/>
         </a:solidFill>
       </p:bgPr>
     </p:bg>
@@ -1572,8 +1674,8 @@
         </p:nvSpPr>
         <p:spPr>
           <a:xfrm>
-            <a:off x="548640" y="274320"/>
-            <a:ext cx="8046720" cy="640080"/>
+            <a:off x="7772400" y="4709160"/>
+            <a:ext cx="1097280" cy="320040"/>
           </a:xfrm>
           <a:prstGeom prst="rect">
             <a:avLst/>
@@ -1582,7 +1684,46 @@
           <a:ln/>
         </p:spPr>
         <p:txBody>
-          <a:bodyPr wrap="square" lIns="0" tIns="0" rIns="0" bIns="0" rtlCol="0" anchor="ctr"/>
+          <a:bodyPr wrap="square" rtlCol="0" anchor="ctr"/>
+          <a:lstStyle/>
+          <a:p>
+            <a:pPr algn="r" indent="0" marL="0">
+              <a:buNone/>
+            </a:pPr>
+            <a:r>
+              <a:rPr lang="en-US" sz="900" dirty="0">
+                <a:solidFill>
+                  <a:srgbClr val="6B6660"/>
+                </a:solidFill>
+                <a:latin typeface="Calibri" pitchFamily="34" charset="0"/>
+                <a:ea typeface="Calibri" pitchFamily="34" charset="-122"/>
+                <a:cs typeface="Calibri" pitchFamily="34" charset="-120"/>
+              </a:rPr>
+              <a:t>3 / 5</a:t>
+            </a:r>
+            <a:endParaRPr lang="en-US" sz="900" dirty="0"/>
+          </a:p>
+        </p:txBody>
+      </p:sp>
+      <p:sp>
+        <p:nvSpPr>
+          <p:cNvPr id="4" name="Text 2"/>
+          <p:cNvSpPr/>
+          <p:nvPr/>
+        </p:nvSpPr>
+        <p:spPr>
+          <a:xfrm>
+            <a:off x="457200" y="274320"/>
+            <a:ext cx="8229600" cy="640080"/>
+          </a:xfrm>
+          <a:prstGeom prst="rect">
+            <a:avLst/>
+          </a:prstGeom>
+          <a:noFill/>
+          <a:ln/>
+        </p:spPr>
+        <p:txBody>
+          <a:bodyPr wrap="square" rtlCol="0" anchor="ctr"/>
           <a:lstStyle/>
           <a:p>
             <a:pPr indent="0" marL="0">
@@ -1605,14 +1746,14 @@
       </p:sp>
       <p:sp>
         <p:nvSpPr>
-          <p:cNvPr id="4" name="Text 2"/>
+          <p:cNvPr id="5" name="Text 3"/>
           <p:cNvSpPr/>
           <p:nvPr/>
         </p:nvSpPr>
         <p:spPr>
           <a:xfrm>
-            <a:off x="548640" y="1097280"/>
-            <a:ext cx="8046720" cy="3474720"/>
+            <a:off x="457200" y="1188720"/>
+            <a:ext cx="3840480" cy="3474720"/>
           </a:xfrm>
           <a:prstGeom prst="rect">
             <a:avLst/>
@@ -1626,13 +1767,13 @@
           <a:p>
             <a:pPr marL="342900" indent="-342900">
               <a:spcAft>
-                <a:spcPts val="800"/>
+                <a:spcPts val="600"/>
               </a:spcAft>
               <a:buSzPct val="100000"/>
               <a:buChar char="•"/>
             </a:pPr>
             <a:r>
-              <a:rPr lang="en-US" sz="1500" dirty="0">
+              <a:rPr lang="en-US" sz="1400" dirty="0">
                 <a:solidFill>
                   <a:srgbClr val="3D3A36"/>
                 </a:solidFill>
@@ -1640,20 +1781,20 @@
                 <a:ea typeface="Calibri" pitchFamily="34" charset="-122"/>
                 <a:cs typeface="Calibri" pitchFamily="34" charset="-120"/>
               </a:rPr>
-              <a:t>FOSSIL evidence: same fossils on continents now separated by oceans</a:t>
-            </a:r>
-            <a:endParaRPr lang="en-US" sz="1500" dirty="0"/>
+              <a:t>Jigsaw fit: South America and Africa's coastlines match</a:t>
+            </a:r>
+            <a:endParaRPr lang="en-US" sz="1400" dirty="0"/>
           </a:p>
           <a:p>
             <a:pPr marL="342900" indent="-342900">
               <a:spcAft>
-                <a:spcPts val="800"/>
+                <a:spcPts val="600"/>
               </a:spcAft>
               <a:buSzPct val="100000"/>
               <a:buChar char="•"/>
             </a:pPr>
             <a:r>
-              <a:rPr lang="en-US" sz="1500" dirty="0">
+              <a:rPr lang="en-US" sz="1400" dirty="0">
                 <a:solidFill>
                   <a:srgbClr val="3D3A36"/>
                 </a:solidFill>
@@ -1661,20 +1802,20 @@
                 <a:ea typeface="Calibri" pitchFamily="34" charset="-122"/>
                 <a:cs typeface="Calibri" pitchFamily="34" charset="-120"/>
               </a:rPr>
-              <a:t>ROCK evidence: matching rock types and mountain chains across continents</a:t>
-            </a:r>
-            <a:endParaRPr lang="en-US" sz="1500" dirty="0"/>
+              <a:t>Matching fossils: same fossils found on continents now separated by oceans (e.g. Mesosaurus, Glossopteris)</a:t>
+            </a:r>
+            <a:endParaRPr lang="en-US" sz="1400" dirty="0"/>
           </a:p>
           <a:p>
             <a:pPr marL="342900" indent="-342900">
               <a:spcAft>
-                <a:spcPts val="800"/>
+                <a:spcPts val="600"/>
               </a:spcAft>
               <a:buSzPct val="100000"/>
               <a:buChar char="•"/>
             </a:pPr>
             <a:r>
-              <a:rPr lang="en-US" sz="1500" dirty="0">
+              <a:rPr lang="en-US" sz="1400" dirty="0">
                 <a:solidFill>
                   <a:srgbClr val="3D3A36"/>
                 </a:solidFill>
@@ -1682,20 +1823,20 @@
                 <a:ea typeface="Calibri" pitchFamily="34" charset="-122"/>
                 <a:cs typeface="Calibri" pitchFamily="34" charset="-120"/>
               </a:rPr>
-              <a:t>CLIMATE evidence: tropical plant fossils found in cold regions</a:t>
-            </a:r>
-            <a:endParaRPr lang="en-US" sz="1500" dirty="0"/>
+              <a:t>Matching rock types: identical rock formations on opposite sides of the Atlantic</a:t>
+            </a:r>
+            <a:endParaRPr lang="en-US" sz="1400" dirty="0"/>
           </a:p>
           <a:p>
             <a:pPr marL="342900" indent="-342900">
               <a:spcAft>
-                <a:spcPts val="800"/>
+                <a:spcPts val="600"/>
               </a:spcAft>
               <a:buSzPct val="100000"/>
               <a:buChar char="•"/>
             </a:pPr>
             <a:r>
-              <a:rPr lang="en-US" sz="1500" dirty="0">
+              <a:rPr lang="en-US" sz="1400" dirty="0">
                 <a:solidFill>
                   <a:srgbClr val="3D3A36"/>
                 </a:solidFill>
@@ -1703,20 +1844,20 @@
                 <a:ea typeface="Calibri" pitchFamily="34" charset="-122"/>
                 <a:cs typeface="Calibri" pitchFamily="34" charset="-120"/>
               </a:rPr>
-              <a:t>COASTLINE match: Africa and South America fit together</a:t>
-            </a:r>
-            <a:endParaRPr lang="en-US" sz="1500" dirty="0"/>
+              <a:t>Glacial evidence: scratch marks from glaciers found in places now near the equator</a:t>
+            </a:r>
+            <a:endParaRPr lang="en-US" sz="1400" dirty="0"/>
           </a:p>
           <a:p>
             <a:pPr marL="342900" indent="-342900">
               <a:spcAft>
-                <a:spcPts val="800"/>
+                <a:spcPts val="600"/>
               </a:spcAft>
               <a:buSzPct val="100000"/>
               <a:buChar char="•"/>
             </a:pPr>
             <a:r>
-              <a:rPr lang="en-US" sz="1500" dirty="0">
+              <a:rPr lang="en-US" sz="1400" dirty="0">
                 <a:solidFill>
                   <a:srgbClr val="3D3A36"/>
                 </a:solidFill>
@@ -1724,22 +1865,74 @@
                 <a:ea typeface="Calibri" pitchFamily="34" charset="-122"/>
                 <a:cs typeface="Calibri" pitchFamily="34" charset="-120"/>
               </a:rPr>
-              <a:t>Later discovery: convection currents explain the mechanism</a:t>
-            </a:r>
-            <a:endParaRPr lang="en-US" sz="1500" dirty="0"/>
-          </a:p>
-        </p:txBody>
-      </p:sp>
-      <p:sp>
-        <p:nvSpPr>
-          <p:cNvPr id="5" name="Text 3"/>
+              <a:t>Climate fossils: tropical plant fossils found in Antarctica</a:t>
+            </a:r>
+            <a:endParaRPr lang="en-US" sz="1400" dirty="0"/>
+          </a:p>
+        </p:txBody>
+      </p:sp>
+      <p:sp>
+        <p:nvSpPr>
+          <p:cNvPr id="6" name="Shape 4"/>
           <p:cNvSpPr/>
           <p:nvPr/>
         </p:nvSpPr>
         <p:spPr>
           <a:xfrm>
-            <a:off x="548640" y="4800600"/>
-            <a:ext cx="3657600" cy="274320"/>
+            <a:off x="4846320" y="1188720"/>
+            <a:ext cx="3840480" cy="3474720"/>
+          </a:xfrm>
+          <a:prstGeom prst="rect">
+            <a:avLst/>
+          </a:prstGeom>
+          <a:solidFill>
+            <a:srgbClr val="FFFFFF"/>
+          </a:solidFill>
+          <a:ln w="12700">
+            <a:solidFill>
+              <a:srgbClr val="E5E2DC"/>
+            </a:solidFill>
+            <a:prstDash val="solid"/>
+          </a:ln>
+          <a:effectLst>
+            <a:outerShdw sx="100000" sy="100000" kx="0" ky="0" algn="bl" rotWithShape="0" blurRad="50800" dist="25400" dir="8100000">
+              <a:srgbClr val="000000">
+                <a:alpha val="10000"/>
+              </a:srgbClr>
+            </a:outerShdw>
+          </a:effectLst>
+        </p:spPr>
+      </p:sp>
+      <p:sp>
+        <p:nvSpPr>
+          <p:cNvPr id="7" name="Shape 5"/>
+          <p:cNvSpPr/>
+          <p:nvPr/>
+        </p:nvSpPr>
+        <p:spPr>
+          <a:xfrm>
+            <a:off x="4846320" y="1188720"/>
+            <a:ext cx="3840480" cy="54864"/>
+          </a:xfrm>
+          <a:prstGeom prst="rect">
+            <a:avLst/>
+          </a:prstGeom>
+          <a:solidFill>
+            <a:srgbClr val="2A9D8F"/>
+          </a:solidFill>
+          <a:ln/>
+        </p:spPr>
+      </p:sp>
+      <p:sp>
+        <p:nvSpPr>
+          <p:cNvPr id="8" name="Text 6"/>
+          <p:cNvSpPr/>
+          <p:nvPr/>
+        </p:nvSpPr>
+        <p:spPr>
+          <a:xfrm>
+            <a:off x="5120640" y="1371600"/>
+            <a:ext cx="3291840" cy="3108960"/>
           </a:xfrm>
           <a:prstGeom prst="rect">
             <a:avLst/>
@@ -1748,21 +1941,136 @@
           <a:ln/>
         </p:spPr>
         <p:txBody>
-          <a:bodyPr wrap="square" rtlCol="0" anchor="ctr"/>
+          <a:bodyPr wrap="square" rtlCol="0" anchor="t"/>
           <a:lstStyle/>
           <a:p>
             <a:pPr indent="0" marL="0">
+              <a:spcAft>
+                <a:spcPts val="400"/>
+              </a:spcAft>
               <a:buNone/>
             </a:pPr>
             <a:r>
-              <a:rPr lang="en-US" sz="800" dirty="0">
-                <a:solidFill>
-                  <a:srgbClr val="9B9690"/>
-                </a:solidFill>
-              </a:rPr>
-              <a:t>mrzocchi.com</a:t>
-            </a:r>
-            <a:endParaRPr lang="en-US" sz="800" dirty="0"/>
+              <a:rPr lang="en-US" sz="1600" b="1" dirty="0">
+                <a:solidFill>
+                  <a:srgbClr val="1B2A4A"/>
+                </a:solidFill>
+                <a:latin typeface="Calibri" pitchFamily="34" charset="0"/>
+                <a:ea typeface="Calibri" pitchFamily="34" charset="-122"/>
+                <a:cs typeface="Calibri" pitchFamily="34" charset="-120"/>
+              </a:rPr>
+              <a:t>Why Was Wegener Rejected?</a:t>
+            </a:r>
+            <a:endParaRPr lang="en-US" sz="1600" dirty="0"/>
+          </a:p>
+          <a:p>
+            <a:pPr indent="0" marL="0">
+              <a:spcAft>
+                <a:spcPts val="400"/>
+              </a:spcAft>
+              <a:buNone/>
+            </a:pPr>
+            <a:endParaRPr lang="en-US" sz="1600" dirty="0"/>
+          </a:p>
+          <a:p>
+            <a:pPr indent="0" marL="0">
+              <a:spcAft>
+                <a:spcPts val="400"/>
+              </a:spcAft>
+              <a:buNone/>
+            </a:pPr>
+            <a:r>
+              <a:rPr lang="en-US" sz="1300" dirty="0">
+                <a:solidFill>
+                  <a:srgbClr val="3D3A36"/>
+                </a:solidFill>
+                <a:latin typeface="Calibri" pitchFamily="34" charset="0"/>
+                <a:ea typeface="Calibri" pitchFamily="34" charset="-122"/>
+                <a:cs typeface="Calibri" pitchFamily="34" charset="-120"/>
+              </a:rPr>
+              <a:t>He had no mechanism to explain HOW continents moved</a:t>
+            </a:r>
+            <a:endParaRPr lang="en-US" sz="1600" dirty="0"/>
+          </a:p>
+          <a:p>
+            <a:pPr indent="0" marL="0">
+              <a:spcAft>
+                <a:spcPts val="400"/>
+              </a:spcAft>
+              <a:buNone/>
+            </a:pPr>
+            <a:r>
+              <a:rPr lang="en-US" sz="1300" dirty="0">
+                <a:solidFill>
+                  <a:srgbClr val="3D3A36"/>
+                </a:solidFill>
+                <a:latin typeface="Calibri" pitchFamily="34" charset="0"/>
+                <a:ea typeface="Calibri" pitchFamily="34" charset="-122"/>
+                <a:cs typeface="Calibri" pitchFamily="34" charset="-120"/>
+              </a:rPr>
+              <a:t>Most scientists believed continents were fixed</a:t>
+            </a:r>
+            <a:endParaRPr lang="en-US" sz="1600" dirty="0"/>
+          </a:p>
+          <a:p>
+            <a:pPr indent="0" marL="0">
+              <a:spcAft>
+                <a:spcPts val="400"/>
+              </a:spcAft>
+              <a:buNone/>
+            </a:pPr>
+            <a:r>
+              <a:rPr lang="en-US" sz="1300" dirty="0">
+                <a:solidFill>
+                  <a:srgbClr val="3D3A36"/>
+                </a:solidFill>
+                <a:latin typeface="Calibri" pitchFamily="34" charset="0"/>
+                <a:ea typeface="Calibri" pitchFamily="34" charset="-122"/>
+                <a:cs typeface="Calibri" pitchFamily="34" charset="-120"/>
+              </a:rPr>
+              <a:t>He was a meteorologist, not a geologist — some dismissed his ideas</a:t>
+            </a:r>
+            <a:endParaRPr lang="en-US" sz="1600" dirty="0"/>
+          </a:p>
+          <a:p>
+            <a:pPr indent="0" marL="0">
+              <a:spcAft>
+                <a:spcPts val="400"/>
+              </a:spcAft>
+              <a:buNone/>
+            </a:pPr>
+            <a:r>
+              <a:rPr lang="en-US" sz="1300" dirty="0">
+                <a:solidFill>
+                  <a:srgbClr val="3D3A36"/>
+                </a:solidFill>
+                <a:latin typeface="Calibri" pitchFamily="34" charset="0"/>
+                <a:ea typeface="Calibri" pitchFamily="34" charset="-122"/>
+                <a:cs typeface="Calibri" pitchFamily="34" charset="-120"/>
+              </a:rPr>
+              <a:t>It took until the 1960s for plate tectonics theory to be accepted</a:t>
+            </a:r>
+            <a:endParaRPr lang="en-US" sz="1600" dirty="0"/>
+          </a:p>
+          <a:p>
+            <a:pPr indent="0" marL="0">
+              <a:spcAft>
+                <a:spcPts val="400"/>
+              </a:spcAft>
+              <a:buNone/>
+            </a:pPr>
+            <a:r>
+              <a:rPr lang="en-US" sz="1300" dirty="0">
+                <a:solidFill>
+                  <a:srgbClr val="3D3A36"/>
+                </a:solidFill>
+                <a:latin typeface="Calibri" pitchFamily="34" charset="0"/>
+                <a:ea typeface="Calibri" pitchFamily="34" charset="-122"/>
+                <a:cs typeface="Calibri" pitchFamily="34" charset="-120"/>
+              </a:rPr>
+              <a:t>Discovery of sea-floor spreading finally provided the mechanism</a:t>
+            </a:r>
+            <a:endParaRPr lang="en-US" sz="1600" dirty="0"/>
           </a:p>
         </p:txBody>
       </p:sp>
@@ -1777,6 +2085,263 @@
 <file path=ppt/slides/slide4.xml><?xml version="1.0" encoding="utf-8"?>
 <p:sld xmlns:a="http://schemas.openxmlformats.org/drawingml/2006/main" xmlns:r="http://schemas.openxmlformats.org/officeDocument/2006/relationships" xmlns:p="http://schemas.openxmlformats.org/presentationml/2006/main">
   <p:cSld name="Slide 4">
+    <p:bg>
+      <p:bgPr>
+        <a:solidFill>
+          <a:srgbClr val="FAF8F5"/>
+        </a:solidFill>
+      </p:bgPr>
+    </p:bg>
+    <p:spTree>
+      <p:nvGrpSpPr>
+        <p:cNvPr id="1" name=""/>
+        <p:cNvGrpSpPr/>
+        <p:nvPr/>
+      </p:nvGrpSpPr>
+      <p:grpSpPr>
+        <a:xfrm>
+          <a:off x="0" y="0"/>
+          <a:ext cx="0" cy="0"/>
+          <a:chOff x="0" y="0"/>
+          <a:chExt cx="0" cy="0"/>
+        </a:xfrm>
+      </p:grpSpPr>
+      <p:sp>
+        <p:nvSpPr>
+          <p:cNvPr id="2" name="Shape 0"/>
+          <p:cNvSpPr/>
+          <p:nvPr/>
+        </p:nvSpPr>
+        <p:spPr>
+          <a:xfrm>
+            <a:off x="0" y="0"/>
+            <a:ext cx="9144000" cy="54864"/>
+          </a:xfrm>
+          <a:prstGeom prst="rect">
+            <a:avLst/>
+          </a:prstGeom>
+          <a:solidFill>
+            <a:srgbClr val="2A9D8F"/>
+          </a:solidFill>
+          <a:ln/>
+        </p:spPr>
+      </p:sp>
+      <p:sp>
+        <p:nvSpPr>
+          <p:cNvPr id="3" name="Text 1"/>
+          <p:cNvSpPr/>
+          <p:nvPr/>
+        </p:nvSpPr>
+        <p:spPr>
+          <a:xfrm>
+            <a:off x="7772400" y="4709160"/>
+            <a:ext cx="1097280" cy="320040"/>
+          </a:xfrm>
+          <a:prstGeom prst="rect">
+            <a:avLst/>
+          </a:prstGeom>
+          <a:noFill/>
+          <a:ln/>
+        </p:spPr>
+        <p:txBody>
+          <a:bodyPr wrap="square" rtlCol="0" anchor="ctr"/>
+          <a:lstStyle/>
+          <a:p>
+            <a:pPr algn="r" indent="0" marL="0">
+              <a:buNone/>
+            </a:pPr>
+            <a:r>
+              <a:rPr lang="en-US" sz="900" dirty="0">
+                <a:solidFill>
+                  <a:srgbClr val="6B6660"/>
+                </a:solidFill>
+                <a:latin typeface="Calibri" pitchFamily="34" charset="0"/>
+                <a:ea typeface="Calibri" pitchFamily="34" charset="-122"/>
+                <a:cs typeface="Calibri" pitchFamily="34" charset="-120"/>
+              </a:rPr>
+              <a:t>4 / 5</a:t>
+            </a:r>
+            <a:endParaRPr lang="en-US" sz="900" dirty="0"/>
+          </a:p>
+        </p:txBody>
+      </p:sp>
+      <p:sp>
+        <p:nvSpPr>
+          <p:cNvPr id="4" name="Text 2"/>
+          <p:cNvSpPr/>
+          <p:nvPr/>
+        </p:nvSpPr>
+        <p:spPr>
+          <a:xfrm>
+            <a:off x="457200" y="274320"/>
+            <a:ext cx="8229600" cy="640080"/>
+          </a:xfrm>
+          <a:prstGeom prst="rect">
+            <a:avLst/>
+          </a:prstGeom>
+          <a:noFill/>
+          <a:ln/>
+        </p:spPr>
+        <p:txBody>
+          <a:bodyPr wrap="square" rtlCol="0" anchor="ctr"/>
+          <a:lstStyle/>
+          <a:p>
+            <a:pPr indent="0" marL="0">
+              <a:buNone/>
+            </a:pPr>
+            <a:r>
+              <a:rPr lang="en-US" sz="2600" b="1" dirty="0">
+                <a:solidFill>
+                  <a:srgbClr val="1B2A4A"/>
+                </a:solidFill>
+                <a:latin typeface="Georgia" pitchFamily="34" charset="0"/>
+                <a:ea typeface="Georgia" pitchFamily="34" charset="-122"/>
+                <a:cs typeface="Georgia" pitchFamily="34" charset="-120"/>
+              </a:rPr>
+              <a:t>From Pangaea to Today</a:t>
+            </a:r>
+            <a:endParaRPr lang="en-US" sz="2600" dirty="0"/>
+          </a:p>
+        </p:txBody>
+      </p:sp>
+      <p:sp>
+        <p:nvSpPr>
+          <p:cNvPr id="5" name="Text 3"/>
+          <p:cNvSpPr/>
+          <p:nvPr/>
+        </p:nvSpPr>
+        <p:spPr>
+          <a:xfrm>
+            <a:off x="457200" y="1097280"/>
+            <a:ext cx="8229600" cy="3657600"/>
+          </a:xfrm>
+          <a:prstGeom prst="rect">
+            <a:avLst/>
+          </a:prstGeom>
+          <a:noFill/>
+          <a:ln/>
+        </p:spPr>
+        <p:txBody>
+          <a:bodyPr wrap="square" rtlCol="0" anchor="t"/>
+          <a:lstStyle/>
+          <a:p>
+            <a:pPr marL="342900" indent="-342900">
+              <a:spcAft>
+                <a:spcPts val="800"/>
+              </a:spcAft>
+              <a:buSzPct val="100000"/>
+              <a:buChar char="•"/>
+            </a:pPr>
+            <a:r>
+              <a:rPr lang="en-US" sz="1400" dirty="0">
+                <a:solidFill>
+                  <a:srgbClr val="3D3A36"/>
+                </a:solidFill>
+                <a:latin typeface="Calibri" pitchFamily="34" charset="0"/>
+                <a:ea typeface="Calibri" pitchFamily="34" charset="-122"/>
+                <a:cs typeface="Calibri" pitchFamily="34" charset="-120"/>
+              </a:rPr>
+              <a:t>~300 million years ago: all land joined as Pangaea</a:t>
+            </a:r>
+            <a:endParaRPr lang="en-US" sz="1400" dirty="0"/>
+          </a:p>
+          <a:p>
+            <a:pPr marL="342900" indent="-342900">
+              <a:spcAft>
+                <a:spcPts val="800"/>
+              </a:spcAft>
+              <a:buSzPct val="100000"/>
+              <a:buChar char="•"/>
+            </a:pPr>
+            <a:r>
+              <a:rPr lang="en-US" sz="1400" dirty="0">
+                <a:solidFill>
+                  <a:srgbClr val="3D3A36"/>
+                </a:solidFill>
+                <a:latin typeface="Calibri" pitchFamily="34" charset="0"/>
+                <a:ea typeface="Calibri" pitchFamily="34" charset="-122"/>
+                <a:cs typeface="Calibri" pitchFamily="34" charset="-120"/>
+              </a:rPr>
+              <a:t>~200 million years ago: Pangaea split into Laurasia (north) and Gondwana (south)</a:t>
+            </a:r>
+            <a:endParaRPr lang="en-US" sz="1400" dirty="0"/>
+          </a:p>
+          <a:p>
+            <a:pPr marL="342900" indent="-342900">
+              <a:spcAft>
+                <a:spcPts val="800"/>
+              </a:spcAft>
+              <a:buSzPct val="100000"/>
+              <a:buChar char="•"/>
+            </a:pPr>
+            <a:r>
+              <a:rPr lang="en-US" sz="1400" dirty="0">
+                <a:solidFill>
+                  <a:srgbClr val="3D3A36"/>
+                </a:solidFill>
+                <a:latin typeface="Calibri" pitchFamily="34" charset="0"/>
+                <a:ea typeface="Calibri" pitchFamily="34" charset="-122"/>
+                <a:cs typeface="Calibri" pitchFamily="34" charset="-120"/>
+              </a:rPr>
+              <a:t>~100 million years ago: Atlantic Ocean forming as continents separate</a:t>
+            </a:r>
+            <a:endParaRPr lang="en-US" sz="1400" dirty="0"/>
+          </a:p>
+          <a:p>
+            <a:pPr marL="342900" indent="-342900">
+              <a:spcAft>
+                <a:spcPts val="800"/>
+              </a:spcAft>
+              <a:buSzPct val="100000"/>
+              <a:buChar char="•"/>
+            </a:pPr>
+            <a:r>
+              <a:rPr lang="en-US" sz="1400" dirty="0">
+                <a:solidFill>
+                  <a:srgbClr val="3D3A36"/>
+                </a:solidFill>
+                <a:latin typeface="Calibri" pitchFamily="34" charset="0"/>
+                <a:ea typeface="Calibri" pitchFamily="34" charset="-122"/>
+                <a:cs typeface="Calibri" pitchFamily="34" charset="-120"/>
+              </a:rPr>
+              <a:t>Today: continents still moving at 2–5 cm per year</a:t>
+            </a:r>
+            <a:endParaRPr lang="en-US" sz="1400" dirty="0"/>
+          </a:p>
+          <a:p>
+            <a:pPr marL="342900" indent="-342900">
+              <a:spcAft>
+                <a:spcPts val="800"/>
+              </a:spcAft>
+              <a:buSzPct val="100000"/>
+              <a:buChar char="•"/>
+            </a:pPr>
+            <a:r>
+              <a:rPr lang="en-US" sz="1400" dirty="0">
+                <a:solidFill>
+                  <a:srgbClr val="3D3A36"/>
+                </a:solidFill>
+                <a:latin typeface="Calibri" pitchFamily="34" charset="0"/>
+                <a:ea typeface="Calibri" pitchFamily="34" charset="-122"/>
+                <a:cs typeface="Calibri" pitchFamily="34" charset="-120"/>
+              </a:rPr>
+              <a:t>Future: in ~250 million years, continents may rejoin as 'Pangaea Ultima'</a:t>
+            </a:r>
+            <a:endParaRPr lang="en-US" sz="1400" dirty="0"/>
+          </a:p>
+        </p:txBody>
+      </p:sp>
+    </p:spTree>
+  </p:cSld>
+  <p:clrMapOvr>
+    <a:masterClrMapping/>
+  </p:clrMapOvr>
+</p:sld>
+</file>
+
+<file path=ppt/slides/slide5.xml><?xml version="1.0" encoding="utf-8"?>
+<p:sld xmlns:a="http://schemas.openxmlformats.org/drawingml/2006/main" xmlns:r="http://schemas.openxmlformats.org/officeDocument/2006/relationships" xmlns:p="http://schemas.openxmlformats.org/presentationml/2006/main">
+  <p:cSld name="Slide 5">
     <p:bg>
       <p:bgPr>
         <a:solidFill>
@@ -1807,13 +2372,13 @@
         <p:spPr>
           <a:xfrm>
             <a:off x="0" y="0"/>
-            <a:ext cx="9144000" cy="54864"/>
-          </a:xfrm>
-          <a:prstGeom prst="rect">
-            <a:avLst/>
-          </a:prstGeom>
-          <a:solidFill>
-            <a:srgbClr val="2A9D8F"/>
+            <a:ext cx="109728" cy="5143500"/>
+          </a:xfrm>
+          <a:prstGeom prst="rect">
+            <a:avLst/>
+          </a:prstGeom>
+          <a:solidFill>
+            <a:srgbClr val="E9C46A"/>
           </a:solidFill>
           <a:ln/>
         </p:spPr>
@@ -1826,8 +2391,8 @@
         </p:nvSpPr>
         <p:spPr>
           <a:xfrm>
-            <a:off x="548640" y="457200"/>
-            <a:ext cx="8046720" cy="640080"/>
+            <a:off x="731520" y="457200"/>
+            <a:ext cx="7772400" cy="731520"/>
           </a:xfrm>
           <a:prstGeom prst="rect">
             <a:avLst/>
@@ -1843,7 +2408,7 @@
               <a:buNone/>
             </a:pPr>
             <a:r>
-              <a:rPr lang="en-US" sz="2800" b="1" dirty="0">
+              <a:rPr lang="en-US" sz="3200" b="1" dirty="0">
                 <a:solidFill>
                   <a:srgbClr val="FFFFFF"/>
                 </a:solidFill>
@@ -1853,7 +2418,7 @@
               </a:rPr>
               <a:t>Key Takeaways</a:t>
             </a:r>
-            <a:endParaRPr lang="en-US" sz="2800" dirty="0"/>
+            <a:endParaRPr lang="en-US" sz="3200" dirty="0"/>
           </a:p>
         </p:txBody>
       </p:sp>
@@ -1865,8 +2430,8 @@
         </p:nvSpPr>
         <p:spPr>
           <a:xfrm>
-            <a:off x="731520" y="1371600"/>
-            <a:ext cx="7680960" cy="3200400"/>
+            <a:off x="731520" y="1463040"/>
+            <a:ext cx="7772400" cy="3200400"/>
           </a:xfrm>
           <a:prstGeom prst="rect">
             <a:avLst/>
@@ -1886,7 +2451,7 @@
               <a:buChar char="•"/>
             </a:pPr>
             <a:r>
-              <a:rPr lang="en-US" sz="1600" dirty="0">
+              <a:rPr lang="en-US" sz="1500" dirty="0">
                 <a:solidFill>
                   <a:srgbClr val="CADCFC"/>
                 </a:solidFill>
@@ -1894,9 +2459,9 @@
                 <a:ea typeface="Calibri" pitchFamily="34" charset="-122"/>
                 <a:cs typeface="Calibri" pitchFamily="34" charset="-120"/>
               </a:rPr>
-              <a:t>Pangaea = ancient supercontinent that broke apart ~200 million years ago</a:t>
-            </a:r>
-            <a:endParaRPr lang="en-US" sz="1600" dirty="0"/>
+              <a:t>Wegener proposed Pangaea — all continents once joined</a:t>
+            </a:r>
+            <a:endParaRPr lang="en-US" sz="1500" dirty="0"/>
           </a:p>
           <a:p>
             <a:pPr marL="342900" indent="-342900">
@@ -1907,7 +2472,7 @@
               <a:buChar char="•"/>
             </a:pPr>
             <a:r>
-              <a:rPr lang="en-US" sz="1600" dirty="0">
+              <a:rPr lang="en-US" sz="1500" dirty="0">
                 <a:solidFill>
                   <a:srgbClr val="CADCFC"/>
                 </a:solidFill>
@@ -1915,9 +2480,9 @@
                 <a:ea typeface="Calibri" pitchFamily="34" charset="-122"/>
                 <a:cs typeface="Calibri" pitchFamily="34" charset="-120"/>
               </a:rPr>
-              <a:t>Evidence: matching fossils, rocks, mountains, and coastlines</a:t>
-            </a:r>
-            <a:endParaRPr lang="en-US" sz="1600" dirty="0"/>
+              <a:t>Evidence: jigsaw fit, matching fossils, matching rocks, glacial scratches</a:t>
+            </a:r>
+            <a:endParaRPr lang="en-US" sz="1500" dirty="0"/>
           </a:p>
           <a:p>
             <a:pPr marL="342900" indent="-342900">
@@ -1928,7 +2493,7 @@
               <a:buChar char="•"/>
             </a:pPr>
             <a:r>
-              <a:rPr lang="en-US" sz="1600" dirty="0">
+              <a:rPr lang="en-US" sz="1500" dirty="0">
                 <a:solidFill>
                   <a:srgbClr val="CADCFC"/>
                 </a:solidFill>
@@ -1936,9 +2501,9 @@
                 <a:ea typeface="Calibri" pitchFamily="34" charset="-122"/>
                 <a:cs typeface="Calibri" pitchFamily="34" charset="-120"/>
               </a:rPr>
-              <a:t>Wegener's theory was rejected because he had no mechanism</a:t>
-            </a:r>
-            <a:endParaRPr lang="en-US" sz="1600" dirty="0"/>
+              <a:t>Rejected because no mechanism for HOW continents moved</a:t>
+            </a:r>
+            <a:endParaRPr lang="en-US" sz="1500" dirty="0"/>
           </a:p>
           <a:p>
             <a:pPr marL="342900" indent="-342900">
@@ -1949,7 +2514,7 @@
               <a:buChar char="•"/>
             </a:pPr>
             <a:r>
-              <a:rPr lang="en-US" sz="1600" dirty="0">
+              <a:rPr lang="en-US" sz="1500" dirty="0">
                 <a:solidFill>
                   <a:srgbClr val="CADCFC"/>
                 </a:solidFill>
@@ -1957,9 +2522,30 @@
                 <a:ea typeface="Calibri" pitchFamily="34" charset="-122"/>
                 <a:cs typeface="Calibri" pitchFamily="34" charset="-120"/>
               </a:rPr>
-              <a:t>Convection currents (discovered later) provided the missing explanation</a:t>
-            </a:r>
-            <a:endParaRPr lang="en-US" sz="1600" dirty="0"/>
+              <a:t>Sea-floor spreading (1960s) confirmed the mechanism</a:t>
+            </a:r>
+            <a:endParaRPr lang="en-US" sz="1500" dirty="0"/>
+          </a:p>
+          <a:p>
+            <a:pPr marL="342900" indent="-342900">
+              <a:spcAft>
+                <a:spcPts val="1000"/>
+              </a:spcAft>
+              <a:buSzPct val="100000"/>
+              <a:buChar char="•"/>
+            </a:pPr>
+            <a:r>
+              <a:rPr lang="en-US" sz="1500" dirty="0">
+                <a:solidFill>
+                  <a:srgbClr val="CADCFC"/>
+                </a:solidFill>
+                <a:latin typeface="Calibri" pitchFamily="34" charset="0"/>
+                <a:ea typeface="Calibri" pitchFamily="34" charset="-122"/>
+                <a:cs typeface="Calibri" pitchFamily="34" charset="-120"/>
+              </a:rPr>
+              <a:t>Continents still moving at ~2–5 cm per year</a:t>
+            </a:r>
+            <a:endParaRPr lang="en-US" sz="1500" dirty="0"/>
           </a:p>
         </p:txBody>
       </p:sp>
@@ -1971,8 +2557,8 @@
         </p:nvSpPr>
         <p:spPr>
           <a:xfrm>
-            <a:off x="548640" y="4572000"/>
-            <a:ext cx="3657600" cy="274320"/>
+            <a:off x="731520" y="4572000"/>
+            <a:ext cx="7772400" cy="365760"/>
           </a:xfrm>
           <a:prstGeom prst="rect">
             <a:avLst/>
@@ -1988,14 +2574,17 @@
               <a:buNone/>
             </a:pPr>
             <a:r>
-              <a:rPr lang="en-US" sz="1000" dirty="0">
-                <a:solidFill>
-                  <a:srgbClr val="6B6660"/>
-                </a:solidFill>
+              <a:rPr lang="en-US" sz="1100" dirty="0">
+                <a:solidFill>
+                  <a:srgbClr val="E9C46A"/>
+                </a:solidFill>
+                <a:latin typeface="Calibri" pitchFamily="34" charset="0"/>
+                <a:ea typeface="Calibri" pitchFamily="34" charset="-122"/>
+                <a:cs typeface="Calibri" pitchFamily="34" charset="-120"/>
               </a:rPr>
               <a:t>mrzocchi.com</a:t>
             </a:r>
-            <a:endParaRPr lang="en-US" sz="1000" dirty="0"/>
+            <a:endParaRPr lang="en-US" sz="1100" dirty="0"/>
           </a:p>
         </p:txBody>
       </p:sp>

--- a/static/ppts/G6_Sci_Continental_Drift.pptx
+++ b/static/ppts/G6_Sci_Continental_Drift.pptx
@@ -10,9 +10,12 @@
     <p:sldId id="258" r:id="rId4"/>
     <p:sldId id="259" r:id="rId5"/>
     <p:sldId id="260" r:id="rId6"/>
+    <p:sldId id="261" r:id="rId7"/>
+    <p:sldId id="262" r:id="rId8"/>
+    <p:sldId id="263" r:id="rId9"/>
   </p:sldIdLst>
   <p:notesMasterIdLst>
-    <p:notesMasterId r:id="rId7"/>
+    <p:notesMasterId r:id="rId10"/>
   </p:notesMasterIdLst>
   <p:sldSz cx="9144000" cy="5143500"/>
   <p:notesSz cx="5143500" cy="9144000"/>
@@ -900,6 +903,270 @@
 </p:notes>
 </file>
 
+<file path=ppt/notesSlides/notesSlide6.xml><?xml version="1.0" encoding="utf-8"?>
+<p:notes xmlns:a="http://schemas.openxmlformats.org/drawingml/2006/main" xmlns:r="http://schemas.openxmlformats.org/officeDocument/2006/relationships" xmlns:p="http://schemas.openxmlformats.org/presentationml/2006/main">
+  <p:cSld>
+    <p:spTree>
+      <p:nvGrpSpPr>
+        <p:cNvPr id="1" name=""/>
+        <p:cNvGrpSpPr/>
+        <p:nvPr/>
+      </p:nvGrpSpPr>
+      <p:grpSpPr>
+        <a:xfrm>
+          <a:off x="0" y="0"/>
+          <a:ext cx="0" cy="0"/>
+          <a:chOff x="0" y="0"/>
+          <a:chExt cx="0" cy="0"/>
+        </a:xfrm>
+      </p:grpSpPr>
+      <p:sp>
+        <p:nvSpPr>
+          <p:cNvPr id="2" name="Slide Image Placeholder 1"/>
+          <p:cNvSpPr>
+            <a:spLocks noGrp="1" noRot="1" noChangeAspect="1"/>
+          </p:cNvSpPr>
+          <p:nvPr>
+            <p:ph type="sldImg"/>
+          </p:nvPr>
+        </p:nvSpPr>
+        <p:spPr/>
+      </p:sp>
+      <p:sp>
+        <p:nvSpPr>
+          <p:cNvPr id="3" name="Notes Placeholder 2"/>
+          <p:cNvSpPr>
+            <a:spLocks noGrp="1"/>
+          </p:cNvSpPr>
+          <p:nvPr>
+            <p:ph type="body" idx="1"/>
+          </p:nvPr>
+        </p:nvSpPr>
+        <p:spPr/>
+        <p:txBody>
+          <a:bodyPr/>
+          <a:lstStyle/>
+          <a:p>
+            <a:r>
+              <a:rPr lang="en-US" dirty="0"/>
+              <a:t/>
+            </a:r>
+            <a:endParaRPr lang="en-US" dirty="0"/>
+          </a:p>
+        </p:txBody>
+      </p:sp>
+      <p:sp>
+        <p:nvSpPr>
+          <p:cNvPr id="4" name="Slide Number Placeholder 3"/>
+          <p:cNvSpPr>
+            <a:spLocks noGrp="1"/>
+          </p:cNvSpPr>
+          <p:nvPr>
+            <p:ph type="sldNum" sz="quarter" idx="10"/>
+          </p:nvPr>
+        </p:nvSpPr>
+        <p:spPr/>
+        <p:txBody>
+          <a:bodyPr/>
+          <a:lstStyle/>
+          <a:p>
+            <a:fld id="{F7021451-1387-4CA6-816F-3879F97B5CBC}" type="slidenum">
+              <a:rPr lang="en-US"/>
+              <a:t>6</a:t>
+            </a:fld>
+            <a:endParaRPr lang="en-US"/>
+          </a:p>
+        </p:txBody>
+      </p:sp>
+    </p:spTree>
+    <p:extLst>
+      <p:ext uri="{BB962C8B-B14F-4D97-AF65-F5344CB8AC3E}">
+        <p14:creationId xmlns:p14="http://schemas.microsoft.com/office/powerpoint/2010/main" val="1024086991"/>
+      </p:ext>
+    </p:extLst>
+  </p:cSld>
+  <p:clrMapOvr>
+    <a:masterClrMapping/>
+  </p:clrMapOvr>
+</p:notes>
+</file>
+
+<file path=ppt/notesSlides/notesSlide7.xml><?xml version="1.0" encoding="utf-8"?>
+<p:notes xmlns:a="http://schemas.openxmlformats.org/drawingml/2006/main" xmlns:r="http://schemas.openxmlformats.org/officeDocument/2006/relationships" xmlns:p="http://schemas.openxmlformats.org/presentationml/2006/main">
+  <p:cSld>
+    <p:spTree>
+      <p:nvGrpSpPr>
+        <p:cNvPr id="1" name=""/>
+        <p:cNvGrpSpPr/>
+        <p:nvPr/>
+      </p:nvGrpSpPr>
+      <p:grpSpPr>
+        <a:xfrm>
+          <a:off x="0" y="0"/>
+          <a:ext cx="0" cy="0"/>
+          <a:chOff x="0" y="0"/>
+          <a:chExt cx="0" cy="0"/>
+        </a:xfrm>
+      </p:grpSpPr>
+      <p:sp>
+        <p:nvSpPr>
+          <p:cNvPr id="2" name="Slide Image Placeholder 1"/>
+          <p:cNvSpPr>
+            <a:spLocks noGrp="1" noRot="1" noChangeAspect="1"/>
+          </p:cNvSpPr>
+          <p:nvPr>
+            <p:ph type="sldImg"/>
+          </p:nvPr>
+        </p:nvSpPr>
+        <p:spPr/>
+      </p:sp>
+      <p:sp>
+        <p:nvSpPr>
+          <p:cNvPr id="3" name="Notes Placeholder 2"/>
+          <p:cNvSpPr>
+            <a:spLocks noGrp="1"/>
+          </p:cNvSpPr>
+          <p:nvPr>
+            <p:ph type="body" idx="1"/>
+          </p:nvPr>
+        </p:nvSpPr>
+        <p:spPr/>
+        <p:txBody>
+          <a:bodyPr/>
+          <a:lstStyle/>
+          <a:p>
+            <a:r>
+              <a:rPr lang="en-US" dirty="0"/>
+              <a:t/>
+            </a:r>
+            <a:endParaRPr lang="en-US" dirty="0"/>
+          </a:p>
+        </p:txBody>
+      </p:sp>
+      <p:sp>
+        <p:nvSpPr>
+          <p:cNvPr id="4" name="Slide Number Placeholder 3"/>
+          <p:cNvSpPr>
+            <a:spLocks noGrp="1"/>
+          </p:cNvSpPr>
+          <p:nvPr>
+            <p:ph type="sldNum" sz="quarter" idx="10"/>
+          </p:nvPr>
+        </p:nvSpPr>
+        <p:spPr/>
+        <p:txBody>
+          <a:bodyPr/>
+          <a:lstStyle/>
+          <a:p>
+            <a:fld id="{F7021451-1387-4CA6-816F-3879F97B5CBC}" type="slidenum">
+              <a:rPr lang="en-US"/>
+              <a:t>7</a:t>
+            </a:fld>
+            <a:endParaRPr lang="en-US"/>
+          </a:p>
+        </p:txBody>
+      </p:sp>
+    </p:spTree>
+    <p:extLst>
+      <p:ext uri="{BB962C8B-B14F-4D97-AF65-F5344CB8AC3E}">
+        <p14:creationId xmlns:p14="http://schemas.microsoft.com/office/powerpoint/2010/main" val="1024086991"/>
+      </p:ext>
+    </p:extLst>
+  </p:cSld>
+  <p:clrMapOvr>
+    <a:masterClrMapping/>
+  </p:clrMapOvr>
+</p:notes>
+</file>
+
+<file path=ppt/notesSlides/notesSlide8.xml><?xml version="1.0" encoding="utf-8"?>
+<p:notes xmlns:a="http://schemas.openxmlformats.org/drawingml/2006/main" xmlns:r="http://schemas.openxmlformats.org/officeDocument/2006/relationships" xmlns:p="http://schemas.openxmlformats.org/presentationml/2006/main">
+  <p:cSld>
+    <p:spTree>
+      <p:nvGrpSpPr>
+        <p:cNvPr id="1" name=""/>
+        <p:cNvGrpSpPr/>
+        <p:nvPr/>
+      </p:nvGrpSpPr>
+      <p:grpSpPr>
+        <a:xfrm>
+          <a:off x="0" y="0"/>
+          <a:ext cx="0" cy="0"/>
+          <a:chOff x="0" y="0"/>
+          <a:chExt cx="0" cy="0"/>
+        </a:xfrm>
+      </p:grpSpPr>
+      <p:sp>
+        <p:nvSpPr>
+          <p:cNvPr id="2" name="Slide Image Placeholder 1"/>
+          <p:cNvSpPr>
+            <a:spLocks noGrp="1" noRot="1" noChangeAspect="1"/>
+          </p:cNvSpPr>
+          <p:nvPr>
+            <p:ph type="sldImg"/>
+          </p:nvPr>
+        </p:nvSpPr>
+        <p:spPr/>
+      </p:sp>
+      <p:sp>
+        <p:nvSpPr>
+          <p:cNvPr id="3" name="Notes Placeholder 2"/>
+          <p:cNvSpPr>
+            <a:spLocks noGrp="1"/>
+          </p:cNvSpPr>
+          <p:nvPr>
+            <p:ph type="body" idx="1"/>
+          </p:nvPr>
+        </p:nvSpPr>
+        <p:spPr/>
+        <p:txBody>
+          <a:bodyPr/>
+          <a:lstStyle/>
+          <a:p>
+            <a:r>
+              <a:rPr lang="en-US" dirty="0"/>
+              <a:t/>
+            </a:r>
+            <a:endParaRPr lang="en-US" dirty="0"/>
+          </a:p>
+        </p:txBody>
+      </p:sp>
+      <p:sp>
+        <p:nvSpPr>
+          <p:cNvPr id="4" name="Slide Number Placeholder 3"/>
+          <p:cNvSpPr>
+            <a:spLocks noGrp="1"/>
+          </p:cNvSpPr>
+          <p:nvPr>
+            <p:ph type="sldNum" sz="quarter" idx="10"/>
+          </p:nvPr>
+        </p:nvSpPr>
+        <p:spPr/>
+        <p:txBody>
+          <a:bodyPr/>
+          <a:lstStyle/>
+          <a:p>
+            <a:fld id="{F7021451-1387-4CA6-816F-3879F97B5CBC}" type="slidenum">
+              <a:rPr lang="en-US"/>
+              <a:t>8</a:t>
+            </a:fld>
+            <a:endParaRPr lang="en-US"/>
+          </a:p>
+        </p:txBody>
+      </p:sp>
+    </p:spTree>
+    <p:extLst>
+      <p:ext uri="{BB962C8B-B14F-4D97-AF65-F5344CB8AC3E}">
+        <p14:creationId xmlns:p14="http://schemas.microsoft.com/office/powerpoint/2010/main" val="1024086991"/>
+      </p:ext>
+    </p:extLst>
+  </p:cSld>
+  <p:clrMapOvr>
+    <a:masterClrMapping/>
+  </p:clrMapOvr>
+</p:notes>
+</file>
+
 <file path=ppt/slideLayouts/slideLayout1.xml><?xml version="1.0" encoding="utf-8"?>
 <p:sldLayout xmlns:a="http://schemas.openxmlformats.org/drawingml/2006/main" xmlns:r="http://schemas.openxmlformats.org/officeDocument/2006/relationships" xmlns:p="http://schemas.openxmlformats.org/presentationml/2006/main" preserve="1">
   <p:cSld name="DEFAULT">
@@ -1210,13 +1477,6 @@
 <file path=ppt/slides/slide1.xml><?xml version="1.0" encoding="utf-8"?>
 <p:sld xmlns:a="http://schemas.openxmlformats.org/drawingml/2006/main" xmlns:r="http://schemas.openxmlformats.org/officeDocument/2006/relationships" xmlns:p="http://schemas.openxmlformats.org/presentationml/2006/main">
   <p:cSld name="Slide 1">
-    <p:bg>
-      <p:bgPr>
-        <a:solidFill>
-          <a:srgbClr val="1B2A4A"/>
-        </a:solidFill>
-      </p:bgPr>
-    </p:bg>
     <p:spTree>
       <p:nvGrpSpPr>
         <p:cNvPr id="1" name=""/>
@@ -1240,7 +1500,27 @@
         <p:spPr>
           <a:xfrm>
             <a:off x="0" y="0"/>
-            <a:ext cx="109728" cy="5143500"/>
+            <a:ext cx="9144000" cy="5143500"/>
+          </a:xfrm>
+          <a:prstGeom prst="rect">
+            <a:avLst/>
+          </a:prstGeom>
+          <a:solidFill>
+            <a:srgbClr val="1B2A4A"/>
+          </a:solidFill>
+          <a:ln/>
+        </p:spPr>
+      </p:sp>
+      <p:sp>
+        <p:nvSpPr>
+          <p:cNvPr id="3" name="Shape 1"/>
+          <p:cNvSpPr/>
+          <p:nvPr/>
+        </p:nvSpPr>
+        <p:spPr>
+          <a:xfrm>
+            <a:off x="0" y="4777740"/>
+            <a:ext cx="9144000" cy="365760"/>
           </a:xfrm>
           <a:prstGeom prst="rect">
             <a:avLst/>
@@ -1253,14 +1533,14 @@
       </p:sp>
       <p:sp>
         <p:nvSpPr>
-          <p:cNvPr id="3" name="Text 1"/>
+          <p:cNvPr id="4" name="Text 2"/>
           <p:cNvSpPr/>
           <p:nvPr/>
         </p:nvSpPr>
         <p:spPr>
           <a:xfrm>
             <a:off x="731520" y="1097280"/>
-            <a:ext cx="7772400" cy="1371600"/>
+            <a:ext cx="7680960" cy="457200"/>
           </a:xfrm>
           <a:prstGeom prst="rect">
             <a:avLst/>
@@ -1270,6 +1550,45 @@
         </p:spPr>
         <p:txBody>
           <a:bodyPr wrap="square" rtlCol="0" anchor="ctr"/>
+          <a:lstStyle/>
+          <a:p>
+            <a:pPr indent="0" marL="0">
+              <a:buNone/>
+            </a:pPr>
+            <a:r>
+              <a:rPr lang="en-US" sz="1400" b="1" spc="400" kern="0" dirty="0">
+                <a:solidFill>
+                  <a:srgbClr val="2A9D8F"/>
+                </a:solidFill>
+                <a:latin typeface="Calibri" pitchFamily="34" charset="0"/>
+                <a:ea typeface="Calibri" pitchFamily="34" charset="-122"/>
+                <a:cs typeface="Calibri" pitchFamily="34" charset="-120"/>
+              </a:rPr>
+              <a:t>GRADE 6 SCIENCE</a:t>
+            </a:r>
+            <a:endParaRPr lang="en-US" sz="1400" dirty="0"/>
+          </a:p>
+        </p:txBody>
+      </p:sp>
+      <p:sp>
+        <p:nvSpPr>
+          <p:cNvPr id="5" name="Text 3"/>
+          <p:cNvSpPr/>
+          <p:nvPr/>
+        </p:nvSpPr>
+        <p:spPr>
+          <a:xfrm>
+            <a:off x="731520" y="1645920"/>
+            <a:ext cx="7680960" cy="1463040"/>
+          </a:xfrm>
+          <a:prstGeom prst="rect">
+            <a:avLst/>
+          </a:prstGeom>
+          <a:noFill/>
+          <a:ln/>
+        </p:spPr>
+        <p:txBody>
+          <a:bodyPr wrap="square" rtlCol="0" anchor="t"/>
           <a:lstStyle/>
           <a:p>
             <a:pPr indent="0" marL="0">
@@ -1292,14 +1611,14 @@
       </p:sp>
       <p:sp>
         <p:nvSpPr>
-          <p:cNvPr id="4" name="Text 2"/>
-          <p:cNvSpPr/>
-          <p:nvPr/>
-        </p:nvSpPr>
-        <p:spPr>
-          <a:xfrm>
-            <a:off x="731520" y="2560320"/>
-            <a:ext cx="7772400" cy="548640"/>
+          <p:cNvPr id="6" name="Text 4"/>
+          <p:cNvSpPr/>
+          <p:nvPr/>
+        </p:nvSpPr>
+        <p:spPr>
+          <a:xfrm>
+            <a:off x="731520" y="3200400"/>
+            <a:ext cx="7680960" cy="548640"/>
           </a:xfrm>
           <a:prstGeom prst="rect">
             <a:avLst/>
@@ -1315,15 +1634,15 @@
               <a:buNone/>
             </a:pPr>
             <a:r>
-              <a:rPr lang="en-US" sz="1600" dirty="0">
-                <a:solidFill>
-                  <a:srgbClr val="E9C46A"/>
+              <a:rPr lang="en-US" sz="1600" i="1" dirty="0">
+                <a:solidFill>
+                  <a:srgbClr val="9B9690"/>
                 </a:solidFill>
                 <a:latin typeface="Calibri" pitchFamily="34" charset="0"/>
                 <a:ea typeface="Calibri" pitchFamily="34" charset="-122"/>
                 <a:cs typeface="Calibri" pitchFamily="34" charset="-120"/>
               </a:rPr>
-              <a:t>Grade 6 Science · Mr Zocchi</a:t>
+              <a:t>Continents that move like puzzle pieces</a:t>
             </a:r>
             <a:endParaRPr lang="en-US" sz="1600" dirty="0"/>
           </a:p>
@@ -1331,36 +1650,14 @@
       </p:sp>
       <p:sp>
         <p:nvSpPr>
-          <p:cNvPr id="5" name="Shape 3"/>
-          <p:cNvSpPr/>
-          <p:nvPr/>
-        </p:nvSpPr>
-        <p:spPr>
-          <a:xfrm>
-            <a:off x="731520" y="3474720"/>
-            <a:ext cx="2011680" cy="411480"/>
-          </a:xfrm>
-          <a:prstGeom prst="roundRect">
-            <a:avLst>
-              <a:gd name="adj" fmla="val 17778"/>
-            </a:avLst>
-          </a:prstGeom>
-          <a:solidFill>
-            <a:srgbClr val="2A9D8F"/>
-          </a:solidFill>
-          <a:ln/>
-        </p:spPr>
-      </p:sp>
-      <p:sp>
-        <p:nvSpPr>
-          <p:cNvPr id="6" name="Text 4"/>
-          <p:cNvSpPr/>
-          <p:nvPr/>
-        </p:nvSpPr>
-        <p:spPr>
-          <a:xfrm>
-            <a:off x="731520" y="3474720"/>
-            <a:ext cx="2011680" cy="411480"/>
+          <p:cNvPr id="7" name="Text 5"/>
+          <p:cNvSpPr/>
+          <p:nvPr/>
+        </p:nvSpPr>
+        <p:spPr>
+          <a:xfrm>
+            <a:off x="731520" y="4206240"/>
+            <a:ext cx="3657600" cy="365760"/>
           </a:xfrm>
           <a:prstGeom prst="rect">
             <a:avLst/>
@@ -1372,19 +1669,19 @@
           <a:bodyPr wrap="square" rtlCol="0" anchor="ctr"/>
           <a:lstStyle/>
           <a:p>
-            <a:pPr algn="ctr" indent="0" marL="0">
+            <a:pPr indent="0" marL="0">
               <a:buNone/>
             </a:pPr>
             <a:r>
-              <a:rPr lang="en-US" sz="1200" b="1" dirty="0">
-                <a:solidFill>
-                  <a:srgbClr val="FFFFFF"/>
+              <a:rPr lang="en-US" sz="1200" dirty="0">
+                <a:solidFill>
+                  <a:srgbClr val="6B6660"/>
                 </a:solidFill>
                 <a:latin typeface="Calibri" pitchFamily="34" charset="0"/>
                 <a:ea typeface="Calibri" pitchFamily="34" charset="-122"/>
                 <a:cs typeface="Calibri" pitchFamily="34" charset="-120"/>
               </a:rPr>
-              <a:t>Term 3 · Earth Science</a:t>
+              <a:t>Mr Zocchi</a:t>
             </a:r>
             <a:endParaRPr lang="en-US" sz="1200" dirty="0"/>
           </a:p>
@@ -1401,13 +1698,6 @@
 <file path=ppt/slides/slide2.xml><?xml version="1.0" encoding="utf-8"?>
 <p:sld xmlns:a="http://schemas.openxmlformats.org/drawingml/2006/main" xmlns:r="http://schemas.openxmlformats.org/officeDocument/2006/relationships" xmlns:p="http://schemas.openxmlformats.org/presentationml/2006/main">
   <p:cSld name="Slide 2">
-    <p:bg>
-      <p:bgPr>
-        <a:solidFill>
-          <a:srgbClr val="FAF8F5"/>
-        </a:solidFill>
-      </p:bgPr>
-    </p:bg>
     <p:spTree>
       <p:nvGrpSpPr>
         <p:cNvPr id="1" name=""/>
@@ -1431,13 +1721,13 @@
         <p:spPr>
           <a:xfrm>
             <a:off x="0" y="0"/>
-            <a:ext cx="9144000" cy="54864"/>
-          </a:xfrm>
-          <a:prstGeom prst="rect">
-            <a:avLst/>
-          </a:prstGeom>
-          <a:solidFill>
-            <a:srgbClr val="2A9D8F"/>
+            <a:ext cx="9144000" cy="5143500"/>
+          </a:xfrm>
+          <a:prstGeom prst="rect">
+            <a:avLst/>
+          </a:prstGeom>
+          <a:solidFill>
+            <a:srgbClr val="111D35"/>
           </a:solidFill>
           <a:ln/>
         </p:spPr>
@@ -1450,8 +1740,8 @@
         </p:nvSpPr>
         <p:spPr>
           <a:xfrm>
-            <a:off x="7772400" y="4709160"/>
-            <a:ext cx="1097280" cy="320040"/>
+            <a:off x="6858000" y="182880"/>
+            <a:ext cx="2286000" cy="2743200"/>
           </a:xfrm>
           <a:prstGeom prst="rect">
             <a:avLst/>
@@ -1463,86 +1753,75 @@
           <a:bodyPr wrap="square" rtlCol="0" anchor="ctr"/>
           <a:lstStyle/>
           <a:p>
-            <a:pPr algn="r" indent="0" marL="0">
+            <a:pPr algn="ctr" indent="0" marL="0">
               <a:buNone/>
             </a:pPr>
             <a:r>
-              <a:rPr lang="en-US" sz="900" dirty="0">
-                <a:solidFill>
-                  <a:srgbClr val="6B6660"/>
+              <a:rPr lang="en-US" sz="16000" b="1" dirty="0">
+                <a:solidFill>
+                  <a:srgbClr val="2A9D8F">
+                    <a:alpha val="80000"/>
+                  </a:srgbClr>
+                </a:solidFill>
+                <a:latin typeface="Georgia" pitchFamily="34" charset="0"/>
+                <a:ea typeface="Georgia" pitchFamily="34" charset="-122"/>
+                <a:cs typeface="Georgia" pitchFamily="34" charset="-120"/>
+              </a:rPr>
+              <a:t>?</a:t>
+            </a:r>
+            <a:endParaRPr lang="en-US" sz="16000" dirty="0"/>
+          </a:p>
+        </p:txBody>
+      </p:sp>
+      <p:sp>
+        <p:nvSpPr>
+          <p:cNvPr id="4" name="Text 2"/>
+          <p:cNvSpPr/>
+          <p:nvPr/>
+        </p:nvSpPr>
+        <p:spPr>
+          <a:xfrm>
+            <a:off x="731520" y="548640"/>
+            <a:ext cx="2743200" cy="365760"/>
+          </a:xfrm>
+          <a:prstGeom prst="rect">
+            <a:avLst/>
+          </a:prstGeom>
+          <a:noFill/>
+          <a:ln/>
+        </p:spPr>
+        <p:txBody>
+          <a:bodyPr wrap="square" rtlCol="0" anchor="ctr"/>
+          <a:lstStyle/>
+          <a:p>
+            <a:pPr indent="0" marL="0">
+              <a:buNone/>
+            </a:pPr>
+            <a:r>
+              <a:rPr lang="en-US" sz="1200" b="1" spc="400" kern="0" dirty="0">
+                <a:solidFill>
+                  <a:srgbClr val="2A9D8F"/>
                 </a:solidFill>
                 <a:latin typeface="Calibri" pitchFamily="34" charset="0"/>
                 <a:ea typeface="Calibri" pitchFamily="34" charset="-122"/>
                 <a:cs typeface="Calibri" pitchFamily="34" charset="-120"/>
               </a:rPr>
-              <a:t>2 / 5</a:t>
-            </a:r>
-            <a:endParaRPr lang="en-US" sz="900" dirty="0"/>
-          </a:p>
-        </p:txBody>
-      </p:sp>
-      <p:sp>
-        <p:nvSpPr>
-          <p:cNvPr id="4" name="Shape 2"/>
-          <p:cNvSpPr/>
-          <p:nvPr/>
-        </p:nvSpPr>
-        <p:spPr>
-          <a:xfrm>
-            <a:off x="1371600" y="914400"/>
-            <a:ext cx="6400800" cy="3200400"/>
-          </a:xfrm>
-          <a:prstGeom prst="rect">
-            <a:avLst/>
-          </a:prstGeom>
-          <a:solidFill>
-            <a:srgbClr val="FFFFFF"/>
-          </a:solidFill>
-          <a:ln w="12700">
-            <a:solidFill>
-              <a:srgbClr val="E5E2DC"/>
-            </a:solidFill>
-            <a:prstDash val="solid"/>
-          </a:ln>
-          <a:effectLst>
-            <a:outerShdw sx="100000" sy="100000" kx="0" ky="0" algn="bl" rotWithShape="0" blurRad="50800" dist="25400" dir="8100000">
-              <a:srgbClr val="000000">
-                <a:alpha val="10000"/>
-              </a:srgbClr>
-            </a:outerShdw>
-          </a:effectLst>
-        </p:spPr>
-      </p:sp>
-      <p:sp>
-        <p:nvSpPr>
-          <p:cNvPr id="5" name="Shape 3"/>
-          <p:cNvSpPr/>
-          <p:nvPr/>
-        </p:nvSpPr>
-        <p:spPr>
-          <a:xfrm>
-            <a:off x="1371600" y="914400"/>
-            <a:ext cx="91440" cy="3200400"/>
-          </a:xfrm>
-          <a:prstGeom prst="rect">
-            <a:avLst/>
-          </a:prstGeom>
-          <a:solidFill>
-            <a:srgbClr val="2A9D8F"/>
-          </a:solidFill>
-          <a:ln/>
-        </p:spPr>
-      </p:sp>
-      <p:sp>
-        <p:nvSpPr>
-          <p:cNvPr id="6" name="Text 4"/>
-          <p:cNvSpPr/>
-          <p:nvPr/>
-        </p:nvSpPr>
-        <p:spPr>
-          <a:xfrm>
-            <a:off x="1828800" y="1097280"/>
-            <a:ext cx="5669280" cy="640080"/>
+              <a:t>INQUIRY</a:t>
+            </a:r>
+            <a:endParaRPr lang="en-US" sz="1200" dirty="0"/>
+          </a:p>
+        </p:txBody>
+      </p:sp>
+      <p:sp>
+        <p:nvSpPr>
+          <p:cNvPr id="5" name="Text 3"/>
+          <p:cNvSpPr/>
+          <p:nvPr/>
+        </p:nvSpPr>
+        <p:spPr>
+          <a:xfrm>
+            <a:off x="731520" y="1005840"/>
+            <a:ext cx="6858000" cy="1463040"/>
           </a:xfrm>
           <a:prstGeom prst="rect">
             <a:avLst/>
@@ -1551,37 +1830,37 @@
           <a:ln/>
         </p:spPr>
         <p:txBody>
-          <a:bodyPr wrap="square" rtlCol="0" anchor="ctr"/>
+          <a:bodyPr wrap="square" rtlCol="0" anchor="t"/>
           <a:lstStyle/>
           <a:p>
             <a:pPr indent="0" marL="0">
               <a:buNone/>
             </a:pPr>
             <a:r>
-              <a:rPr lang="en-US" sz="2400" b="1" dirty="0">
-                <a:solidFill>
-                  <a:srgbClr val="1B2A4A"/>
+              <a:rPr lang="en-US" sz="2800" b="1" dirty="0">
+                <a:solidFill>
+                  <a:srgbClr val="FFFFFF"/>
                 </a:solidFill>
                 <a:latin typeface="Georgia" pitchFamily="34" charset="0"/>
                 <a:ea typeface="Georgia" pitchFamily="34" charset="-122"/>
                 <a:cs typeface="Georgia" pitchFamily="34" charset="-120"/>
               </a:rPr>
-              <a:t>Wegener's Big Idea</a:t>
-            </a:r>
-            <a:endParaRPr lang="en-US" sz="2400" dirty="0"/>
-          </a:p>
-        </p:txBody>
-      </p:sp>
-      <p:sp>
-        <p:nvSpPr>
-          <p:cNvPr id="7" name="Text 5"/>
-          <p:cNvSpPr/>
-          <p:nvPr/>
-        </p:nvSpPr>
-        <p:spPr>
-          <a:xfrm>
-            <a:off x="1828800" y="1828800"/>
-            <a:ext cx="5669280" cy="2011680"/>
+              <a:t>How is it possible that fossils of tropical plants have been found in Antarctica?</a:t>
+            </a:r>
+            <a:endParaRPr lang="en-US" sz="2800" dirty="0"/>
+          </a:p>
+        </p:txBody>
+      </p:sp>
+      <p:sp>
+        <p:nvSpPr>
+          <p:cNvPr id="6" name="Text 4"/>
+          <p:cNvSpPr/>
+          <p:nvPr/>
+        </p:nvSpPr>
+        <p:spPr>
+          <a:xfrm>
+            <a:off x="731520" y="2560320"/>
+            <a:ext cx="6858000" cy="548640"/>
           </a:xfrm>
           <a:prstGeom prst="rect">
             <a:avLst/>
@@ -1590,27 +1869,168 @@
           <a:ln/>
         </p:spPr>
         <p:txBody>
-          <a:bodyPr wrap="square" rtlCol="0" anchor="t"/>
+          <a:bodyPr wrap="square" rtlCol="0" anchor="ctr"/>
           <a:lstStyle/>
           <a:p>
             <a:pPr indent="0" marL="0">
-              <a:lnSpc>
-                <a:spcPct val="130000"/>
-              </a:lnSpc>
               <a:buNone/>
             </a:pPr>
             <a:r>
-              <a:rPr lang="en-US" sz="1500" dirty="0">
-                <a:solidFill>
-                  <a:srgbClr val="3D3A36"/>
+              <a:rPr lang="en-US" sz="1400" i="1" dirty="0">
+                <a:solidFill>
+                  <a:srgbClr val="9B9690"/>
                 </a:solidFill>
                 <a:latin typeface="Calibri" pitchFamily="34" charset="0"/>
                 <a:ea typeface="Calibri" pitchFamily="34" charset="-122"/>
                 <a:cs typeface="Calibri" pitchFamily="34" charset="-120"/>
               </a:rPr>
-              <a:t>In 1912, Alfred Wegener proposed that all continents were once joined in a supercontinent called Pangaea. Over millions of years, they drifted apart to their current positions. His theory was initially rejected because he could not explain HOW continents moved.</a:t>
-            </a:r>
-            <a:endParaRPr lang="en-US" sz="1500" dirty="0"/>
+              <a:t>The same dinosaur fossils appear in both China AND Germany, separated by thousands of km.</a:t>
+            </a:r>
+            <a:endParaRPr lang="en-US" sz="1400" dirty="0"/>
+          </a:p>
+        </p:txBody>
+      </p:sp>
+      <p:sp>
+        <p:nvSpPr>
+          <p:cNvPr id="7" name="Shape 5"/>
+          <p:cNvSpPr/>
+          <p:nvPr/>
+        </p:nvSpPr>
+        <p:spPr>
+          <a:xfrm>
+            <a:off x="548640" y="3200400"/>
+            <a:ext cx="7315200" cy="1645920"/>
+          </a:xfrm>
+          <a:prstGeom prst="rect">
+            <a:avLst/>
+          </a:prstGeom>
+          <a:solidFill>
+            <a:srgbClr val="243660"/>
+          </a:solidFill>
+          <a:ln/>
+        </p:spPr>
+      </p:sp>
+      <p:sp>
+        <p:nvSpPr>
+          <p:cNvPr id="8" name="Text 6"/>
+          <p:cNvSpPr/>
+          <p:nvPr/>
+        </p:nvSpPr>
+        <p:spPr>
+          <a:xfrm>
+            <a:off x="731520" y="3246120"/>
+            <a:ext cx="3657600" cy="320040"/>
+          </a:xfrm>
+          <a:prstGeom prst="rect">
+            <a:avLst/>
+          </a:prstGeom>
+          <a:noFill/>
+          <a:ln/>
+        </p:spPr>
+        <p:txBody>
+          <a:bodyPr wrap="square" rtlCol="0" anchor="ctr"/>
+          <a:lstStyle/>
+          <a:p>
+            <a:pPr indent="0" marL="0">
+              <a:buNone/>
+            </a:pPr>
+            <a:r>
+              <a:rPr lang="en-US" sz="1100" b="1" spc="200" kern="0" dirty="0">
+                <a:solidFill>
+                  <a:srgbClr val="2A9D8F"/>
+                </a:solidFill>
+                <a:latin typeface="Calibri" pitchFamily="34" charset="0"/>
+                <a:ea typeface="Calibri" pitchFamily="34" charset="-122"/>
+                <a:cs typeface="Calibri" pitchFamily="34" charset="-120"/>
+              </a:rPr>
+              <a:t>Think — Pair — Share</a:t>
+            </a:r>
+            <a:endParaRPr lang="en-US" sz="1100" dirty="0"/>
+          </a:p>
+        </p:txBody>
+      </p:sp>
+      <p:sp>
+        <p:nvSpPr>
+          <p:cNvPr id="9" name="Text 7"/>
+          <p:cNvSpPr/>
+          <p:nvPr/>
+        </p:nvSpPr>
+        <p:spPr>
+          <a:xfrm>
+            <a:off x="731520" y="3566160"/>
+            <a:ext cx="6949440" cy="1188720"/>
+          </a:xfrm>
+          <a:prstGeom prst="rect">
+            <a:avLst/>
+          </a:prstGeom>
+          <a:noFill/>
+          <a:ln/>
+        </p:spPr>
+        <p:txBody>
+          <a:bodyPr wrap="square" rtlCol="0" anchor="ctr"/>
+          <a:lstStyle/>
+          <a:p>
+            <a:pPr marL="342900" indent="-342900">
+              <a:spcAft>
+                <a:spcPts val="600"/>
+              </a:spcAft>
+              <a:buSzPct val="100000"/>
+              <a:buChar char="•"/>
+            </a:pPr>
+            <a:r>
+              <a:rPr lang="en-US" sz="1400" dirty="0">
+                <a:solidFill>
+                  <a:srgbClr val="E5E2DC"/>
+                </a:solidFill>
+                <a:latin typeface="Calibri" pitchFamily="34" charset="0"/>
+                <a:ea typeface="Calibri" pitchFamily="34" charset="-122"/>
+                <a:cs typeface="Calibri" pitchFamily="34" charset="-120"/>
+              </a:rPr>
+              <a:t>Could continents have been in different positions millions of years ago?</a:t>
+            </a:r>
+            <a:endParaRPr lang="en-US" sz="1400" dirty="0"/>
+          </a:p>
+          <a:p>
+            <a:pPr marL="342900" indent="-342900">
+              <a:spcAft>
+                <a:spcPts val="600"/>
+              </a:spcAft>
+              <a:buSzPct val="100000"/>
+              <a:buChar char="•"/>
+            </a:pPr>
+            <a:r>
+              <a:rPr lang="en-US" sz="1400" dirty="0">
+                <a:solidFill>
+                  <a:srgbClr val="E5E2DC"/>
+                </a:solidFill>
+                <a:latin typeface="Calibri" pitchFamily="34" charset="0"/>
+                <a:ea typeface="Calibri" pitchFamily="34" charset="-122"/>
+                <a:cs typeface="Calibri" pitchFamily="34" charset="-120"/>
+              </a:rPr>
+              <a:t>What evidence would you look for?</a:t>
+            </a:r>
+            <a:endParaRPr lang="en-US" sz="1400" dirty="0"/>
+          </a:p>
+          <a:p>
+            <a:pPr marL="342900" indent="-342900">
+              <a:spcAft>
+                <a:spcPts val="600"/>
+              </a:spcAft>
+              <a:buSzPct val="100000"/>
+              <a:buChar char="•"/>
+            </a:pPr>
+            <a:r>
+              <a:rPr lang="en-US" sz="1400" dirty="0">
+                <a:solidFill>
+                  <a:srgbClr val="E5E2DC"/>
+                </a:solidFill>
+                <a:latin typeface="Calibri" pitchFamily="34" charset="0"/>
+                <a:ea typeface="Calibri" pitchFamily="34" charset="-122"/>
+                <a:cs typeface="Calibri" pitchFamily="34" charset="-120"/>
+              </a:rPr>
+              <a:t>Look at a map — which continents look like they might fit together?</a:t>
+            </a:r>
+            <a:endParaRPr lang="en-US" sz="1400" dirty="0"/>
           </a:p>
         </p:txBody>
       </p:sp>
@@ -1655,7 +2075,27 @@
         <p:spPr>
           <a:xfrm>
             <a:off x="0" y="0"/>
-            <a:ext cx="9144000" cy="54864"/>
+            <a:ext cx="9144000" cy="822960"/>
+          </a:xfrm>
+          <a:prstGeom prst="rect">
+            <a:avLst/>
+          </a:prstGeom>
+          <a:solidFill>
+            <a:srgbClr val="FFFFFF"/>
+          </a:solidFill>
+          <a:ln/>
+        </p:spPr>
+      </p:sp>
+      <p:sp>
+        <p:nvSpPr>
+          <p:cNvPr id="3" name="Shape 1"/>
+          <p:cNvSpPr/>
+          <p:nvPr/>
+        </p:nvSpPr>
+        <p:spPr>
+          <a:xfrm>
+            <a:off x="0" y="795528"/>
+            <a:ext cx="9144000" cy="27432"/>
           </a:xfrm>
           <a:prstGeom prst="rect">
             <a:avLst/>
@@ -1668,14 +2108,14 @@
       </p:sp>
       <p:sp>
         <p:nvSpPr>
-          <p:cNvPr id="3" name="Text 1"/>
-          <p:cNvSpPr/>
-          <p:nvPr/>
-        </p:nvSpPr>
-        <p:spPr>
-          <a:xfrm>
-            <a:off x="7772400" y="4709160"/>
-            <a:ext cx="1097280" cy="320040"/>
+          <p:cNvPr id="4" name="Text 2"/>
+          <p:cNvSpPr/>
+          <p:nvPr/>
+        </p:nvSpPr>
+        <p:spPr>
+          <a:xfrm>
+            <a:off x="640080" y="91440"/>
+            <a:ext cx="7863840" cy="640080"/>
           </a:xfrm>
           <a:prstGeom prst="rect">
             <a:avLst/>
@@ -1684,96 +2124,78 @@
           <a:ln/>
         </p:spPr>
         <p:txBody>
+          <a:bodyPr wrap="square" lIns="0" tIns="0" rIns="0" bIns="0" rtlCol="0" anchor="ctr"/>
+          <a:lstStyle/>
+          <a:p>
+            <a:pPr indent="0" marL="0">
+              <a:buNone/>
+            </a:pPr>
+            <a:r>
+              <a:rPr lang="en-US" sz="2200" b="1" dirty="0">
+                <a:solidFill>
+                  <a:srgbClr val="1B2A4A"/>
+                </a:solidFill>
+                <a:latin typeface="Georgia" pitchFamily="34" charset="0"/>
+                <a:ea typeface="Georgia" pitchFamily="34" charset="-122"/>
+                <a:cs typeface="Georgia" pitchFamily="34" charset="-120"/>
+              </a:rPr>
+              <a:t>Wegener's Big Idea (1912)</a:t>
+            </a:r>
+            <a:endParaRPr lang="en-US" sz="2200" dirty="0"/>
+          </a:p>
+        </p:txBody>
+      </p:sp>
+      <p:sp>
+        <p:nvSpPr>
+          <p:cNvPr id="5" name="Text 3"/>
+          <p:cNvSpPr/>
+          <p:nvPr/>
+        </p:nvSpPr>
+        <p:spPr>
+          <a:xfrm>
+            <a:off x="640080" y="1005840"/>
+            <a:ext cx="7863840" cy="2926080"/>
+          </a:xfrm>
+          <a:prstGeom prst="rect">
+            <a:avLst/>
+          </a:prstGeom>
+          <a:noFill/>
+          <a:ln/>
+        </p:spPr>
+        <p:txBody>
           <a:bodyPr wrap="square" rtlCol="0" anchor="ctr"/>
           <a:lstStyle/>
           <a:p>
-            <a:pPr algn="r" indent="0" marL="0">
-              <a:buNone/>
-            </a:pPr>
-            <a:r>
-              <a:rPr lang="en-US" sz="900" dirty="0">
-                <a:solidFill>
-                  <a:srgbClr val="6B6660"/>
+            <a:pPr marL="342900" indent="-342900">
+              <a:spcAft>
+                <a:spcPts val="800"/>
+              </a:spcAft>
+              <a:buSzPct val="100000"/>
+              <a:buChar char="•"/>
+            </a:pPr>
+            <a:r>
+              <a:rPr lang="en-US" sz="1600" dirty="0">
+                <a:solidFill>
+                  <a:srgbClr val="3D3A36"/>
                 </a:solidFill>
                 <a:latin typeface="Calibri" pitchFamily="34" charset="0"/>
                 <a:ea typeface="Calibri" pitchFamily="34" charset="-122"/>
                 <a:cs typeface="Calibri" pitchFamily="34" charset="-120"/>
               </a:rPr>
-              <a:t>3 / 5</a:t>
-            </a:r>
-            <a:endParaRPr lang="en-US" sz="900" dirty="0"/>
-          </a:p>
-        </p:txBody>
-      </p:sp>
-      <p:sp>
-        <p:nvSpPr>
-          <p:cNvPr id="4" name="Text 2"/>
-          <p:cNvSpPr/>
-          <p:nvPr/>
-        </p:nvSpPr>
-        <p:spPr>
-          <a:xfrm>
-            <a:off x="457200" y="274320"/>
-            <a:ext cx="8229600" cy="640080"/>
-          </a:xfrm>
-          <a:prstGeom prst="rect">
-            <a:avLst/>
-          </a:prstGeom>
-          <a:noFill/>
-          <a:ln/>
-        </p:spPr>
-        <p:txBody>
-          <a:bodyPr wrap="square" rtlCol="0" anchor="ctr"/>
-          <a:lstStyle/>
-          <a:p>
-            <a:pPr indent="0" marL="0">
-              <a:buNone/>
-            </a:pPr>
-            <a:r>
-              <a:rPr lang="en-US" sz="2600" b="1" dirty="0">
-                <a:solidFill>
-                  <a:srgbClr val="1B2A4A"/>
-                </a:solidFill>
-                <a:latin typeface="Georgia" pitchFamily="34" charset="0"/>
-                <a:ea typeface="Georgia" pitchFamily="34" charset="-122"/>
-                <a:cs typeface="Georgia" pitchFamily="34" charset="-120"/>
-              </a:rPr>
-              <a:t>Evidence for Continental Drift</a:t>
-            </a:r>
-            <a:endParaRPr lang="en-US" sz="2600" dirty="0"/>
-          </a:p>
-        </p:txBody>
-      </p:sp>
-      <p:sp>
-        <p:nvSpPr>
-          <p:cNvPr id="5" name="Text 3"/>
-          <p:cNvSpPr/>
-          <p:nvPr/>
-        </p:nvSpPr>
-        <p:spPr>
-          <a:xfrm>
-            <a:off x="457200" y="1188720"/>
-            <a:ext cx="3840480" cy="3474720"/>
-          </a:xfrm>
-          <a:prstGeom prst="rect">
-            <a:avLst/>
-          </a:prstGeom>
-          <a:noFill/>
-          <a:ln/>
-        </p:spPr>
-        <p:txBody>
-          <a:bodyPr wrap="square" rtlCol="0" anchor="t"/>
-          <a:lstStyle/>
+              <a:t>Alfred Wegener (German scientist, born in Berlin) noticed continents fit together.</a:t>
+            </a:r>
+            <a:endParaRPr lang="en-US" sz="1600" dirty="0"/>
+          </a:p>
           <a:p>
             <a:pPr marL="342900" indent="-342900">
               <a:spcAft>
-                <a:spcPts val="600"/>
+                <a:spcPts val="800"/>
               </a:spcAft>
               <a:buSzPct val="100000"/>
               <a:buChar char="•"/>
             </a:pPr>
             <a:r>
-              <a:rPr lang="en-US" sz="1400" dirty="0">
+              <a:rPr lang="en-US" sz="1600" dirty="0">
                 <a:solidFill>
                   <a:srgbClr val="3D3A36"/>
                 </a:solidFill>
@@ -1781,20 +2203,20 @@
                 <a:ea typeface="Calibri" pitchFamily="34" charset="-122"/>
                 <a:cs typeface="Calibri" pitchFamily="34" charset="-120"/>
               </a:rPr>
-              <a:t>Jigsaw fit: South America and Africa's coastlines match</a:t>
-            </a:r>
-            <a:endParaRPr lang="en-US" sz="1400" dirty="0"/>
+              <a:t>He proposed they were once joined in a supercontinent called Pangaea.</a:t>
+            </a:r>
+            <a:endParaRPr lang="en-US" sz="1600" dirty="0"/>
           </a:p>
           <a:p>
             <a:pPr marL="342900" indent="-342900">
               <a:spcAft>
-                <a:spcPts val="600"/>
+                <a:spcPts val="800"/>
               </a:spcAft>
               <a:buSzPct val="100000"/>
               <a:buChar char="•"/>
             </a:pPr>
             <a:r>
-              <a:rPr lang="en-US" sz="1400" dirty="0">
+              <a:rPr lang="en-US" sz="1600" dirty="0">
                 <a:solidFill>
                   <a:srgbClr val="3D3A36"/>
                 </a:solidFill>
@@ -1802,20 +2224,20 @@
                 <a:ea typeface="Calibri" pitchFamily="34" charset="-122"/>
                 <a:cs typeface="Calibri" pitchFamily="34" charset="-120"/>
               </a:rPr>
-              <a:t>Matching fossils: same fossils found on continents now separated by oceans (e.g. Mesosaurus, Glossopteris)</a:t>
-            </a:r>
-            <a:endParaRPr lang="en-US" sz="1400" dirty="0"/>
+              <a:t>Over millions of years, Pangaea broke apart and the pieces drifted.</a:t>
+            </a:r>
+            <a:endParaRPr lang="en-US" sz="1600" dirty="0"/>
           </a:p>
           <a:p>
             <a:pPr marL="342900" indent="-342900">
               <a:spcAft>
-                <a:spcPts val="600"/>
+                <a:spcPts val="800"/>
               </a:spcAft>
               <a:buSzPct val="100000"/>
               <a:buChar char="•"/>
             </a:pPr>
             <a:r>
-              <a:rPr lang="en-US" sz="1400" dirty="0">
+              <a:rPr lang="en-US" sz="1600" dirty="0">
                 <a:solidFill>
                   <a:srgbClr val="3D3A36"/>
                 </a:solidFill>
@@ -1823,20 +2245,85 @@
                 <a:ea typeface="Calibri" pitchFamily="34" charset="-122"/>
                 <a:cs typeface="Calibri" pitchFamily="34" charset="-120"/>
               </a:rPr>
-              <a:t>Matching rock types: identical rock formations on opposite sides of the Atlantic</a:t>
-            </a:r>
-            <a:endParaRPr lang="en-US" sz="1400" dirty="0"/>
-          </a:p>
-          <a:p>
-            <a:pPr marL="342900" indent="-342900">
-              <a:spcAft>
-                <a:spcPts val="600"/>
-              </a:spcAft>
-              <a:buSzPct val="100000"/>
-              <a:buChar char="•"/>
-            </a:pPr>
-            <a:r>
-              <a:rPr lang="en-US" sz="1400" dirty="0">
+              <a:t>At the time, most scientists rejected his idea.</a:t>
+            </a:r>
+            <a:endParaRPr lang="en-US" sz="1600" dirty="0"/>
+          </a:p>
+        </p:txBody>
+      </p:sp>
+      <p:sp>
+        <p:nvSpPr>
+          <p:cNvPr id="6" name="Shape 4"/>
+          <p:cNvSpPr/>
+          <p:nvPr/>
+        </p:nvSpPr>
+        <p:spPr>
+          <a:xfrm>
+            <a:off x="640080" y="4114800"/>
+            <a:ext cx="7863840" cy="731520"/>
+          </a:xfrm>
+          <a:prstGeom prst="rect">
+            <a:avLst/>
+          </a:prstGeom>
+          <a:solidFill>
+            <a:srgbClr val="E8F5F3"/>
+          </a:solidFill>
+          <a:ln/>
+          <a:effectLst>
+            <a:outerShdw sx="100000" sy="100000" kx="0" ky="0" algn="bl" rotWithShape="0" blurRad="76200" dist="25400" dir="8100000">
+              <a:srgbClr val="000000">
+                <a:alpha val="12000"/>
+              </a:srgbClr>
+            </a:outerShdw>
+          </a:effectLst>
+        </p:spPr>
+      </p:sp>
+      <p:sp>
+        <p:nvSpPr>
+          <p:cNvPr id="7" name="Shape 5"/>
+          <p:cNvSpPr/>
+          <p:nvPr/>
+        </p:nvSpPr>
+        <p:spPr>
+          <a:xfrm>
+            <a:off x="640080" y="4114800"/>
+            <a:ext cx="64008" cy="731520"/>
+          </a:xfrm>
+          <a:prstGeom prst="rect">
+            <a:avLst/>
+          </a:prstGeom>
+          <a:solidFill>
+            <a:srgbClr val="2A9D8F"/>
+          </a:solidFill>
+          <a:ln/>
+        </p:spPr>
+      </p:sp>
+      <p:sp>
+        <p:nvSpPr>
+          <p:cNvPr id="8" name="Text 6"/>
+          <p:cNvSpPr/>
+          <p:nvPr/>
+        </p:nvSpPr>
+        <p:spPr>
+          <a:xfrm>
+            <a:off x="914400" y="4160520"/>
+            <a:ext cx="7406640" cy="640080"/>
+          </a:xfrm>
+          <a:prstGeom prst="rect">
+            <a:avLst/>
+          </a:prstGeom>
+          <a:noFill/>
+          <a:ln/>
+        </p:spPr>
+        <p:txBody>
+          <a:bodyPr wrap="square" rtlCol="0" anchor="ctr"/>
+          <a:lstStyle/>
+          <a:p>
+            <a:pPr indent="0" marL="0">
+              <a:buNone/>
+            </a:pPr>
+            <a:r>
+              <a:rPr lang="en-US" sz="1300" i="1" dirty="0">
                 <a:solidFill>
                   <a:srgbClr val="3D3A36"/>
                 </a:solidFill>
@@ -1844,233 +2331,9 @@
                 <a:ea typeface="Calibri" pitchFamily="34" charset="-122"/>
                 <a:cs typeface="Calibri" pitchFamily="34" charset="-120"/>
               </a:rPr>
-              <a:t>Glacial evidence: scratch marks from glaciers found in places now near the equator</a:t>
-            </a:r>
-            <a:endParaRPr lang="en-US" sz="1400" dirty="0"/>
-          </a:p>
-          <a:p>
-            <a:pPr marL="342900" indent="-342900">
-              <a:spcAft>
-                <a:spcPts val="600"/>
-              </a:spcAft>
-              <a:buSzPct val="100000"/>
-              <a:buChar char="•"/>
-            </a:pPr>
-            <a:r>
-              <a:rPr lang="en-US" sz="1400" dirty="0">
-                <a:solidFill>
-                  <a:srgbClr val="3D3A36"/>
-                </a:solidFill>
-                <a:latin typeface="Calibri" pitchFamily="34" charset="0"/>
-                <a:ea typeface="Calibri" pitchFamily="34" charset="-122"/>
-                <a:cs typeface="Calibri" pitchFamily="34" charset="-120"/>
-              </a:rPr>
-              <a:t>Climate fossils: tropical plant fossils found in Antarctica</a:t>
-            </a:r>
-            <a:endParaRPr lang="en-US" sz="1400" dirty="0"/>
-          </a:p>
-        </p:txBody>
-      </p:sp>
-      <p:sp>
-        <p:nvSpPr>
-          <p:cNvPr id="6" name="Shape 4"/>
-          <p:cNvSpPr/>
-          <p:nvPr/>
-        </p:nvSpPr>
-        <p:spPr>
-          <a:xfrm>
-            <a:off x="4846320" y="1188720"/>
-            <a:ext cx="3840480" cy="3474720"/>
-          </a:xfrm>
-          <a:prstGeom prst="rect">
-            <a:avLst/>
-          </a:prstGeom>
-          <a:solidFill>
-            <a:srgbClr val="FFFFFF"/>
-          </a:solidFill>
-          <a:ln w="12700">
-            <a:solidFill>
-              <a:srgbClr val="E5E2DC"/>
-            </a:solidFill>
-            <a:prstDash val="solid"/>
-          </a:ln>
-          <a:effectLst>
-            <a:outerShdw sx="100000" sy="100000" kx="0" ky="0" algn="bl" rotWithShape="0" blurRad="50800" dist="25400" dir="8100000">
-              <a:srgbClr val="000000">
-                <a:alpha val="10000"/>
-              </a:srgbClr>
-            </a:outerShdw>
-          </a:effectLst>
-        </p:spPr>
-      </p:sp>
-      <p:sp>
-        <p:nvSpPr>
-          <p:cNvPr id="7" name="Shape 5"/>
-          <p:cNvSpPr/>
-          <p:nvPr/>
-        </p:nvSpPr>
-        <p:spPr>
-          <a:xfrm>
-            <a:off x="4846320" y="1188720"/>
-            <a:ext cx="3840480" cy="54864"/>
-          </a:xfrm>
-          <a:prstGeom prst="rect">
-            <a:avLst/>
-          </a:prstGeom>
-          <a:solidFill>
-            <a:srgbClr val="2A9D8F"/>
-          </a:solidFill>
-          <a:ln/>
-        </p:spPr>
-      </p:sp>
-      <p:sp>
-        <p:nvSpPr>
-          <p:cNvPr id="8" name="Text 6"/>
-          <p:cNvSpPr/>
-          <p:nvPr/>
-        </p:nvSpPr>
-        <p:spPr>
-          <a:xfrm>
-            <a:off x="5120640" y="1371600"/>
-            <a:ext cx="3291840" cy="3108960"/>
-          </a:xfrm>
-          <a:prstGeom prst="rect">
-            <a:avLst/>
-          </a:prstGeom>
-          <a:noFill/>
-          <a:ln/>
-        </p:spPr>
-        <p:txBody>
-          <a:bodyPr wrap="square" rtlCol="0" anchor="t"/>
-          <a:lstStyle/>
-          <a:p>
-            <a:pPr indent="0" marL="0">
-              <a:spcAft>
-                <a:spcPts val="400"/>
-              </a:spcAft>
-              <a:buNone/>
-            </a:pPr>
-            <a:r>
-              <a:rPr lang="en-US" sz="1600" b="1" dirty="0">
-                <a:solidFill>
-                  <a:srgbClr val="1B2A4A"/>
-                </a:solidFill>
-                <a:latin typeface="Calibri" pitchFamily="34" charset="0"/>
-                <a:ea typeface="Calibri" pitchFamily="34" charset="-122"/>
-                <a:cs typeface="Calibri" pitchFamily="34" charset="-120"/>
-              </a:rPr>
-              <a:t>Why Was Wegener Rejected?</a:t>
-            </a:r>
-            <a:endParaRPr lang="en-US" sz="1600" dirty="0"/>
-          </a:p>
-          <a:p>
-            <a:pPr indent="0" marL="0">
-              <a:spcAft>
-                <a:spcPts val="400"/>
-              </a:spcAft>
-              <a:buNone/>
-            </a:pPr>
-            <a:endParaRPr lang="en-US" sz="1600" dirty="0"/>
-          </a:p>
-          <a:p>
-            <a:pPr indent="0" marL="0">
-              <a:spcAft>
-                <a:spcPts val="400"/>
-              </a:spcAft>
-              <a:buNone/>
-            </a:pPr>
-            <a:r>
-              <a:rPr lang="en-US" sz="1300" dirty="0">
-                <a:solidFill>
-                  <a:srgbClr val="3D3A36"/>
-                </a:solidFill>
-                <a:latin typeface="Calibri" pitchFamily="34" charset="0"/>
-                <a:ea typeface="Calibri" pitchFamily="34" charset="-122"/>
-                <a:cs typeface="Calibri" pitchFamily="34" charset="-120"/>
-              </a:rPr>
-              <a:t>He had no mechanism to explain HOW continents moved</a:t>
-            </a:r>
-            <a:endParaRPr lang="en-US" sz="1600" dirty="0"/>
-          </a:p>
-          <a:p>
-            <a:pPr indent="0" marL="0">
-              <a:spcAft>
-                <a:spcPts val="400"/>
-              </a:spcAft>
-              <a:buNone/>
-            </a:pPr>
-            <a:r>
-              <a:rPr lang="en-US" sz="1300" dirty="0">
-                <a:solidFill>
-                  <a:srgbClr val="3D3A36"/>
-                </a:solidFill>
-                <a:latin typeface="Calibri" pitchFamily="34" charset="0"/>
-                <a:ea typeface="Calibri" pitchFamily="34" charset="-122"/>
-                <a:cs typeface="Calibri" pitchFamily="34" charset="-120"/>
-              </a:rPr>
-              <a:t>Most scientists believed continents were fixed</a:t>
-            </a:r>
-            <a:endParaRPr lang="en-US" sz="1600" dirty="0"/>
-          </a:p>
-          <a:p>
-            <a:pPr indent="0" marL="0">
-              <a:spcAft>
-                <a:spcPts val="400"/>
-              </a:spcAft>
-              <a:buNone/>
-            </a:pPr>
-            <a:r>
-              <a:rPr lang="en-US" sz="1300" dirty="0">
-                <a:solidFill>
-                  <a:srgbClr val="3D3A36"/>
-                </a:solidFill>
-                <a:latin typeface="Calibri" pitchFamily="34" charset="0"/>
-                <a:ea typeface="Calibri" pitchFamily="34" charset="-122"/>
-                <a:cs typeface="Calibri" pitchFamily="34" charset="-120"/>
-              </a:rPr>
-              <a:t>He was a meteorologist, not a geologist — some dismissed his ideas</a:t>
-            </a:r>
-            <a:endParaRPr lang="en-US" sz="1600" dirty="0"/>
-          </a:p>
-          <a:p>
-            <a:pPr indent="0" marL="0">
-              <a:spcAft>
-                <a:spcPts val="400"/>
-              </a:spcAft>
-              <a:buNone/>
-            </a:pPr>
-            <a:r>
-              <a:rPr lang="en-US" sz="1300" dirty="0">
-                <a:solidFill>
-                  <a:srgbClr val="3D3A36"/>
-                </a:solidFill>
-                <a:latin typeface="Calibri" pitchFamily="34" charset="0"/>
-                <a:ea typeface="Calibri" pitchFamily="34" charset="-122"/>
-                <a:cs typeface="Calibri" pitchFamily="34" charset="-120"/>
-              </a:rPr>
-              <a:t>It took until the 1960s for plate tectonics theory to be accepted</a:t>
-            </a:r>
-            <a:endParaRPr lang="en-US" sz="1600" dirty="0"/>
-          </a:p>
-          <a:p>
-            <a:pPr indent="0" marL="0">
-              <a:spcAft>
-                <a:spcPts val="400"/>
-              </a:spcAft>
-              <a:buNone/>
-            </a:pPr>
-            <a:r>
-              <a:rPr lang="en-US" sz="1300" dirty="0">
-                <a:solidFill>
-                  <a:srgbClr val="3D3A36"/>
-                </a:solidFill>
-                <a:latin typeface="Calibri" pitchFamily="34" charset="0"/>
-                <a:ea typeface="Calibri" pitchFamily="34" charset="-122"/>
-                <a:cs typeface="Calibri" pitchFamily="34" charset="-120"/>
-              </a:rPr>
-              <a:t>Discovery of sea-floor spreading finally provided the mechanism</a:t>
-            </a:r>
-            <a:endParaRPr lang="en-US" sz="1600" dirty="0"/>
+              <a:t>Wegener was a meteorologist and polar explorer. Pangaea means 'all lands' in Greek.</a:t>
+            </a:r>
+            <a:endParaRPr lang="en-US" sz="1300" dirty="0"/>
           </a:p>
         </p:txBody>
       </p:sp>
@@ -2115,7 +2378,27 @@
         <p:spPr>
           <a:xfrm>
             <a:off x="0" y="0"/>
-            <a:ext cx="9144000" cy="54864"/>
+            <a:ext cx="9144000" cy="822960"/>
+          </a:xfrm>
+          <a:prstGeom prst="rect">
+            <a:avLst/>
+          </a:prstGeom>
+          <a:solidFill>
+            <a:srgbClr val="FFFFFF"/>
+          </a:solidFill>
+          <a:ln/>
+        </p:spPr>
+      </p:sp>
+      <p:sp>
+        <p:nvSpPr>
+          <p:cNvPr id="3" name="Shape 1"/>
+          <p:cNvSpPr/>
+          <p:nvPr/>
+        </p:nvSpPr>
+        <p:spPr>
+          <a:xfrm>
+            <a:off x="0" y="795528"/>
+            <a:ext cx="9144000" cy="27432"/>
           </a:xfrm>
           <a:prstGeom prst="rect">
             <a:avLst/>
@@ -2128,14 +2411,14 @@
       </p:sp>
       <p:sp>
         <p:nvSpPr>
-          <p:cNvPr id="3" name="Text 1"/>
-          <p:cNvSpPr/>
-          <p:nvPr/>
-        </p:nvSpPr>
-        <p:spPr>
-          <a:xfrm>
-            <a:off x="7772400" y="4709160"/>
-            <a:ext cx="1097280" cy="320040"/>
+          <p:cNvPr id="4" name="Text 2"/>
+          <p:cNvSpPr/>
+          <p:nvPr/>
+        </p:nvSpPr>
+        <p:spPr>
+          <a:xfrm>
+            <a:off x="640080" y="91440"/>
+            <a:ext cx="7863840" cy="640080"/>
           </a:xfrm>
           <a:prstGeom prst="rect">
             <a:avLst/>
@@ -2144,53 +2427,14 @@
           <a:ln/>
         </p:spPr>
         <p:txBody>
-          <a:bodyPr wrap="square" rtlCol="0" anchor="ctr"/>
-          <a:lstStyle/>
-          <a:p>
-            <a:pPr algn="r" indent="0" marL="0">
-              <a:buNone/>
-            </a:pPr>
-            <a:r>
-              <a:rPr lang="en-US" sz="900" dirty="0">
-                <a:solidFill>
-                  <a:srgbClr val="6B6660"/>
-                </a:solidFill>
-                <a:latin typeface="Calibri" pitchFamily="34" charset="0"/>
-                <a:ea typeface="Calibri" pitchFamily="34" charset="-122"/>
-                <a:cs typeface="Calibri" pitchFamily="34" charset="-120"/>
-              </a:rPr>
-              <a:t>4 / 5</a:t>
-            </a:r>
-            <a:endParaRPr lang="en-US" sz="900" dirty="0"/>
-          </a:p>
-        </p:txBody>
-      </p:sp>
-      <p:sp>
-        <p:nvSpPr>
-          <p:cNvPr id="4" name="Text 2"/>
-          <p:cNvSpPr/>
-          <p:nvPr/>
-        </p:nvSpPr>
-        <p:spPr>
-          <a:xfrm>
-            <a:off x="457200" y="274320"/>
-            <a:ext cx="8229600" cy="640080"/>
-          </a:xfrm>
-          <a:prstGeom prst="rect">
-            <a:avLst/>
-          </a:prstGeom>
-          <a:noFill/>
-          <a:ln/>
-        </p:spPr>
-        <p:txBody>
-          <a:bodyPr wrap="square" rtlCol="0" anchor="ctr"/>
+          <a:bodyPr wrap="square" lIns="0" tIns="0" rIns="0" bIns="0" rtlCol="0" anchor="ctr"/>
           <a:lstStyle/>
           <a:p>
             <a:pPr indent="0" marL="0">
               <a:buNone/>
             </a:pPr>
             <a:r>
-              <a:rPr lang="en-US" sz="2600" b="1" dirty="0">
+              <a:rPr lang="en-US" sz="2200" b="1" dirty="0">
                 <a:solidFill>
                   <a:srgbClr val="1B2A4A"/>
                 </a:solidFill>
@@ -2198,9 +2442,9 @@
                 <a:ea typeface="Georgia" pitchFamily="34" charset="-122"/>
                 <a:cs typeface="Georgia" pitchFamily="34" charset="-120"/>
               </a:rPr>
-              <a:t>From Pangaea to Today</a:t>
-            </a:r>
-            <a:endParaRPr lang="en-US" sz="2600" dirty="0"/>
+              <a:t>Evidence for Continental Drift</a:t>
+            </a:r>
+            <a:endParaRPr lang="en-US" sz="2200" dirty="0"/>
           </a:p>
         </p:txBody>
       </p:sp>
@@ -2212,8 +2456,8 @@
         </p:nvSpPr>
         <p:spPr>
           <a:xfrm>
-            <a:off x="457200" y="1097280"/>
-            <a:ext cx="8229600" cy="3657600"/>
+            <a:off x="640080" y="1005840"/>
+            <a:ext cx="7863840" cy="2926080"/>
           </a:xfrm>
           <a:prstGeom prst="rect">
             <a:avLst/>
@@ -2222,7 +2466,7 @@
           <a:ln/>
         </p:spPr>
         <p:txBody>
-          <a:bodyPr wrap="square" rtlCol="0" anchor="t"/>
+          <a:bodyPr wrap="square" rtlCol="0" anchor="ctr"/>
           <a:lstStyle/>
           <a:p>
             <a:pPr marL="342900" indent="-342900">
@@ -2233,7 +2477,7 @@
               <a:buChar char="•"/>
             </a:pPr>
             <a:r>
-              <a:rPr lang="en-US" sz="1400" dirty="0">
+              <a:rPr lang="en-US" sz="1600" dirty="0">
                 <a:solidFill>
                   <a:srgbClr val="3D3A36"/>
                 </a:solidFill>
@@ -2241,9 +2485,9 @@
                 <a:ea typeface="Calibri" pitchFamily="34" charset="-122"/>
                 <a:cs typeface="Calibri" pitchFamily="34" charset="-120"/>
               </a:rPr>
-              <a:t>~300 million years ago: all land joined as Pangaea</a:t>
-            </a:r>
-            <a:endParaRPr lang="en-US" sz="1400" dirty="0"/>
+              <a:t>Coastline fit — South America and Africa like a puzzle.</a:t>
+            </a:r>
+            <a:endParaRPr lang="en-US" sz="1600" dirty="0"/>
           </a:p>
           <a:p>
             <a:pPr marL="342900" indent="-342900">
@@ -2254,7 +2498,7 @@
               <a:buChar char="•"/>
             </a:pPr>
             <a:r>
-              <a:rPr lang="en-US" sz="1400" dirty="0">
+              <a:rPr lang="en-US" sz="1600" dirty="0">
                 <a:solidFill>
                   <a:srgbClr val="3D3A36"/>
                 </a:solidFill>
@@ -2262,9 +2506,9 @@
                 <a:ea typeface="Calibri" pitchFamily="34" charset="-122"/>
                 <a:cs typeface="Calibri" pitchFamily="34" charset="-120"/>
               </a:rPr>
-              <a:t>~200 million years ago: Pangaea split into Laurasia (north) and Gondwana (south)</a:t>
-            </a:r>
-            <a:endParaRPr lang="en-US" sz="1400" dirty="0"/>
+              <a:t>Matching fossils — Lystrosaurus found in China, India, AND Antarctica.</a:t>
+            </a:r>
+            <a:endParaRPr lang="en-US" sz="1600" dirty="0"/>
           </a:p>
           <a:p>
             <a:pPr marL="342900" indent="-342900">
@@ -2275,7 +2519,7 @@
               <a:buChar char="•"/>
             </a:pPr>
             <a:r>
-              <a:rPr lang="en-US" sz="1400" dirty="0">
+              <a:rPr lang="en-US" sz="1600" dirty="0">
                 <a:solidFill>
                   <a:srgbClr val="3D3A36"/>
                 </a:solidFill>
@@ -2283,9 +2527,9 @@
                 <a:ea typeface="Calibri" pitchFamily="34" charset="-122"/>
                 <a:cs typeface="Calibri" pitchFamily="34" charset="-120"/>
               </a:rPr>
-              <a:t>~100 million years ago: Atlantic Ocean forming as continents separate</a:t>
-            </a:r>
-            <a:endParaRPr lang="en-US" sz="1400" dirty="0"/>
+              <a:t>Rock evidence — identical rock types match across continents.</a:t>
+            </a:r>
+            <a:endParaRPr lang="en-US" sz="1600" dirty="0"/>
           </a:p>
           <a:p>
             <a:pPr marL="342900" indent="-342900">
@@ -2296,7 +2540,7 @@
               <a:buChar char="•"/>
             </a:pPr>
             <a:r>
-              <a:rPr lang="en-US" sz="1400" dirty="0">
+              <a:rPr lang="en-US" sz="1600" dirty="0">
                 <a:solidFill>
                   <a:srgbClr val="3D3A36"/>
                 </a:solidFill>
@@ -2304,30 +2548,9 @@
                 <a:ea typeface="Calibri" pitchFamily="34" charset="-122"/>
                 <a:cs typeface="Calibri" pitchFamily="34" charset="-120"/>
               </a:rPr>
-              <a:t>Today: continents still moving at 2–5 cm per year</a:t>
-            </a:r>
-            <a:endParaRPr lang="en-US" sz="1400" dirty="0"/>
-          </a:p>
-          <a:p>
-            <a:pPr marL="342900" indent="-342900">
-              <a:spcAft>
-                <a:spcPts val="800"/>
-              </a:spcAft>
-              <a:buSzPct val="100000"/>
-              <a:buChar char="•"/>
-            </a:pPr>
-            <a:r>
-              <a:rPr lang="en-US" sz="1400" dirty="0">
-                <a:solidFill>
-                  <a:srgbClr val="3D3A36"/>
-                </a:solidFill>
-                <a:latin typeface="Calibri" pitchFamily="34" charset="0"/>
-                <a:ea typeface="Calibri" pitchFamily="34" charset="-122"/>
-                <a:cs typeface="Calibri" pitchFamily="34" charset="-120"/>
-              </a:rPr>
-              <a:t>Future: in ~250 million years, continents may rejoin as 'Pangaea Ultima'</a:t>
-            </a:r>
-            <a:endParaRPr lang="en-US" sz="1400" dirty="0"/>
+              <a:t>Climate clues — coal deposits in Antarctica (coal forms in tropical swamps).</a:t>
+            </a:r>
+            <a:endParaRPr lang="en-US" sz="1600" dirty="0"/>
           </a:p>
         </p:txBody>
       </p:sp>
@@ -2345,7 +2568,7 @@
     <p:bg>
       <p:bgPr>
         <a:solidFill>
-          <a:srgbClr val="1B2A4A"/>
+          <a:srgbClr val="FAF8F5"/>
         </a:solidFill>
       </p:bgPr>
     </p:bg>
@@ -2372,27 +2595,47 @@
         <p:spPr>
           <a:xfrm>
             <a:off x="0" y="0"/>
-            <a:ext cx="109728" cy="5143500"/>
-          </a:xfrm>
-          <a:prstGeom prst="rect">
-            <a:avLst/>
-          </a:prstGeom>
-          <a:solidFill>
-            <a:srgbClr val="E9C46A"/>
-          </a:solidFill>
-          <a:ln/>
-        </p:spPr>
-      </p:sp>
-      <p:sp>
-        <p:nvSpPr>
-          <p:cNvPr id="3" name="Text 1"/>
-          <p:cNvSpPr/>
-          <p:nvPr/>
-        </p:nvSpPr>
-        <p:spPr>
-          <a:xfrm>
-            <a:off x="731520" y="457200"/>
-            <a:ext cx="7772400" cy="731520"/>
+            <a:ext cx="9144000" cy="822960"/>
+          </a:xfrm>
+          <a:prstGeom prst="rect">
+            <a:avLst/>
+          </a:prstGeom>
+          <a:solidFill>
+            <a:srgbClr val="FFFFFF"/>
+          </a:solidFill>
+          <a:ln/>
+        </p:spPr>
+      </p:sp>
+      <p:sp>
+        <p:nvSpPr>
+          <p:cNvPr id="3" name="Shape 1"/>
+          <p:cNvSpPr/>
+          <p:nvPr/>
+        </p:nvSpPr>
+        <p:spPr>
+          <a:xfrm>
+            <a:off x="0" y="795528"/>
+            <a:ext cx="9144000" cy="27432"/>
+          </a:xfrm>
+          <a:prstGeom prst="rect">
+            <a:avLst/>
+          </a:prstGeom>
+          <a:solidFill>
+            <a:srgbClr val="2A9D8F"/>
+          </a:solidFill>
+          <a:ln/>
+        </p:spPr>
+      </p:sp>
+      <p:sp>
+        <p:nvSpPr>
+          <p:cNvPr id="4" name="Text 2"/>
+          <p:cNvSpPr/>
+          <p:nvPr/>
+        </p:nvSpPr>
+        <p:spPr>
+          <a:xfrm>
+            <a:off x="640080" y="91440"/>
+            <a:ext cx="7863840" cy="640080"/>
           </a:xfrm>
           <a:prstGeom prst="rect">
             <a:avLst/>
@@ -2401,37 +2644,84 @@
           <a:ln/>
         </p:spPr>
         <p:txBody>
-          <a:bodyPr wrap="square" rtlCol="0" anchor="ctr"/>
+          <a:bodyPr wrap="square" lIns="0" tIns="0" rIns="0" bIns="0" rtlCol="0" anchor="ctr"/>
           <a:lstStyle/>
           <a:p>
             <a:pPr indent="0" marL="0">
               <a:buNone/>
             </a:pPr>
             <a:r>
-              <a:rPr lang="en-US" sz="3200" b="1" dirty="0">
-                <a:solidFill>
-                  <a:srgbClr val="FFFFFF"/>
+              <a:rPr lang="en-US" sz="2200" b="1" dirty="0">
+                <a:solidFill>
+                  <a:srgbClr val="1B2A4A"/>
                 </a:solidFill>
                 <a:latin typeface="Georgia" pitchFamily="34" charset="0"/>
                 <a:ea typeface="Georgia" pitchFamily="34" charset="-122"/>
                 <a:cs typeface="Georgia" pitchFamily="34" charset="-120"/>
               </a:rPr>
-              <a:t>Key Takeaways</a:t>
-            </a:r>
-            <a:endParaRPr lang="en-US" sz="3200" dirty="0"/>
-          </a:p>
-        </p:txBody>
-      </p:sp>
-      <p:sp>
-        <p:nvSpPr>
-          <p:cNvPr id="4" name="Text 2"/>
-          <p:cNvSpPr/>
-          <p:nvPr/>
-        </p:nvSpPr>
-        <p:spPr>
-          <a:xfrm>
-            <a:off x="731520" y="1463040"/>
-            <a:ext cx="7772400" cy="3200400"/>
+              <a:t>Why Was He Rejected?</a:t>
+            </a:r>
+            <a:endParaRPr lang="en-US" sz="2200" dirty="0"/>
+          </a:p>
+        </p:txBody>
+      </p:sp>
+      <p:sp>
+        <p:nvSpPr>
+          <p:cNvPr id="5" name="Shape 3"/>
+          <p:cNvSpPr/>
+          <p:nvPr/>
+        </p:nvSpPr>
+        <p:spPr>
+          <a:xfrm>
+            <a:off x="457200" y="1005840"/>
+            <a:ext cx="3931920" cy="3657600"/>
+          </a:xfrm>
+          <a:prstGeom prst="rect">
+            <a:avLst/>
+          </a:prstGeom>
+          <a:solidFill>
+            <a:srgbClr val="FFFFFF"/>
+          </a:solidFill>
+          <a:ln/>
+          <a:effectLst>
+            <a:outerShdw sx="100000" sy="100000" kx="0" ky="0" algn="bl" rotWithShape="0" blurRad="76200" dist="25400" dir="8100000">
+              <a:srgbClr val="000000">
+                <a:alpha val="12000"/>
+              </a:srgbClr>
+            </a:outerShdw>
+          </a:effectLst>
+        </p:spPr>
+      </p:sp>
+      <p:sp>
+        <p:nvSpPr>
+          <p:cNvPr id="6" name="Shape 4"/>
+          <p:cNvSpPr/>
+          <p:nvPr/>
+        </p:nvSpPr>
+        <p:spPr>
+          <a:xfrm>
+            <a:off x="457200" y="1005840"/>
+            <a:ext cx="3931920" cy="64008"/>
+          </a:xfrm>
+          <a:prstGeom prst="rect">
+            <a:avLst/>
+          </a:prstGeom>
+          <a:solidFill>
+            <a:srgbClr val="2A9D8F"/>
+          </a:solidFill>
+          <a:ln/>
+        </p:spPr>
+      </p:sp>
+      <p:sp>
+        <p:nvSpPr>
+          <p:cNvPr id="7" name="Text 5"/>
+          <p:cNvSpPr/>
+          <p:nvPr/>
+        </p:nvSpPr>
+        <p:spPr>
+          <a:xfrm>
+            <a:off x="640080" y="1188720"/>
+            <a:ext cx="3566160" cy="457200"/>
           </a:xfrm>
           <a:prstGeom prst="rect">
             <a:avLst/>
@@ -2440,151 +2730,1581 @@
           <a:ln/>
         </p:spPr>
         <p:txBody>
-          <a:bodyPr wrap="square" rtlCol="0" anchor="t"/>
+          <a:bodyPr wrap="square" rtlCol="0" anchor="ctr"/>
+          <a:lstStyle/>
+          <a:p>
+            <a:pPr indent="0" marL="0">
+              <a:buNone/>
+            </a:pPr>
+            <a:r>
+              <a:rPr lang="en-US" sz="1600" b="1" dirty="0">
+                <a:solidFill>
+                  <a:srgbClr val="2A9D8F"/>
+                </a:solidFill>
+                <a:latin typeface="Calibri" pitchFamily="34" charset="0"/>
+                <a:ea typeface="Calibri" pitchFamily="34" charset="-122"/>
+                <a:cs typeface="Calibri" pitchFamily="34" charset="-120"/>
+              </a:rPr>
+              <a:t>The Problem</a:t>
+            </a:r>
+            <a:endParaRPr lang="en-US" sz="1600" dirty="0"/>
+          </a:p>
+        </p:txBody>
+      </p:sp>
+      <p:sp>
+        <p:nvSpPr>
+          <p:cNvPr id="8" name="Text 6"/>
+          <p:cNvSpPr/>
+          <p:nvPr/>
+        </p:nvSpPr>
+        <p:spPr>
+          <a:xfrm>
+            <a:off x="640080" y="1691640"/>
+            <a:ext cx="3566160" cy="2743200"/>
+          </a:xfrm>
+          <a:prstGeom prst="rect">
+            <a:avLst/>
+          </a:prstGeom>
+          <a:noFill/>
+          <a:ln/>
+        </p:spPr>
+        <p:txBody>
+          <a:bodyPr wrap="square" rtlCol="0" anchor="ctr"/>
           <a:lstStyle/>
           <a:p>
             <a:pPr marL="342900" indent="-342900">
               <a:spcAft>
-                <a:spcPts val="1000"/>
+                <a:spcPts val="600"/>
               </a:spcAft>
               <a:buSzPct val="100000"/>
               <a:buChar char="•"/>
             </a:pPr>
             <a:r>
-              <a:rPr lang="en-US" sz="1500" dirty="0">
-                <a:solidFill>
-                  <a:srgbClr val="CADCFC"/>
+              <a:rPr lang="en-US" sz="1400" dirty="0">
+                <a:solidFill>
+                  <a:srgbClr val="3D3A36"/>
                 </a:solidFill>
                 <a:latin typeface="Calibri" pitchFamily="34" charset="0"/>
                 <a:ea typeface="Calibri" pitchFamily="34" charset="-122"/>
                 <a:cs typeface="Calibri" pitchFamily="34" charset="-120"/>
               </a:rPr>
-              <a:t>Wegener proposed Pangaea — all continents once joined</a:t>
-            </a:r>
-            <a:endParaRPr lang="en-US" sz="1500" dirty="0"/>
+              <a:t>Wegener could not explain HOW continents moved.</a:t>
+            </a:r>
+            <a:endParaRPr lang="en-US" sz="1400" dirty="0"/>
           </a:p>
           <a:p>
             <a:pPr marL="342900" indent="-342900">
               <a:spcAft>
-                <a:spcPts val="1000"/>
+                <a:spcPts val="600"/>
               </a:spcAft>
               <a:buSzPct val="100000"/>
               <a:buChar char="•"/>
             </a:pPr>
             <a:r>
-              <a:rPr lang="en-US" sz="1500" dirty="0">
-                <a:solidFill>
-                  <a:srgbClr val="CADCFC"/>
+              <a:rPr lang="en-US" sz="1400" dirty="0">
+                <a:solidFill>
+                  <a:srgbClr val="3D3A36"/>
                 </a:solidFill>
                 <a:latin typeface="Calibri" pitchFamily="34" charset="0"/>
                 <a:ea typeface="Calibri" pitchFamily="34" charset="-122"/>
                 <a:cs typeface="Calibri" pitchFamily="34" charset="-120"/>
               </a:rPr>
-              <a:t>Evidence: jigsaw fit, matching fossils, matching rocks, glacial scratches</a:t>
-            </a:r>
-            <a:endParaRPr lang="en-US" sz="1500" dirty="0"/>
+              <a:t>He was a meteorologist, not a geologist.</a:t>
+            </a:r>
+            <a:endParaRPr lang="en-US" sz="1400" dirty="0"/>
           </a:p>
           <a:p>
             <a:pPr marL="342900" indent="-342900">
               <a:spcAft>
-                <a:spcPts val="1000"/>
+                <a:spcPts val="600"/>
               </a:spcAft>
               <a:buSzPct val="100000"/>
               <a:buChar char="•"/>
             </a:pPr>
             <a:r>
-              <a:rPr lang="en-US" sz="1500" dirty="0">
-                <a:solidFill>
-                  <a:srgbClr val="CADCFC"/>
+              <a:rPr lang="en-US" sz="1400" dirty="0">
+                <a:solidFill>
+                  <a:srgbClr val="3D3A36"/>
                 </a:solidFill>
                 <a:latin typeface="Calibri" pitchFamily="34" charset="0"/>
                 <a:ea typeface="Calibri" pitchFamily="34" charset="-122"/>
                 <a:cs typeface="Calibri" pitchFamily="34" charset="-120"/>
               </a:rPr>
-              <a:t>Rejected because no mechanism for HOW continents moved</a:t>
-            </a:r>
-            <a:endParaRPr lang="en-US" sz="1500" dirty="0"/>
-          </a:p>
+              <a:t>German scientific community was divided.</a:t>
+            </a:r>
+            <a:endParaRPr lang="en-US" sz="1400" dirty="0"/>
+          </a:p>
+        </p:txBody>
+      </p:sp>
+      <p:sp>
+        <p:nvSpPr>
+          <p:cNvPr id="9" name="Shape 7"/>
+          <p:cNvSpPr/>
+          <p:nvPr/>
+        </p:nvSpPr>
+        <p:spPr>
+          <a:xfrm>
+            <a:off x="4754880" y="1005840"/>
+            <a:ext cx="3931920" cy="3657600"/>
+          </a:xfrm>
+          <a:prstGeom prst="rect">
+            <a:avLst/>
+          </a:prstGeom>
+          <a:solidFill>
+            <a:srgbClr val="FFFFFF"/>
+          </a:solidFill>
+          <a:ln/>
+          <a:effectLst>
+            <a:outerShdw sx="100000" sy="100000" kx="0" ky="0" algn="bl" rotWithShape="0" blurRad="76200" dist="25400" dir="8100000">
+              <a:srgbClr val="000000">
+                <a:alpha val="12000"/>
+              </a:srgbClr>
+            </a:outerShdw>
+          </a:effectLst>
+        </p:spPr>
+      </p:sp>
+      <p:sp>
+        <p:nvSpPr>
+          <p:cNvPr id="10" name="Shape 8"/>
+          <p:cNvSpPr/>
+          <p:nvPr/>
+        </p:nvSpPr>
+        <p:spPr>
+          <a:xfrm>
+            <a:off x="4754880" y="1005840"/>
+            <a:ext cx="3931920" cy="64008"/>
+          </a:xfrm>
+          <a:prstGeom prst="rect">
+            <a:avLst/>
+          </a:prstGeom>
+          <a:solidFill>
+            <a:srgbClr val="E9C46A"/>
+          </a:solidFill>
+          <a:ln/>
+        </p:spPr>
+      </p:sp>
+      <p:sp>
+        <p:nvSpPr>
+          <p:cNvPr id="11" name="Text 9"/>
+          <p:cNvSpPr/>
+          <p:nvPr/>
+        </p:nvSpPr>
+        <p:spPr>
+          <a:xfrm>
+            <a:off x="4937760" y="1188720"/>
+            <a:ext cx="3566160" cy="457200"/>
+          </a:xfrm>
+          <a:prstGeom prst="rect">
+            <a:avLst/>
+          </a:prstGeom>
+          <a:noFill/>
+          <a:ln/>
+        </p:spPr>
+        <p:txBody>
+          <a:bodyPr wrap="square" rtlCol="0" anchor="ctr"/>
+          <a:lstStyle/>
+          <a:p>
+            <a:pPr indent="0" marL="0">
+              <a:buNone/>
+            </a:pPr>
+            <a:r>
+              <a:rPr lang="en-US" sz="1600" b="1" dirty="0">
+                <a:solidFill>
+                  <a:srgbClr val="E9C46A"/>
+                </a:solidFill>
+                <a:latin typeface="Calibri" pitchFamily="34" charset="0"/>
+                <a:ea typeface="Calibri" pitchFamily="34" charset="-122"/>
+                <a:cs typeface="Calibri" pitchFamily="34" charset="-120"/>
+              </a:rPr>
+              <a:t>The Solution (1960s)</a:t>
+            </a:r>
+            <a:endParaRPr lang="en-US" sz="1600" dirty="0"/>
+          </a:p>
+        </p:txBody>
+      </p:sp>
+      <p:sp>
+        <p:nvSpPr>
+          <p:cNvPr id="12" name="Text 10"/>
+          <p:cNvSpPr/>
+          <p:nvPr/>
+        </p:nvSpPr>
+        <p:spPr>
+          <a:xfrm>
+            <a:off x="4937760" y="1691640"/>
+            <a:ext cx="3566160" cy="2743200"/>
+          </a:xfrm>
+          <a:prstGeom prst="rect">
+            <a:avLst/>
+          </a:prstGeom>
+          <a:noFill/>
+          <a:ln/>
+        </p:spPr>
+        <p:txBody>
+          <a:bodyPr wrap="square" rtlCol="0" anchor="ctr"/>
+          <a:lstStyle/>
           <a:p>
             <a:pPr marL="342900" indent="-342900">
               <a:spcAft>
-                <a:spcPts val="1000"/>
+                <a:spcPts val="600"/>
               </a:spcAft>
               <a:buSzPct val="100000"/>
               <a:buChar char="•"/>
             </a:pPr>
             <a:r>
-              <a:rPr lang="en-US" sz="1500" dirty="0">
-                <a:solidFill>
-                  <a:srgbClr val="CADCFC"/>
+              <a:rPr lang="en-US" sz="1400" dirty="0">
+                <a:solidFill>
+                  <a:srgbClr val="3D3A36"/>
                 </a:solidFill>
                 <a:latin typeface="Calibri" pitchFamily="34" charset="0"/>
                 <a:ea typeface="Calibri" pitchFamily="34" charset="-122"/>
                 <a:cs typeface="Calibri" pitchFamily="34" charset="-120"/>
               </a:rPr>
-              <a:t>Sea-floor spreading (1960s) confirmed the mechanism</a:t>
-            </a:r>
-            <a:endParaRPr lang="en-US" sz="1500" dirty="0"/>
+              <a:t>Sea-floor spreading was discovered.</a:t>
+            </a:r>
+            <a:endParaRPr lang="en-US" sz="1400" dirty="0"/>
           </a:p>
           <a:p>
             <a:pPr marL="342900" indent="-342900">
               <a:spcAft>
-                <a:spcPts val="1000"/>
+                <a:spcPts val="600"/>
               </a:spcAft>
               <a:buSzPct val="100000"/>
               <a:buChar char="•"/>
             </a:pPr>
             <a:r>
-              <a:rPr lang="en-US" sz="1500" dirty="0">
-                <a:solidFill>
-                  <a:srgbClr val="CADCFC"/>
+              <a:rPr lang="en-US" sz="1400" dirty="0">
+                <a:solidFill>
+                  <a:srgbClr val="3D3A36"/>
                 </a:solidFill>
                 <a:latin typeface="Calibri" pitchFamily="34" charset="0"/>
                 <a:ea typeface="Calibri" pitchFamily="34" charset="-122"/>
                 <a:cs typeface="Calibri" pitchFamily="34" charset="-120"/>
               </a:rPr>
-              <a:t>Continents still moving at ~2–5 cm per year</a:t>
-            </a:r>
-            <a:endParaRPr lang="en-US" sz="1500" dirty="0"/>
-          </a:p>
-        </p:txBody>
-      </p:sp>
-      <p:sp>
-        <p:nvSpPr>
-          <p:cNvPr id="5" name="Text 3"/>
-          <p:cNvSpPr/>
-          <p:nvPr/>
-        </p:nvSpPr>
-        <p:spPr>
-          <a:xfrm>
-            <a:off x="731520" y="4572000"/>
-            <a:ext cx="7772400" cy="365760"/>
-          </a:xfrm>
-          <a:prstGeom prst="rect">
-            <a:avLst/>
-          </a:prstGeom>
-          <a:noFill/>
-          <a:ln/>
-        </p:spPr>
-        <p:txBody>
-          <a:bodyPr wrap="square" rtlCol="0" anchor="ctr"/>
-          <a:lstStyle/>
-          <a:p>
-            <a:pPr indent="0" marL="0">
-              <a:buNone/>
-            </a:pPr>
-            <a:r>
-              <a:rPr lang="en-US" sz="1100" dirty="0">
-                <a:solidFill>
-                  <a:srgbClr val="E9C46A"/>
+              <a:t>Convection currents provide the mechanism.</a:t>
+            </a:r>
+            <a:endParaRPr lang="en-US" sz="1400" dirty="0"/>
+          </a:p>
+          <a:p>
+            <a:pPr marL="342900" indent="-342900">
+              <a:spcAft>
+                <a:spcPts val="600"/>
+              </a:spcAft>
+              <a:buSzPct val="100000"/>
+              <a:buChar char="•"/>
+            </a:pPr>
+            <a:r>
+              <a:rPr lang="en-US" sz="1400" dirty="0">
+                <a:solidFill>
+                  <a:srgbClr val="3D3A36"/>
                 </a:solidFill>
                 <a:latin typeface="Calibri" pitchFamily="34" charset="0"/>
                 <a:ea typeface="Calibri" pitchFamily="34" charset="-122"/>
                 <a:cs typeface="Calibri" pitchFamily="34" charset="-120"/>
               </a:rPr>
+              <a:t>Plate tectonics theory was born.</a:t>
+            </a:r>
+            <a:endParaRPr lang="en-US" sz="1400" dirty="0"/>
+          </a:p>
+        </p:txBody>
+      </p:sp>
+    </p:spTree>
+  </p:cSld>
+  <p:clrMapOvr>
+    <a:masterClrMapping/>
+  </p:clrMapOvr>
+</p:sld>
+</file>
+
+<file path=ppt/slides/slide6.xml><?xml version="1.0" encoding="utf-8"?>
+<p:sld xmlns:a="http://schemas.openxmlformats.org/drawingml/2006/main" xmlns:r="http://schemas.openxmlformats.org/officeDocument/2006/relationships" xmlns:p="http://schemas.openxmlformats.org/presentationml/2006/main">
+  <p:cSld name="Slide 6">
+    <p:spTree>
+      <p:nvGrpSpPr>
+        <p:cNvPr id="1" name=""/>
+        <p:cNvGrpSpPr/>
+        <p:nvPr/>
+      </p:nvGrpSpPr>
+      <p:grpSpPr>
+        <a:xfrm>
+          <a:off x="0" y="0"/>
+          <a:ext cx="0" cy="0"/>
+          <a:chOff x="0" y="0"/>
+          <a:chExt cx="0" cy="0"/>
+        </a:xfrm>
+      </p:grpSpPr>
+      <p:sp>
+        <p:nvSpPr>
+          <p:cNvPr id="2" name="Shape 0"/>
+          <p:cNvSpPr/>
+          <p:nvPr/>
+        </p:nvSpPr>
+        <p:spPr>
+          <a:xfrm>
+            <a:off x="0" y="0"/>
+            <a:ext cx="9144000" cy="5143500"/>
+          </a:xfrm>
+          <a:prstGeom prst="rect">
+            <a:avLst/>
+          </a:prstGeom>
+          <a:solidFill>
+            <a:srgbClr val="1B2A4A"/>
+          </a:solidFill>
+          <a:ln/>
+        </p:spPr>
+      </p:sp>
+      <p:sp>
+        <p:nvSpPr>
+          <p:cNvPr id="3" name="Text 1"/>
+          <p:cNvSpPr/>
+          <p:nvPr/>
+        </p:nvSpPr>
+        <p:spPr>
+          <a:xfrm>
+            <a:off x="640080" y="365760"/>
+            <a:ext cx="7863840" cy="640080"/>
+          </a:xfrm>
+          <a:prstGeom prst="rect">
+            <a:avLst/>
+          </a:prstGeom>
+          <a:noFill/>
+          <a:ln/>
+        </p:spPr>
+        <p:txBody>
+          <a:bodyPr wrap="square" rtlCol="0" anchor="ctr"/>
+          <a:lstStyle/>
+          <a:p>
+            <a:pPr indent="0" marL="0">
+              <a:buNone/>
+            </a:pPr>
+            <a:r>
+              <a:rPr lang="en-US" sz="2200" b="1" dirty="0">
+                <a:solidFill>
+                  <a:srgbClr val="FFFFFF"/>
+                </a:solidFill>
+                <a:latin typeface="Georgia" pitchFamily="34" charset="0"/>
+                <a:ea typeface="Georgia" pitchFamily="34" charset="-122"/>
+                <a:cs typeface="Georgia" pitchFamily="34" charset="-120"/>
+              </a:rPr>
+              <a:t>Pangaea Timeline</a:t>
+            </a:r>
+            <a:endParaRPr lang="en-US" sz="2200" dirty="0"/>
+          </a:p>
+        </p:txBody>
+      </p:sp>
+      <p:sp>
+        <p:nvSpPr>
+          <p:cNvPr id="4" name="Shape 2"/>
+          <p:cNvSpPr/>
+          <p:nvPr/>
+        </p:nvSpPr>
+        <p:spPr>
+          <a:xfrm>
+            <a:off x="640080" y="1280160"/>
+            <a:ext cx="2438400" cy="2926080"/>
+          </a:xfrm>
+          <a:prstGeom prst="rect">
+            <a:avLst/>
+          </a:prstGeom>
+          <a:solidFill>
+            <a:srgbClr val="243660"/>
+          </a:solidFill>
+          <a:ln/>
+          <a:effectLst>
+            <a:outerShdw sx="100000" sy="100000" kx="0" ky="0" algn="bl" rotWithShape="0" blurRad="76200" dist="25400" dir="8100000">
+              <a:srgbClr val="000000">
+                <a:alpha val="12000"/>
+              </a:srgbClr>
+            </a:outerShdw>
+          </a:effectLst>
+        </p:spPr>
+      </p:sp>
+      <p:sp>
+        <p:nvSpPr>
+          <p:cNvPr id="5" name="Text 3"/>
+          <p:cNvSpPr/>
+          <p:nvPr/>
+        </p:nvSpPr>
+        <p:spPr>
+          <a:xfrm>
+            <a:off x="640080" y="1463040"/>
+            <a:ext cx="2438400" cy="1280160"/>
+          </a:xfrm>
+          <a:prstGeom prst="rect">
+            <a:avLst/>
+          </a:prstGeom>
+          <a:noFill/>
+          <a:ln/>
+        </p:spPr>
+        <p:txBody>
+          <a:bodyPr wrap="square" rtlCol="0" anchor="ctr"/>
+          <a:lstStyle/>
+          <a:p>
+            <a:pPr algn="ctr" indent="0" marL="0">
+              <a:buNone/>
+            </a:pPr>
+            <a:r>
+              <a:rPr lang="en-US" sz="4800" b="1" dirty="0">
+                <a:solidFill>
+                  <a:srgbClr val="2A9D8F"/>
+                </a:solidFill>
+                <a:latin typeface="Georgia" pitchFamily="34" charset="0"/>
+                <a:ea typeface="Georgia" pitchFamily="34" charset="-122"/>
+                <a:cs typeface="Georgia" pitchFamily="34" charset="-120"/>
+              </a:rPr>
+              <a:t>335 Ma</a:t>
+            </a:r>
+            <a:endParaRPr lang="en-US" sz="4800" dirty="0"/>
+          </a:p>
+        </p:txBody>
+      </p:sp>
+      <p:sp>
+        <p:nvSpPr>
+          <p:cNvPr id="6" name="Text 4"/>
+          <p:cNvSpPr/>
+          <p:nvPr/>
+        </p:nvSpPr>
+        <p:spPr>
+          <a:xfrm>
+            <a:off x="640080" y="2743200"/>
+            <a:ext cx="2438400" cy="548640"/>
+          </a:xfrm>
+          <a:prstGeom prst="rect">
+            <a:avLst/>
+          </a:prstGeom>
+          <a:noFill/>
+          <a:ln/>
+        </p:spPr>
+        <p:txBody>
+          <a:bodyPr wrap="square" rtlCol="0" anchor="ctr"/>
+          <a:lstStyle/>
+          <a:p>
+            <a:pPr algn="ctr" indent="0" marL="0">
+              <a:buNone/>
+            </a:pPr>
+            <a:r>
+              <a:rPr lang="en-US" sz="1400" b="1" dirty="0">
+                <a:solidFill>
+                  <a:srgbClr val="9B9690"/>
+                </a:solidFill>
+                <a:latin typeface="Calibri" pitchFamily="34" charset="0"/>
+                <a:ea typeface="Calibri" pitchFamily="34" charset="-122"/>
+                <a:cs typeface="Calibri" pitchFamily="34" charset="-120"/>
+              </a:rPr>
+              <a:t>Pangaea Forms</a:t>
+            </a:r>
+            <a:endParaRPr lang="en-US" sz="1400" dirty="0"/>
+          </a:p>
+        </p:txBody>
+      </p:sp>
+      <p:sp>
+        <p:nvSpPr>
+          <p:cNvPr id="7" name="Text 5"/>
+          <p:cNvSpPr/>
+          <p:nvPr/>
+        </p:nvSpPr>
+        <p:spPr>
+          <a:xfrm>
+            <a:off x="822960" y="3291840"/>
+            <a:ext cx="2072640" cy="731520"/>
+          </a:xfrm>
+          <a:prstGeom prst="rect">
+            <a:avLst/>
+          </a:prstGeom>
+          <a:noFill/>
+          <a:ln/>
+        </p:spPr>
+        <p:txBody>
+          <a:bodyPr wrap="square" rtlCol="0" anchor="ctr"/>
+          <a:lstStyle/>
+          <a:p>
+            <a:pPr algn="ctr" indent="0" marL="0">
+              <a:buNone/>
+            </a:pPr>
+            <a:r>
+              <a:rPr lang="en-US" sz="1200" dirty="0">
+                <a:solidFill>
+                  <a:srgbClr val="9B9690"/>
+                </a:solidFill>
+                <a:latin typeface="Calibri" pitchFamily="34" charset="0"/>
+                <a:ea typeface="Calibri" pitchFamily="34" charset="-122"/>
+                <a:cs typeface="Calibri" pitchFamily="34" charset="-120"/>
+              </a:rPr>
+              <a:t>All land joined</a:t>
+            </a:r>
+            <a:endParaRPr lang="en-US" sz="1200" dirty="0"/>
+          </a:p>
+        </p:txBody>
+      </p:sp>
+      <p:sp>
+        <p:nvSpPr>
+          <p:cNvPr id="8" name="Shape 6"/>
+          <p:cNvSpPr/>
+          <p:nvPr/>
+        </p:nvSpPr>
+        <p:spPr>
+          <a:xfrm>
+            <a:off x="3352800" y="1280160"/>
+            <a:ext cx="2438400" cy="2926080"/>
+          </a:xfrm>
+          <a:prstGeom prst="rect">
+            <a:avLst/>
+          </a:prstGeom>
+          <a:solidFill>
+            <a:srgbClr val="243660"/>
+          </a:solidFill>
+          <a:ln/>
+          <a:effectLst>
+            <a:outerShdw sx="100000" sy="100000" kx="0" ky="0" algn="bl" rotWithShape="0" blurRad="76200" dist="25400" dir="8100000">
+              <a:srgbClr val="000000">
+                <a:alpha val="12000"/>
+              </a:srgbClr>
+            </a:outerShdw>
+          </a:effectLst>
+        </p:spPr>
+      </p:sp>
+      <p:sp>
+        <p:nvSpPr>
+          <p:cNvPr id="9" name="Text 7"/>
+          <p:cNvSpPr/>
+          <p:nvPr/>
+        </p:nvSpPr>
+        <p:spPr>
+          <a:xfrm>
+            <a:off x="3352800" y="1463040"/>
+            <a:ext cx="2438400" cy="1280160"/>
+          </a:xfrm>
+          <a:prstGeom prst="rect">
+            <a:avLst/>
+          </a:prstGeom>
+          <a:noFill/>
+          <a:ln/>
+        </p:spPr>
+        <p:txBody>
+          <a:bodyPr wrap="square" rtlCol="0" anchor="ctr"/>
+          <a:lstStyle/>
+          <a:p>
+            <a:pPr algn="ctr" indent="0" marL="0">
+              <a:buNone/>
+            </a:pPr>
+            <a:r>
+              <a:rPr lang="en-US" sz="4800" b="1" dirty="0">
+                <a:solidFill>
+                  <a:srgbClr val="2A9D8F"/>
+                </a:solidFill>
+                <a:latin typeface="Georgia" pitchFamily="34" charset="0"/>
+                <a:ea typeface="Georgia" pitchFamily="34" charset="-122"/>
+                <a:cs typeface="Georgia" pitchFamily="34" charset="-120"/>
+              </a:rPr>
+              <a:t>200 Ma</a:t>
+            </a:r>
+            <a:endParaRPr lang="en-US" sz="4800" dirty="0"/>
+          </a:p>
+        </p:txBody>
+      </p:sp>
+      <p:sp>
+        <p:nvSpPr>
+          <p:cNvPr id="10" name="Text 8"/>
+          <p:cNvSpPr/>
+          <p:nvPr/>
+        </p:nvSpPr>
+        <p:spPr>
+          <a:xfrm>
+            <a:off x="3352800" y="2743200"/>
+            <a:ext cx="2438400" cy="548640"/>
+          </a:xfrm>
+          <a:prstGeom prst="rect">
+            <a:avLst/>
+          </a:prstGeom>
+          <a:noFill/>
+          <a:ln/>
+        </p:spPr>
+        <p:txBody>
+          <a:bodyPr wrap="square" rtlCol="0" anchor="ctr"/>
+          <a:lstStyle/>
+          <a:p>
+            <a:pPr algn="ctr" indent="0" marL="0">
+              <a:buNone/>
+            </a:pPr>
+            <a:r>
+              <a:rPr lang="en-US" sz="1400" b="1" dirty="0">
+                <a:solidFill>
+                  <a:srgbClr val="9B9690"/>
+                </a:solidFill>
+                <a:latin typeface="Calibri" pitchFamily="34" charset="0"/>
+                <a:ea typeface="Calibri" pitchFamily="34" charset="-122"/>
+                <a:cs typeface="Calibri" pitchFamily="34" charset="-120"/>
+              </a:rPr>
+              <a:t>Breakup Begins</a:t>
+            </a:r>
+            <a:endParaRPr lang="en-US" sz="1400" dirty="0"/>
+          </a:p>
+        </p:txBody>
+      </p:sp>
+      <p:sp>
+        <p:nvSpPr>
+          <p:cNvPr id="11" name="Text 9"/>
+          <p:cNvSpPr/>
+          <p:nvPr/>
+        </p:nvSpPr>
+        <p:spPr>
+          <a:xfrm>
+            <a:off x="3535680" y="3291840"/>
+            <a:ext cx="2072640" cy="731520"/>
+          </a:xfrm>
+          <a:prstGeom prst="rect">
+            <a:avLst/>
+          </a:prstGeom>
+          <a:noFill/>
+          <a:ln/>
+        </p:spPr>
+        <p:txBody>
+          <a:bodyPr wrap="square" rtlCol="0" anchor="ctr"/>
+          <a:lstStyle/>
+          <a:p>
+            <a:pPr algn="ctr" indent="0" marL="0">
+              <a:buNone/>
+            </a:pPr>
+            <a:r>
+              <a:rPr lang="en-US" sz="1200" dirty="0">
+                <a:solidFill>
+                  <a:srgbClr val="9B9690"/>
+                </a:solidFill>
+                <a:latin typeface="Calibri" pitchFamily="34" charset="0"/>
+                <a:ea typeface="Calibri" pitchFamily="34" charset="-122"/>
+                <a:cs typeface="Calibri" pitchFamily="34" charset="-120"/>
+              </a:rPr>
+              <a:t>Laurasia &amp; Gondwana</a:t>
+            </a:r>
+            <a:endParaRPr lang="en-US" sz="1200" dirty="0"/>
+          </a:p>
+        </p:txBody>
+      </p:sp>
+      <p:sp>
+        <p:nvSpPr>
+          <p:cNvPr id="12" name="Shape 10"/>
+          <p:cNvSpPr/>
+          <p:nvPr/>
+        </p:nvSpPr>
+        <p:spPr>
+          <a:xfrm>
+            <a:off x="6065520" y="1280160"/>
+            <a:ext cx="2438400" cy="2926080"/>
+          </a:xfrm>
+          <a:prstGeom prst="rect">
+            <a:avLst/>
+          </a:prstGeom>
+          <a:solidFill>
+            <a:srgbClr val="243660"/>
+          </a:solidFill>
+          <a:ln/>
+          <a:effectLst>
+            <a:outerShdw sx="100000" sy="100000" kx="0" ky="0" algn="bl" rotWithShape="0" blurRad="76200" dist="25400" dir="8100000">
+              <a:srgbClr val="000000">
+                <a:alpha val="12000"/>
+              </a:srgbClr>
+            </a:outerShdw>
+          </a:effectLst>
+        </p:spPr>
+      </p:sp>
+      <p:sp>
+        <p:nvSpPr>
+          <p:cNvPr id="13" name="Text 11"/>
+          <p:cNvSpPr/>
+          <p:nvPr/>
+        </p:nvSpPr>
+        <p:spPr>
+          <a:xfrm>
+            <a:off x="6065520" y="1463040"/>
+            <a:ext cx="2438400" cy="1280160"/>
+          </a:xfrm>
+          <a:prstGeom prst="rect">
+            <a:avLst/>
+          </a:prstGeom>
+          <a:noFill/>
+          <a:ln/>
+        </p:spPr>
+        <p:txBody>
+          <a:bodyPr wrap="square" rtlCol="0" anchor="ctr"/>
+          <a:lstStyle/>
+          <a:p>
+            <a:pPr algn="ctr" indent="0" marL="0">
+              <a:buNone/>
+            </a:pPr>
+            <a:r>
+              <a:rPr lang="en-US" sz="4800" b="1" dirty="0">
+                <a:solidFill>
+                  <a:srgbClr val="2A9D8F"/>
+                </a:solidFill>
+                <a:latin typeface="Georgia" pitchFamily="34" charset="0"/>
+                <a:ea typeface="Georgia" pitchFamily="34" charset="-122"/>
+                <a:cs typeface="Georgia" pitchFamily="34" charset="-120"/>
+              </a:rPr>
+              <a:t>2.5 cm/yr</a:t>
+            </a:r>
+            <a:endParaRPr lang="en-US" sz="4800" dirty="0"/>
+          </a:p>
+        </p:txBody>
+      </p:sp>
+      <p:sp>
+        <p:nvSpPr>
+          <p:cNvPr id="14" name="Text 12"/>
+          <p:cNvSpPr/>
+          <p:nvPr/>
+        </p:nvSpPr>
+        <p:spPr>
+          <a:xfrm>
+            <a:off x="6065520" y="2743200"/>
+            <a:ext cx="2438400" cy="548640"/>
+          </a:xfrm>
+          <a:prstGeom prst="rect">
+            <a:avLst/>
+          </a:prstGeom>
+          <a:noFill/>
+          <a:ln/>
+        </p:spPr>
+        <p:txBody>
+          <a:bodyPr wrap="square" rtlCol="0" anchor="ctr"/>
+          <a:lstStyle/>
+          <a:p>
+            <a:pPr algn="ctr" indent="0" marL="0">
+              <a:buNone/>
+            </a:pPr>
+            <a:r>
+              <a:rPr lang="en-US" sz="1400" b="1" dirty="0">
+                <a:solidFill>
+                  <a:srgbClr val="9B9690"/>
+                </a:solidFill>
+                <a:latin typeface="Calibri" pitchFamily="34" charset="0"/>
+                <a:ea typeface="Calibri" pitchFamily="34" charset="-122"/>
+                <a:cs typeface="Calibri" pitchFamily="34" charset="-120"/>
+              </a:rPr>
+              <a:t>Speed Today</a:t>
+            </a:r>
+            <a:endParaRPr lang="en-US" sz="1400" dirty="0"/>
+          </a:p>
+        </p:txBody>
+      </p:sp>
+      <p:sp>
+        <p:nvSpPr>
+          <p:cNvPr id="15" name="Text 13"/>
+          <p:cNvSpPr/>
+          <p:nvPr/>
+        </p:nvSpPr>
+        <p:spPr>
+          <a:xfrm>
+            <a:off x="6248400" y="3291840"/>
+            <a:ext cx="2072640" cy="731520"/>
+          </a:xfrm>
+          <a:prstGeom prst="rect">
+            <a:avLst/>
+          </a:prstGeom>
+          <a:noFill/>
+          <a:ln/>
+        </p:spPr>
+        <p:txBody>
+          <a:bodyPr wrap="square" rtlCol="0" anchor="ctr"/>
+          <a:lstStyle/>
+          <a:p>
+            <a:pPr algn="ctr" indent="0" marL="0">
+              <a:buNone/>
+            </a:pPr>
+            <a:r>
+              <a:rPr lang="en-US" sz="1200" dirty="0">
+                <a:solidFill>
+                  <a:srgbClr val="9B9690"/>
+                </a:solidFill>
+                <a:latin typeface="Calibri" pitchFamily="34" charset="0"/>
+                <a:ea typeface="Calibri" pitchFamily="34" charset="-122"/>
+                <a:cs typeface="Calibri" pitchFamily="34" charset="-120"/>
+              </a:rPr>
+              <a:t>Atlantic still widening</a:t>
+            </a:r>
+            <a:endParaRPr lang="en-US" sz="1200" dirty="0"/>
+          </a:p>
+        </p:txBody>
+      </p:sp>
+    </p:spTree>
+  </p:cSld>
+  <p:clrMapOvr>
+    <a:masterClrMapping/>
+  </p:clrMapOvr>
+</p:sld>
+</file>
+
+<file path=ppt/slides/slide7.xml><?xml version="1.0" encoding="utf-8"?>
+<p:sld xmlns:a="http://schemas.openxmlformats.org/drawingml/2006/main" xmlns:r="http://schemas.openxmlformats.org/officeDocument/2006/relationships" xmlns:p="http://schemas.openxmlformats.org/presentationml/2006/main">
+  <p:cSld name="Slide 7">
+    <p:bg>
+      <p:bgPr>
+        <a:solidFill>
+          <a:srgbClr val="FAF8F5"/>
+        </a:solidFill>
+      </p:bgPr>
+    </p:bg>
+    <p:spTree>
+      <p:nvGrpSpPr>
+        <p:cNvPr id="1" name=""/>
+        <p:cNvGrpSpPr/>
+        <p:nvPr/>
+      </p:nvGrpSpPr>
+      <p:grpSpPr>
+        <a:xfrm>
+          <a:off x="0" y="0"/>
+          <a:ext cx="0" cy="0"/>
+          <a:chOff x="0" y="0"/>
+          <a:chExt cx="0" cy="0"/>
+        </a:xfrm>
+      </p:grpSpPr>
+      <p:sp>
+        <p:nvSpPr>
+          <p:cNvPr id="2" name="Shape 0"/>
+          <p:cNvSpPr/>
+          <p:nvPr/>
+        </p:nvSpPr>
+        <p:spPr>
+          <a:xfrm>
+            <a:off x="0" y="0"/>
+            <a:ext cx="9144000" cy="822960"/>
+          </a:xfrm>
+          <a:prstGeom prst="rect">
+            <a:avLst/>
+          </a:prstGeom>
+          <a:solidFill>
+            <a:srgbClr val="FFFFFF"/>
+          </a:solidFill>
+          <a:ln/>
+        </p:spPr>
+      </p:sp>
+      <p:sp>
+        <p:nvSpPr>
+          <p:cNvPr id="3" name="Shape 1"/>
+          <p:cNvSpPr/>
+          <p:nvPr/>
+        </p:nvSpPr>
+        <p:spPr>
+          <a:xfrm>
+            <a:off x="0" y="795528"/>
+            <a:ext cx="9144000" cy="27432"/>
+          </a:xfrm>
+          <a:prstGeom prst="rect">
+            <a:avLst/>
+          </a:prstGeom>
+          <a:solidFill>
+            <a:srgbClr val="2A9D8F"/>
+          </a:solidFill>
+          <a:ln/>
+        </p:spPr>
+      </p:sp>
+      <p:sp>
+        <p:nvSpPr>
+          <p:cNvPr id="4" name="Text 2"/>
+          <p:cNvSpPr/>
+          <p:nvPr/>
+        </p:nvSpPr>
+        <p:spPr>
+          <a:xfrm>
+            <a:off x="640080" y="91440"/>
+            <a:ext cx="7863840" cy="640080"/>
+          </a:xfrm>
+          <a:prstGeom prst="rect">
+            <a:avLst/>
+          </a:prstGeom>
+          <a:noFill/>
+          <a:ln/>
+        </p:spPr>
+        <p:txBody>
+          <a:bodyPr wrap="square" lIns="0" tIns="0" rIns="0" bIns="0" rtlCol="0" anchor="ctr"/>
+          <a:lstStyle/>
+          <a:p>
+            <a:pPr indent="0" marL="0">
+              <a:buNone/>
+            </a:pPr>
+            <a:r>
+              <a:rPr lang="en-US" sz="2200" b="1" dirty="0">
+                <a:solidFill>
+                  <a:srgbClr val="1B2A4A"/>
+                </a:solidFill>
+                <a:latin typeface="Georgia" pitchFamily="34" charset="0"/>
+                <a:ea typeface="Georgia" pitchFamily="34" charset="-122"/>
+                <a:cs typeface="Georgia" pitchFamily="34" charset="-120"/>
+              </a:rPr>
+              <a:t>Recommended Videos</a:t>
+            </a:r>
+            <a:endParaRPr lang="en-US" sz="2200" dirty="0"/>
+          </a:p>
+        </p:txBody>
+      </p:sp>
+      <p:sp>
+        <p:nvSpPr>
+          <p:cNvPr id="5" name="Text 3"/>
+          <p:cNvSpPr/>
+          <p:nvPr/>
+        </p:nvSpPr>
+        <p:spPr>
+          <a:xfrm>
+            <a:off x="640080" y="868680"/>
+            <a:ext cx="7863840" cy="274320"/>
+          </a:xfrm>
+          <a:prstGeom prst="rect">
+            <a:avLst/>
+          </a:prstGeom>
+          <a:noFill/>
+          <a:ln/>
+        </p:spPr>
+        <p:txBody>
+          <a:bodyPr wrap="square" rtlCol="0" anchor="ctr"/>
+          <a:lstStyle/>
+          <a:p>
+            <a:pPr indent="0" marL="0">
+              <a:buNone/>
+            </a:pPr>
+            <a:r>
+              <a:rPr lang="en-US" sz="1200" i="1" dirty="0">
+                <a:solidFill>
+                  <a:srgbClr val="6B6660"/>
+                </a:solidFill>
+                <a:latin typeface="Calibri" pitchFamily="34" charset="0"/>
+                <a:ea typeface="Calibri" pitchFamily="34" charset="-122"/>
+                <a:cs typeface="Calibri" pitchFamily="34" charset="-120"/>
+              </a:rPr>
+              <a:t>Search these on YouTube to learn more.</a:t>
+            </a:r>
+            <a:endParaRPr lang="en-US" sz="1200" dirty="0"/>
+          </a:p>
+        </p:txBody>
+      </p:sp>
+      <p:sp>
+        <p:nvSpPr>
+          <p:cNvPr id="6" name="Shape 4"/>
+          <p:cNvSpPr/>
+          <p:nvPr/>
+        </p:nvSpPr>
+        <p:spPr>
+          <a:xfrm>
+            <a:off x="457200" y="1234440"/>
+            <a:ext cx="8229600" cy="1051560"/>
+          </a:xfrm>
+          <a:prstGeom prst="rect">
+            <a:avLst/>
+          </a:prstGeom>
+          <a:solidFill>
+            <a:srgbClr val="FFFFFF"/>
+          </a:solidFill>
+          <a:ln/>
+          <a:effectLst>
+            <a:outerShdw sx="100000" sy="100000" kx="0" ky="0" algn="bl" rotWithShape="0" blurRad="76200" dist="25400" dir="8100000">
+              <a:srgbClr val="000000">
+                <a:alpha val="12000"/>
+              </a:srgbClr>
+            </a:outerShdw>
+          </a:effectLst>
+        </p:spPr>
+      </p:sp>
+      <p:sp>
+        <p:nvSpPr>
+          <p:cNvPr id="7" name="Shape 5"/>
+          <p:cNvSpPr/>
+          <p:nvPr/>
+        </p:nvSpPr>
+        <p:spPr>
+          <a:xfrm>
+            <a:off x="457200" y="1234440"/>
+            <a:ext cx="64008" cy="1051560"/>
+          </a:xfrm>
+          <a:prstGeom prst="rect">
+            <a:avLst/>
+          </a:prstGeom>
+          <a:solidFill>
+            <a:srgbClr val="2A9D8F"/>
+          </a:solidFill>
+          <a:ln/>
+        </p:spPr>
+      </p:sp>
+      <p:sp>
+        <p:nvSpPr>
+          <p:cNvPr id="8" name="Text 6"/>
+          <p:cNvSpPr/>
+          <p:nvPr/>
+        </p:nvSpPr>
+        <p:spPr>
+          <a:xfrm>
+            <a:off x="640080" y="1325880"/>
+            <a:ext cx="457200" cy="457200"/>
+          </a:xfrm>
+          <a:prstGeom prst="rect">
+            <a:avLst/>
+          </a:prstGeom>
+          <a:noFill/>
+          <a:ln/>
+        </p:spPr>
+        <p:txBody>
+          <a:bodyPr wrap="square" rtlCol="0" anchor="ctr"/>
+          <a:lstStyle/>
+          <a:p>
+            <a:pPr algn="ctr" indent="0" marL="0">
+              <a:buNone/>
+            </a:pPr>
+            <a:r>
+              <a:rPr lang="en-US" sz="2000" dirty="0">
+                <a:solidFill>
+                  <a:srgbClr val="2A9D8F"/>
+                </a:solidFill>
+                <a:latin typeface="Calibri" pitchFamily="34" charset="0"/>
+                <a:ea typeface="Calibri" pitchFamily="34" charset="-122"/>
+                <a:cs typeface="Calibri" pitchFamily="34" charset="-120"/>
+              </a:rPr>
+              <a:t>▶</a:t>
+            </a:r>
+            <a:endParaRPr lang="en-US" sz="2000" dirty="0"/>
+          </a:p>
+        </p:txBody>
+      </p:sp>
+      <p:sp>
+        <p:nvSpPr>
+          <p:cNvPr id="9" name="Text 7"/>
+          <p:cNvSpPr/>
+          <p:nvPr/>
+        </p:nvSpPr>
+        <p:spPr>
+          <a:xfrm>
+            <a:off x="1188720" y="1307592"/>
+            <a:ext cx="7132320" cy="411480"/>
+          </a:xfrm>
+          <a:prstGeom prst="rect">
+            <a:avLst/>
+          </a:prstGeom>
+          <a:noFill/>
+          <a:ln/>
+        </p:spPr>
+        <p:txBody>
+          <a:bodyPr wrap="square" rtlCol="0" anchor="ctr"/>
+          <a:lstStyle/>
+          <a:p>
+            <a:pPr indent="0" marL="0">
+              <a:buNone/>
+            </a:pPr>
+            <a:r>
+              <a:rPr lang="en-US" sz="1400" b="1" dirty="0">
+                <a:solidFill>
+                  <a:srgbClr val="1B2A4A"/>
+                </a:solidFill>
+                <a:latin typeface="Calibri" pitchFamily="34" charset="0"/>
+                <a:ea typeface="Calibri" pitchFamily="34" charset="-122"/>
+                <a:cs typeface="Calibri" pitchFamily="34" charset="-120"/>
+              </a:rPr>
+              <a:t>Continental Drift — Alfred Wegener</a:t>
+            </a:r>
+            <a:endParaRPr lang="en-US" sz="1400" dirty="0"/>
+          </a:p>
+        </p:txBody>
+      </p:sp>
+      <p:sp>
+        <p:nvSpPr>
+          <p:cNvPr id="10" name="Text 8"/>
+          <p:cNvSpPr/>
+          <p:nvPr/>
+        </p:nvSpPr>
+        <p:spPr>
+          <a:xfrm>
+            <a:off x="1188720" y="1691640"/>
+            <a:ext cx="7132320" cy="320040"/>
+          </a:xfrm>
+          <a:prstGeom prst="rect">
+            <a:avLst/>
+          </a:prstGeom>
+          <a:noFill/>
+          <a:ln/>
+        </p:spPr>
+        <p:txBody>
+          <a:bodyPr wrap="square" rtlCol="0" anchor="ctr"/>
+          <a:lstStyle/>
+          <a:p>
+            <a:pPr indent="0" marL="0">
+              <a:buNone/>
+            </a:pPr>
+            <a:r>
+              <a:rPr lang="en-US" sz="1100" dirty="0">
+                <a:solidFill>
+                  <a:srgbClr val="6B6660"/>
+                </a:solidFill>
+                <a:latin typeface="Calibri" pitchFamily="34" charset="0"/>
+                <a:ea typeface="Calibri" pitchFamily="34" charset="-122"/>
+                <a:cs typeface="Calibri" pitchFamily="34" charset="-120"/>
+              </a:rPr>
+              <a:t>FuseSchool  •  4 min</a:t>
+            </a:r>
+            <a:endParaRPr lang="en-US" sz="1100" dirty="0"/>
+          </a:p>
+        </p:txBody>
+      </p:sp>
+      <p:sp>
+        <p:nvSpPr>
+          <p:cNvPr id="11" name="Shape 9"/>
+          <p:cNvSpPr/>
+          <p:nvPr/>
+        </p:nvSpPr>
+        <p:spPr>
+          <a:xfrm>
+            <a:off x="457200" y="2423160"/>
+            <a:ext cx="8229600" cy="1051560"/>
+          </a:xfrm>
+          <a:prstGeom prst="rect">
+            <a:avLst/>
+          </a:prstGeom>
+          <a:solidFill>
+            <a:srgbClr val="FFFFFF"/>
+          </a:solidFill>
+          <a:ln/>
+          <a:effectLst>
+            <a:outerShdw sx="100000" sy="100000" kx="0" ky="0" algn="bl" rotWithShape="0" blurRad="76200" dist="25400" dir="8100000">
+              <a:srgbClr val="000000">
+                <a:alpha val="12000"/>
+              </a:srgbClr>
+            </a:outerShdw>
+          </a:effectLst>
+        </p:spPr>
+      </p:sp>
+      <p:sp>
+        <p:nvSpPr>
+          <p:cNvPr id="12" name="Shape 10"/>
+          <p:cNvSpPr/>
+          <p:nvPr/>
+        </p:nvSpPr>
+        <p:spPr>
+          <a:xfrm>
+            <a:off x="457200" y="2423160"/>
+            <a:ext cx="64008" cy="1051560"/>
+          </a:xfrm>
+          <a:prstGeom prst="rect">
+            <a:avLst/>
+          </a:prstGeom>
+          <a:solidFill>
+            <a:srgbClr val="2A9D8F"/>
+          </a:solidFill>
+          <a:ln/>
+        </p:spPr>
+      </p:sp>
+      <p:sp>
+        <p:nvSpPr>
+          <p:cNvPr id="13" name="Text 11"/>
+          <p:cNvSpPr/>
+          <p:nvPr/>
+        </p:nvSpPr>
+        <p:spPr>
+          <a:xfrm>
+            <a:off x="640080" y="2514600"/>
+            <a:ext cx="457200" cy="457200"/>
+          </a:xfrm>
+          <a:prstGeom prst="rect">
+            <a:avLst/>
+          </a:prstGeom>
+          <a:noFill/>
+          <a:ln/>
+        </p:spPr>
+        <p:txBody>
+          <a:bodyPr wrap="square" rtlCol="0" anchor="ctr"/>
+          <a:lstStyle/>
+          <a:p>
+            <a:pPr algn="ctr" indent="0" marL="0">
+              <a:buNone/>
+            </a:pPr>
+            <a:r>
+              <a:rPr lang="en-US" sz="2000" dirty="0">
+                <a:solidFill>
+                  <a:srgbClr val="2A9D8F"/>
+                </a:solidFill>
+                <a:latin typeface="Calibri" pitchFamily="34" charset="0"/>
+                <a:ea typeface="Calibri" pitchFamily="34" charset="-122"/>
+                <a:cs typeface="Calibri" pitchFamily="34" charset="-120"/>
+              </a:rPr>
+              <a:t>▶</a:t>
+            </a:r>
+            <a:endParaRPr lang="en-US" sz="2000" dirty="0"/>
+          </a:p>
+        </p:txBody>
+      </p:sp>
+      <p:sp>
+        <p:nvSpPr>
+          <p:cNvPr id="14" name="Text 12"/>
+          <p:cNvSpPr/>
+          <p:nvPr/>
+        </p:nvSpPr>
+        <p:spPr>
+          <a:xfrm>
+            <a:off x="1188720" y="2496312"/>
+            <a:ext cx="7132320" cy="411480"/>
+          </a:xfrm>
+          <a:prstGeom prst="rect">
+            <a:avLst/>
+          </a:prstGeom>
+          <a:noFill/>
+          <a:ln/>
+        </p:spPr>
+        <p:txBody>
+          <a:bodyPr wrap="square" rtlCol="0" anchor="ctr"/>
+          <a:lstStyle/>
+          <a:p>
+            <a:pPr indent="0" marL="0">
+              <a:buNone/>
+            </a:pPr>
+            <a:r>
+              <a:rPr lang="en-US" sz="1400" b="1" dirty="0">
+                <a:solidFill>
+                  <a:srgbClr val="1B2A4A"/>
+                </a:solidFill>
+                <a:latin typeface="Calibri" pitchFamily="34" charset="0"/>
+                <a:ea typeface="Calibri" pitchFamily="34" charset="-122"/>
+                <a:cs typeface="Calibri" pitchFamily="34" charset="-120"/>
+              </a:rPr>
+              <a:t>240 Million Years Ago to 250 Million Years in the Future</a:t>
+            </a:r>
+            <a:endParaRPr lang="en-US" sz="1400" dirty="0"/>
+          </a:p>
+        </p:txBody>
+      </p:sp>
+      <p:sp>
+        <p:nvSpPr>
+          <p:cNvPr id="15" name="Text 13"/>
+          <p:cNvSpPr/>
+          <p:nvPr/>
+        </p:nvSpPr>
+        <p:spPr>
+          <a:xfrm>
+            <a:off x="1188720" y="2880360"/>
+            <a:ext cx="7132320" cy="320040"/>
+          </a:xfrm>
+          <a:prstGeom prst="rect">
+            <a:avLst/>
+          </a:prstGeom>
+          <a:noFill/>
+          <a:ln/>
+        </p:spPr>
+        <p:txBody>
+          <a:bodyPr wrap="square" rtlCol="0" anchor="ctr"/>
+          <a:lstStyle/>
+          <a:p>
+            <a:pPr indent="0" marL="0">
+              <a:buNone/>
+            </a:pPr>
+            <a:r>
+              <a:rPr lang="en-US" sz="1100" dirty="0">
+                <a:solidFill>
+                  <a:srgbClr val="6B6660"/>
+                </a:solidFill>
+                <a:latin typeface="Calibri" pitchFamily="34" charset="0"/>
+                <a:ea typeface="Calibri" pitchFamily="34" charset="-122"/>
+                <a:cs typeface="Calibri" pitchFamily="34" charset="-120"/>
+              </a:rPr>
+              <a:t>Kurzgesagt  •  7 min</a:t>
+            </a:r>
+            <a:endParaRPr lang="en-US" sz="1100" dirty="0"/>
+          </a:p>
+        </p:txBody>
+      </p:sp>
+      <p:sp>
+        <p:nvSpPr>
+          <p:cNvPr id="16" name="Shape 14"/>
+          <p:cNvSpPr/>
+          <p:nvPr/>
+        </p:nvSpPr>
+        <p:spPr>
+          <a:xfrm>
+            <a:off x="457200" y="3611880"/>
+            <a:ext cx="8229600" cy="1051560"/>
+          </a:xfrm>
+          <a:prstGeom prst="rect">
+            <a:avLst/>
+          </a:prstGeom>
+          <a:solidFill>
+            <a:srgbClr val="FFFFFF"/>
+          </a:solidFill>
+          <a:ln/>
+          <a:effectLst>
+            <a:outerShdw sx="100000" sy="100000" kx="0" ky="0" algn="bl" rotWithShape="0" blurRad="76200" dist="25400" dir="8100000">
+              <a:srgbClr val="000000">
+                <a:alpha val="12000"/>
+              </a:srgbClr>
+            </a:outerShdw>
+          </a:effectLst>
+        </p:spPr>
+      </p:sp>
+      <p:sp>
+        <p:nvSpPr>
+          <p:cNvPr id="17" name="Shape 15"/>
+          <p:cNvSpPr/>
+          <p:nvPr/>
+        </p:nvSpPr>
+        <p:spPr>
+          <a:xfrm>
+            <a:off x="457200" y="3611880"/>
+            <a:ext cx="64008" cy="1051560"/>
+          </a:xfrm>
+          <a:prstGeom prst="rect">
+            <a:avLst/>
+          </a:prstGeom>
+          <a:solidFill>
+            <a:srgbClr val="2A9D8F"/>
+          </a:solidFill>
+          <a:ln/>
+        </p:spPr>
+      </p:sp>
+      <p:sp>
+        <p:nvSpPr>
+          <p:cNvPr id="18" name="Text 16"/>
+          <p:cNvSpPr/>
+          <p:nvPr/>
+        </p:nvSpPr>
+        <p:spPr>
+          <a:xfrm>
+            <a:off x="640080" y="3703320"/>
+            <a:ext cx="457200" cy="457200"/>
+          </a:xfrm>
+          <a:prstGeom prst="rect">
+            <a:avLst/>
+          </a:prstGeom>
+          <a:noFill/>
+          <a:ln/>
+        </p:spPr>
+        <p:txBody>
+          <a:bodyPr wrap="square" rtlCol="0" anchor="ctr"/>
+          <a:lstStyle/>
+          <a:p>
+            <a:pPr algn="ctr" indent="0" marL="0">
+              <a:buNone/>
+            </a:pPr>
+            <a:r>
+              <a:rPr lang="en-US" sz="2000" dirty="0">
+                <a:solidFill>
+                  <a:srgbClr val="2A9D8F"/>
+                </a:solidFill>
+                <a:latin typeface="Calibri" pitchFamily="34" charset="0"/>
+                <a:ea typeface="Calibri" pitchFamily="34" charset="-122"/>
+                <a:cs typeface="Calibri" pitchFamily="34" charset="-120"/>
+              </a:rPr>
+              <a:t>▶</a:t>
+            </a:r>
+            <a:endParaRPr lang="en-US" sz="2000" dirty="0"/>
+          </a:p>
+        </p:txBody>
+      </p:sp>
+      <p:sp>
+        <p:nvSpPr>
+          <p:cNvPr id="19" name="Text 17"/>
+          <p:cNvSpPr/>
+          <p:nvPr/>
+        </p:nvSpPr>
+        <p:spPr>
+          <a:xfrm>
+            <a:off x="1188720" y="3685032"/>
+            <a:ext cx="7132320" cy="411480"/>
+          </a:xfrm>
+          <a:prstGeom prst="rect">
+            <a:avLst/>
+          </a:prstGeom>
+          <a:noFill/>
+          <a:ln/>
+        </p:spPr>
+        <p:txBody>
+          <a:bodyPr wrap="square" rtlCol="0" anchor="ctr"/>
+          <a:lstStyle/>
+          <a:p>
+            <a:pPr indent="0" marL="0">
+              <a:buNone/>
+            </a:pPr>
+            <a:r>
+              <a:rPr lang="en-US" sz="1400" b="1" dirty="0">
+                <a:solidFill>
+                  <a:srgbClr val="1B2A4A"/>
+                </a:solidFill>
+                <a:latin typeface="Calibri" pitchFamily="34" charset="0"/>
+                <a:ea typeface="Calibri" pitchFamily="34" charset="-122"/>
+                <a:cs typeface="Calibri" pitchFamily="34" charset="-120"/>
+              </a:rPr>
+              <a:t>Pangaea — the Supercontinent</a:t>
+            </a:r>
+            <a:endParaRPr lang="en-US" sz="1400" dirty="0"/>
+          </a:p>
+        </p:txBody>
+      </p:sp>
+      <p:sp>
+        <p:nvSpPr>
+          <p:cNvPr id="20" name="Text 18"/>
+          <p:cNvSpPr/>
+          <p:nvPr/>
+        </p:nvSpPr>
+        <p:spPr>
+          <a:xfrm>
+            <a:off x="1188720" y="4069080"/>
+            <a:ext cx="7132320" cy="320040"/>
+          </a:xfrm>
+          <a:prstGeom prst="rect">
+            <a:avLst/>
+          </a:prstGeom>
+          <a:noFill/>
+          <a:ln/>
+        </p:spPr>
+        <p:txBody>
+          <a:bodyPr wrap="square" rtlCol="0" anchor="ctr"/>
+          <a:lstStyle/>
+          <a:p>
+            <a:pPr indent="0" marL="0">
+              <a:buNone/>
+            </a:pPr>
+            <a:r>
+              <a:rPr lang="en-US" sz="1100" dirty="0">
+                <a:solidFill>
+                  <a:srgbClr val="6B6660"/>
+                </a:solidFill>
+                <a:latin typeface="Calibri" pitchFamily="34" charset="0"/>
+                <a:ea typeface="Calibri" pitchFamily="34" charset="-122"/>
+                <a:cs typeface="Calibri" pitchFamily="34" charset="-120"/>
+              </a:rPr>
+              <a:t>It's AumSum Time  •  5 min</a:t>
+            </a:r>
+            <a:endParaRPr lang="en-US" sz="1100" dirty="0"/>
+          </a:p>
+        </p:txBody>
+      </p:sp>
+    </p:spTree>
+  </p:cSld>
+  <p:clrMapOvr>
+    <a:masterClrMapping/>
+  </p:clrMapOvr>
+</p:sld>
+</file>
+
+<file path=ppt/slides/slide8.xml><?xml version="1.0" encoding="utf-8"?>
+<p:sld xmlns:a="http://schemas.openxmlformats.org/drawingml/2006/main" xmlns:r="http://schemas.openxmlformats.org/officeDocument/2006/relationships" xmlns:p="http://schemas.openxmlformats.org/presentationml/2006/main">
+  <p:cSld name="Slide 8">
+    <p:spTree>
+      <p:nvGrpSpPr>
+        <p:cNvPr id="1" name=""/>
+        <p:cNvGrpSpPr/>
+        <p:nvPr/>
+      </p:nvGrpSpPr>
+      <p:grpSpPr>
+        <a:xfrm>
+          <a:off x="0" y="0"/>
+          <a:ext cx="0" cy="0"/>
+          <a:chOff x="0" y="0"/>
+          <a:chExt cx="0" cy="0"/>
+        </a:xfrm>
+      </p:grpSpPr>
+      <p:sp>
+        <p:nvSpPr>
+          <p:cNvPr id="2" name="Shape 0"/>
+          <p:cNvSpPr/>
+          <p:nvPr/>
+        </p:nvSpPr>
+        <p:spPr>
+          <a:xfrm>
+            <a:off x="0" y="0"/>
+            <a:ext cx="9144000" cy="5143500"/>
+          </a:xfrm>
+          <a:prstGeom prst="rect">
+            <a:avLst/>
+          </a:prstGeom>
+          <a:solidFill>
+            <a:srgbClr val="1B2A4A"/>
+          </a:solidFill>
+          <a:ln/>
+        </p:spPr>
+      </p:sp>
+      <p:sp>
+        <p:nvSpPr>
+          <p:cNvPr id="3" name="Shape 1"/>
+          <p:cNvSpPr/>
+          <p:nvPr/>
+        </p:nvSpPr>
+        <p:spPr>
+          <a:xfrm>
+            <a:off x="0" y="4777740"/>
+            <a:ext cx="9144000" cy="365760"/>
+          </a:xfrm>
+          <a:prstGeom prst="rect">
+            <a:avLst/>
+          </a:prstGeom>
+          <a:solidFill>
+            <a:srgbClr val="2A9D8F"/>
+          </a:solidFill>
+          <a:ln/>
+        </p:spPr>
+      </p:sp>
+      <p:sp>
+        <p:nvSpPr>
+          <p:cNvPr id="4" name="Text 2"/>
+          <p:cNvSpPr/>
+          <p:nvPr/>
+        </p:nvSpPr>
+        <p:spPr>
+          <a:xfrm>
+            <a:off x="731520" y="1371600"/>
+            <a:ext cx="7680960" cy="914400"/>
+          </a:xfrm>
+          <a:prstGeom prst="rect">
+            <a:avLst/>
+          </a:prstGeom>
+          <a:noFill/>
+          <a:ln/>
+        </p:spPr>
+        <p:txBody>
+          <a:bodyPr wrap="square" rtlCol="0" anchor="ctr"/>
+          <a:lstStyle/>
+          <a:p>
+            <a:pPr algn="ctr" indent="0" marL="0">
+              <a:buNone/>
+            </a:pPr>
+            <a:r>
+              <a:rPr lang="en-US" sz="3600" b="1" dirty="0">
+                <a:solidFill>
+                  <a:srgbClr val="FFFFFF"/>
+                </a:solidFill>
+                <a:latin typeface="Georgia" pitchFamily="34" charset="0"/>
+                <a:ea typeface="Georgia" pitchFamily="34" charset="-122"/>
+                <a:cs typeface="Georgia" pitchFamily="34" charset="-120"/>
+              </a:rPr>
+              <a:t>Review &amp; Practise</a:t>
+            </a:r>
+            <a:endParaRPr lang="en-US" sz="3600" dirty="0"/>
+          </a:p>
+        </p:txBody>
+      </p:sp>
+      <p:sp>
+        <p:nvSpPr>
+          <p:cNvPr id="5" name="Text 3"/>
+          <p:cNvSpPr/>
+          <p:nvPr/>
+        </p:nvSpPr>
+        <p:spPr>
+          <a:xfrm>
+            <a:off x="731520" y="2560320"/>
+            <a:ext cx="7680960" cy="548640"/>
+          </a:xfrm>
+          <a:prstGeom prst="rect">
+            <a:avLst/>
+          </a:prstGeom>
+          <a:noFill/>
+          <a:ln/>
+        </p:spPr>
+        <p:txBody>
+          <a:bodyPr wrap="square" rtlCol="0" anchor="ctr"/>
+          <a:lstStyle/>
+          <a:p>
+            <a:pPr algn="ctr" indent="0" marL="0">
+              <a:buNone/>
+            </a:pPr>
+            <a:r>
+              <a:rPr lang="en-US" sz="2000" dirty="0">
+                <a:solidFill>
+                  <a:srgbClr val="2A9D8F"/>
+                </a:solidFill>
+                <a:latin typeface="Calibri" pitchFamily="34" charset="0"/>
+                <a:ea typeface="Calibri" pitchFamily="34" charset="-122"/>
+                <a:cs typeface="Calibri" pitchFamily="34" charset="-120"/>
+              </a:rPr>
               <a:t>mrzocchi.com</a:t>
             </a:r>
-            <a:endParaRPr lang="en-US" sz="1100" dirty="0"/>
+            <a:endParaRPr lang="en-US" sz="2000" dirty="0"/>
           </a:p>
         </p:txBody>
       </p:sp>
